--- a/lecons/F1/03_F1_M1_PW01_Representation_of_the_Earth_s_Shape_and_Size.pptx
+++ b/lecons/F1/03_F1_M1_PW01_Representation_of_the_Earth_s_Shape_and_Size.pptx
@@ -57,9 +57,17 @@
     <p:sldId id="305" r:id="rId51"/>
     <p:sldId id="306" r:id="rId52"/>
     <p:sldId id="307" r:id="rId53"/>
+    <p:sldId id="308" r:id="rId54"/>
+    <p:sldId id="309" r:id="rId55"/>
+    <p:sldId id="310" r:id="rId56"/>
+    <p:sldId id="311" r:id="rId57"/>
+    <p:sldId id="312" r:id="rId58"/>
+    <p:sldId id="313" r:id="rId59"/>
+    <p:sldId id="314" r:id="rId60"/>
+    <p:sldId id="315" r:id="rId61"/>
   </p:sldIdLst>
   <p:notesMasterIdLst>
-    <p:notesMasterId r:id="rId54"/>
+    <p:notesMasterId r:id="rId62"/>
   </p:notesMasterIdLst>
   <p:sldSz cx="12192000" cy="6858000"/>
   <p:notesSz cx="6858000" cy="12192000"/>
@@ -641,7 +649,7 @@
           <a:p>
             <a:r>
               <a:rPr lang="en-US" dirty="0"/>
-              <a:t>Question 1: What is the problem in the situation? Think for a moment, then raise your hand to answer.</a:t>
+              <a:t>Listen carefully to this situation from real life. Mariam wants to know how far Garoua is from Maroua. On her map, the two towns are 6 cm apart. She asks her father: "How can I change these 6 centimetres into the real distance in kilometres?" Think about it, because I am going to ask you some questions.</a:t>
             </a:r>
             <a:endParaRPr lang="en-US" dirty="0"/>
           </a:p>
@@ -729,7 +737,7 @@
           <a:p>
             <a:r>
               <a:rPr lang="en-US" dirty="0"/>
-              <a:t>Good. Mariam cannot change the map distance into a real distance.</a:t>
+              <a:t>Question 1: What is the problem in the situation? Think for a moment, then raise your hand to answer.</a:t>
             </a:r>
             <a:endParaRPr lang="en-US" dirty="0"/>
           </a:p>
@@ -817,7 +825,7 @@
           <a:p>
             <a:r>
               <a:rPr lang="en-US" dirty="0"/>
-              <a:t>Question 2: Which part of the map helps her? Think for a moment, then raise your hand to answer.</a:t>
+              <a:t>Good. Mariam does not know how to change a distance on the map into a real distance.</a:t>
             </a:r>
             <a:endParaRPr lang="en-US" dirty="0"/>
           </a:p>
@@ -905,7 +913,7 @@
           <a:p>
             <a:r>
               <a:rPr lang="en-US" dirty="0"/>
-              <a:t>Good. The scale.</a:t>
+              <a:t>Question 2: Which part of the map helps her? Think for a moment, then raise your hand to answer.</a:t>
             </a:r>
             <a:endParaRPr lang="en-US" dirty="0"/>
           </a:p>
@@ -993,7 +1001,7 @@
           <a:p>
             <a:r>
               <a:rPr lang="en-US" dirty="0"/>
-              <a:t>Question 3: What else is written around a map? Think for a moment, then raise your hand to answer.</a:t>
+              <a:t>Good. The scale.</a:t>
             </a:r>
             <a:endParaRPr lang="en-US" dirty="0"/>
           </a:p>
@@ -1081,7 +1089,7 @@
           <a:p>
             <a:r>
               <a:rPr lang="en-US" dirty="0"/>
-              <a:t>Good. The title, the key and the north arrow.</a:t>
+              <a:t>Question 3: What else is written around a map? Think for a moment, then raise your hand to answer.</a:t>
             </a:r>
             <a:endParaRPr lang="en-US" dirty="0"/>
           </a:p>
@@ -1169,7 +1177,7 @@
           <a:p>
             <a:r>
               <a:rPr lang="en-US" dirty="0"/>
-              <a:t>From this situation, the action we are working towards in this lesson is the following: always read the title, the key and the scale before using a map.</a:t>
+              <a:t>Good. The title, the key, the north arrow and the grid lines.</a:t>
             </a:r>
             <a:endParaRPr lang="en-US" dirty="0"/>
           </a:p>
@@ -1257,7 +1265,7 @@
           <a:p>
             <a:r>
               <a:rPr lang="en-US" dirty="0"/>
-              <a:t>Why is this lesson important for you? This practical work helps us to read maps correctly and to calculate real distances.</a:t>
+              <a:t>From this situation, the action we are working towards in this lesson is the following: always read the title, the key and the scale before using a map.</a:t>
             </a:r>
             <a:endParaRPr lang="en-US" dirty="0"/>
           </a:p>
@@ -1345,7 +1353,7 @@
           <a:p>
             <a:r>
               <a:rPr lang="en-US" dirty="0"/>
-              <a:t>Activity 1. Look carefully at this picture: the round Earth. Observe every detail before I ask the question.</a:t>
+              <a:t>Why is this lesson important for you? This practical work helps us to read maps correctly and to calculate real distances.</a:t>
             </a:r>
             <a:endParaRPr lang="en-US" dirty="0"/>
           </a:p>
@@ -1433,7 +1441,7 @@
           <a:p>
             <a:r>
               <a:rPr lang="en-US" dirty="0"/>
-              <a:t>Here is the question for Activity 1: What is the best model of the round Earth, and why do we also use flat maps? Take one minute to think and write your answer in your rough notebook.</a:t>
+              <a:t>Activity 1. Look carefully at this diagram: a round model of the Earth. Observe every detail before I ask the question.</a:t>
             </a:r>
             <a:endParaRPr lang="en-US" dirty="0"/>
           </a:p>
@@ -1609,7 +1617,7 @@
           <a:p>
             <a:r>
               <a:rPr lang="en-US" dirty="0"/>
-              <a:t>Let us check the answer together. The globe is the best model; flat maps are easier to carry and show more details.</a:t>
+              <a:t>Here is the question for Activity 1: What is this round model of the Earth called? Take one minute to think and write your answer in your rough notebook.</a:t>
             </a:r>
             <a:endParaRPr lang="en-US" dirty="0"/>
           </a:p>
@@ -1697,7 +1705,7 @@
           <a:p>
             <a:r>
               <a:rPr lang="en-US" dirty="0"/>
-              <a:t>Activity 2. Look carefully at this diagram: a world map. Observe every detail before I ask the question.</a:t>
+              <a:t>Let us check the answer together. It is a globe.</a:t>
             </a:r>
             <a:endParaRPr lang="en-US" dirty="0"/>
           </a:p>
@@ -1785,7 +1793,7 @@
           <a:p>
             <a:r>
               <a:rPr lang="en-US" dirty="0"/>
-              <a:t>Here is the question for Activity 2: What happens to the shapes of the continents when the round Earth is drawn on a flat map? Take one minute to think and write your answer in your rough notebook.</a:t>
+              <a:t>Activity 2. Look carefully at this diagram: the Earth drawn on flat surfaces. Observe every detail before I ask the question.</a:t>
             </a:r>
             <a:endParaRPr lang="en-US" dirty="0"/>
           </a:p>
@@ -1873,7 +1881,7 @@
           <a:p>
             <a:r>
               <a:rPr lang="en-US" dirty="0"/>
-              <a:t>Let us check the answer together. Some shapes and sizes are changed (distorted), especially near the poles; the way of drawing is called a projection.</a:t>
+              <a:t>Here is the question for Activity 2: Compare these three world maps. Are the shapes of the continents the same? Take one minute to think and write your answer in your rough notebook.</a:t>
             </a:r>
             <a:endParaRPr lang="en-US" dirty="0"/>
           </a:p>
@@ -1961,7 +1969,7 @@
           <a:p>
             <a:r>
               <a:rPr lang="en-US" dirty="0"/>
-              <a:t>Activity 3. Look carefully at this diagram: the marginal information of a map. Observe every detail before I ask the question.</a:t>
+              <a:t>Let us check the answer together. No, the shapes and sizes of the continents change from one map to another.</a:t>
             </a:r>
             <a:endParaRPr lang="en-US" dirty="0"/>
           </a:p>
@@ -2049,7 +2057,7 @@
           <a:p>
             <a:r>
               <a:rPr lang="en-US" dirty="0"/>
-              <a:t>Here is the question for Activity 3: Name the elements written around a map. Take one minute to think and write your answer in your rough notebook.</a:t>
+              <a:t>Here is the next question: Why are they different? Take one minute to think and write your answer in your rough notebook.</a:t>
             </a:r>
             <a:endParaRPr lang="en-US" dirty="0"/>
           </a:p>
@@ -2137,7 +2145,7 @@
           <a:p>
             <a:r>
               <a:rPr lang="en-US" dirty="0"/>
-              <a:t>Let us check the answer together. The title, the key, the scale, the north arrow, the frame and the grid lines.</a:t>
+              <a:t>Let us check the answer together. Because the round Earth is drawn on a flat surface in different ways, called projections.</a:t>
             </a:r>
             <a:endParaRPr lang="en-US" dirty="0"/>
           </a:p>
@@ -2225,7 +2233,7 @@
           <a:p>
             <a:r>
               <a:rPr lang="en-US" dirty="0"/>
-              <a:t>Activity 4. Look carefully at this diagram: types of scale. Observe every detail before I ask the question.</a:t>
+              <a:t>Activity 3. Look carefully at this diagram: a map and the information around it. Observe every detail before I ask the question.</a:t>
             </a:r>
             <a:endParaRPr lang="en-US" dirty="0"/>
           </a:p>
@@ -2313,7 +2321,7 @@
           <a:p>
             <a:r>
               <a:rPr lang="en-US" dirty="0"/>
-              <a:t>Here is the question for Activity 4: On a map of scale 1 cm to 25 km, Garoua and Maroua are 6 cm apart. What is the real distance? Take one minute to think and write your answer in your rough notebook.</a:t>
+              <a:t>Here is the question for Activity 3: Name the elements written around this map. Take one minute to think and write your answer in your rough notebook.</a:t>
             </a:r>
             <a:endParaRPr lang="en-US" dirty="0"/>
           </a:p>
@@ -2401,7 +2409,7 @@
           <a:p>
             <a:r>
               <a:rPr lang="en-US" dirty="0"/>
-              <a:t>Let us check the answer together. 6 × 25 = 150 km.</a:t>
+              <a:t>Let us check the answer together. The title, the key, the scale, the north arrow, the frame and the grid lines.</a:t>
             </a:r>
             <a:endParaRPr lang="en-US" dirty="0"/>
           </a:p>
@@ -2577,7 +2585,7 @@
           <a:p>
             <a:r>
               <a:rPr lang="en-US" dirty="0"/>
-              <a:t>Activity 5. Look carefully at this diagram: a map of Cameroon with grid lines. Observe every detail before I ask the question.</a:t>
+              <a:t>Activity 4. Look carefully at this diagram: ways of writing the scale of a map. Observe every detail before I ask the question.</a:t>
             </a:r>
             <a:endParaRPr lang="en-US" dirty="0"/>
           </a:p>
@@ -2665,7 +2673,7 @@
           <a:p>
             <a:r>
               <a:rPr lang="en-US" dirty="0"/>
-              <a:t>Here is the question for Activity 5: Which elements help us to find directions on this map? Take one minute to think and write your answer in your rough notebook.</a:t>
+              <a:t>Here is the question for Activity 4: What does the scale "1 cm to 25 km" mean? Take one minute to think and write your answer in your rough notebook.</a:t>
             </a:r>
             <a:endParaRPr lang="en-US" dirty="0"/>
           </a:p>
@@ -2753,7 +2761,7 @@
           <a:p>
             <a:r>
               <a:rPr lang="en-US" dirty="0"/>
-              <a:t>Let us check the answer together. The north arrow and the cardinal points (N, S, E, W).</a:t>
+              <a:t>Let us check the answer together. One centimetre on the map represents 25 kilometres on the ground.</a:t>
             </a:r>
             <a:endParaRPr lang="en-US" dirty="0"/>
           </a:p>
@@ -2841,7 +2849,7 @@
           <a:p>
             <a:r>
               <a:rPr lang="en-US" dirty="0"/>
-              <a:t>Now we are going to copy the board summary. Write the title and the headings neatly in your notebooks. I will give you enough time for each slide, so do not rush.</a:t>
+              <a:t>Activity 5. Look carefully at this diagram: a map of Cameroon. Observe every detail before I ask the question.</a:t>
             </a:r>
             <a:endParaRPr lang="en-US" dirty="0"/>
           </a:p>
@@ -2929,7 +2937,7 @@
           <a:p>
             <a:r>
               <a:rPr lang="en-US" dirty="0"/>
-              <a:t>Let us copy the definitions. The key terms of this lesson are defined as follows. On this slide we have Globe and Map. Write each point on a new line, with the key term first, and explain it in your own words when we revise.</a:t>
+              <a:t>Here is the question for Activity 5: With a scale of 1 cm to 25 km, Garoua and Maroua are 6 cm apart. What is the real distance? Take one minute to think and write your answer in your rough notebook.</a:t>
             </a:r>
             <a:endParaRPr lang="en-US" dirty="0"/>
           </a:p>
@@ -3017,7 +3025,7 @@
           <a:p>
             <a:r>
               <a:rPr lang="en-US" dirty="0"/>
-              <a:t>Let us copy Forms of Representation of the Earth. The Earth is represented in the following ways. On this slide we have Globe and World map. Write each point on a new line, with the key term first, and explain it in your own words when we revise. When you finish, we go to the next slide.</a:t>
+              <a:t>Let us check the answer together. 6 × 25 = 150 km.</a:t>
             </a:r>
             <a:endParaRPr lang="en-US" dirty="0"/>
           </a:p>
@@ -3105,7 +3113,7 @@
           <a:p>
             <a:r>
               <a:rPr lang="en-US" dirty="0"/>
-              <a:t>We continue with Forms of Representation of the Earth. On this slide we have Projection. Write each point on a new line, with the key term first, and explain it in your own words when we revise.</a:t>
+              <a:t>Now we are going to copy the board summary. Write the title and the headings neatly in your notebooks. I will give you enough time for each slide, so do not rush.</a:t>
             </a:r>
             <a:endParaRPr lang="en-US" dirty="0"/>
           </a:p>
@@ -3193,7 +3201,7 @@
           <a:p>
             <a:r>
               <a:rPr lang="en-US" dirty="0"/>
-              <a:t>Let us copy Marginal Information on Maps. A good map has the following elements. On this slide we have Title, Key and Scale. Write each point on a new line, with the key term first, and explain it in your own words when we revise. When you finish, we go to the next slide.</a:t>
+              <a:t>Let us copy the definitions. The key terms of this lesson are defined as follows. On this slide we have Globe and Map. Write each point on a new line, with the key term first, and explain it in your own words when we revise. When you finish, we go to the next slide.</a:t>
             </a:r>
             <a:endParaRPr lang="en-US" dirty="0"/>
           </a:p>
@@ -3281,7 +3289,7 @@
           <a:p>
             <a:r>
               <a:rPr lang="en-US" dirty="0"/>
-              <a:t>We continue with Marginal Information on Maps. On this slide we have North arrow and grid lines. Write each point on a new line, with the key term first, and explain it in your own words when we revise.</a:t>
+              <a:t>We continue with the definitions. On this slide we have Projection. Write each point on a new line, with the key term first, and explain it in your own words when we revise.</a:t>
             </a:r>
             <a:endParaRPr lang="en-US" dirty="0"/>
           </a:p>
@@ -3369,7 +3377,7 @@
           <a:p>
             <a:r>
               <a:rPr lang="en-US" dirty="0"/>
-              <a:t>Now draw this illustration in your notebook: marginal information of a map. Give it a title and label it clearly.</a:t>
+              <a:t>Let us copy Forms of Representation of the Earth. The Earth is represented in the following forms. Copy the point on The globe on the left, then draw the diagram on the right: the globe. Give it a title and label it clearly.</a:t>
             </a:r>
             <a:endParaRPr lang="en-US" dirty="0"/>
           </a:p>
@@ -3545,7 +3553,7 @@
           <a:p>
             <a:r>
               <a:rPr lang="en-US" dirty="0"/>
-              <a:t>Let us copy Calculating Distances. We calculate a real distance as follows. On this slide we have Method and Example. Write each point on a new line, with the key term first, and explain it in your own words when we revise.</a:t>
+              <a:t>Copy the point on The world map on the left, then draw the diagram on the right: a world map. Give it a title and label it clearly.</a:t>
             </a:r>
             <a:endParaRPr lang="en-US" dirty="0"/>
           </a:p>
@@ -3633,7 +3641,7 @@
           <a:p>
             <a:r>
               <a:rPr lang="en-US" dirty="0"/>
-              <a:t>Now let us check what you have understood. Question 1: Name four elements of the marginal information of a map. Answer in your exercise book.</a:t>
+              <a:t>Copy the point on Map projections on the left, then draw the diagram on the right: three map projections. Give it a title and label it clearly.</a:t>
             </a:r>
             <a:endParaRPr lang="en-US" dirty="0"/>
           </a:p>
@@ -3721,7 +3729,7 @@
           <a:p>
             <a:r>
               <a:rPr lang="en-US" dirty="0"/>
-              <a:t>The expected answer is: the title, the key, the scale and the north arrow. If you got it right, well done.</a:t>
+              <a:t>Let us copy Marginal Information on Maps. A map has the following marginal information. On this slide we have Title. Write each point on a new line, with the key term first, and explain it in your own words when we revise.</a:t>
             </a:r>
             <a:endParaRPr lang="en-US" dirty="0"/>
           </a:p>
@@ -3809,7 +3817,7 @@
           <a:p>
             <a:r>
               <a:rPr lang="en-US" dirty="0"/>
-              <a:t>Now let us check what you have understood. Question 2: On a map of 1 cm to 10 km, two towns are 4.5 cm apart. Find the real distance. Answer in your exercise book.</a:t>
+              <a:t>Copy the point on Key (legend) on the left, then draw the diagram on the right: signs explained in a key. Give it a title and label it clearly.</a:t>
             </a:r>
             <a:endParaRPr lang="en-US" dirty="0"/>
           </a:p>
@@ -3897,7 +3905,7 @@
           <a:p>
             <a:r>
               <a:rPr lang="en-US" dirty="0"/>
-              <a:t>The expected answer is: 4.5 × 10 = 45 km. If you got it right, well done.</a:t>
+              <a:t>Copy the point on Scale on the left, then draw the diagram on the right: ways of writing a scale. Give it a title and label it clearly.</a:t>
             </a:r>
             <a:endParaRPr lang="en-US" dirty="0"/>
           </a:p>
@@ -3985,7 +3993,7 @@
           <a:p>
             <a:r>
               <a:rPr lang="en-US" dirty="0"/>
-              <a:t>For those who need more practice, fill in the blanks in your exercise book. The answers are: number 1, globe; number 2, key; number 3, scale.</a:t>
+              <a:t>Copy the point on Cardinal points and north arrow on the left, then draw the diagram on the right: the cardinal points. Give it a title and label it clearly.</a:t>
             </a:r>
             <a:endParaRPr lang="en-US" dirty="0"/>
           </a:p>
@@ -4073,7 +4081,7 @@
           <a:p>
             <a:r>
               <a:rPr lang="en-US" dirty="0"/>
-              <a:t>For your homework: On the map of Cameroon in your atlas, measure the distance from Garoua to Ngaoundéré and change it into kilometres with the scale. We shall correct it at the beginning of our next lesson.</a:t>
+              <a:t>Copy the point on Grid lines, latitudes and longitudes on the left, then draw the diagram on the right: grid lines on a map of Cameroon. Give it a title and label it clearly.</a:t>
             </a:r>
             <a:endParaRPr lang="en-US" dirty="0"/>
           </a:p>
@@ -4161,7 +4169,7 @@
           <a:p>
             <a:r>
               <a:rPr lang="en-US" dirty="0"/>
-              <a:t>Our next lesson will be on Practical Work 2: Locate a Place on a Map. Thank you for your attention, and see you next time.</a:t>
+              <a:t>Let us copy Reading the Scale and Calculating Distances. We calculate a real distance in the following steps. On this slide we have Step 1 and Step 2. Write each point on a new line, with the key term first, and explain it in your own words when we revise. When you finish, we go to the next slide.</a:t>
             </a:r>
             <a:endParaRPr lang="en-US" dirty="0"/>
           </a:p>
@@ -4249,7 +4257,7 @@
           <a:p>
             <a:r>
               <a:rPr lang="en-US" dirty="0"/>
-              <a:t>Let us play the bilingual game. I say a word in English, and you give me the French word. Then we do the reverse.</a:t>
+              <a:t>We continue with Reading the Scale and Calculating Distances. On this slide we have Step 3 and Example. Write each point on a new line, with the key term first, and explain it in your own words when we revise.</a:t>
             </a:r>
             <a:endParaRPr lang="en-US" dirty="0"/>
           </a:p>
@@ -4337,7 +4345,7 @@
           <a:p>
             <a:r>
               <a:rPr lang="en-US" dirty="0"/>
-              <a:t>I record this information in the official logbook of the class after the lesson.</a:t>
+              <a:t>Now let us check what you have understood. Question 1: Name four elements of the marginal information of a map. Answer in your exercise book.</a:t>
             </a:r>
             <a:endParaRPr lang="en-US" dirty="0"/>
           </a:p>
@@ -4513,7 +4521,7 @@
           <a:p>
             <a:r>
               <a:rPr lang="en-US" dirty="0"/>
-              <a:t>I complete the second page of the logbook: the matter taught, the evaluation, the homework and the attendance.</a:t>
+              <a:t>The expected answer is: the title, the key, the scale and the north arrow. If you got it right, well done.</a:t>
             </a:r>
             <a:endParaRPr lang="en-US" dirty="0"/>
           </a:p>
@@ -4601,7 +4609,7 @@
           <a:p>
             <a:r>
               <a:rPr lang="en-US" dirty="0"/>
-              <a:t>This slide is for me, the teacher: it gives the timing of the lesson and what to do if the projector is not available.</a:t>
+              <a:t>Now let us check what you have understood. Question 2: On a map of 1 cm to 10 km, two towns are 4.5 cm apart. Find the real distance. Answer in your exercise book.</a:t>
             </a:r>
             <a:endParaRPr lang="en-US" dirty="0"/>
           </a:p>
@@ -4689,7 +4697,7 @@
           <a:p>
             <a:r>
               <a:rPr lang="en-US" dirty="0"/>
-              <a:t>These are the references and picture credits used to prepare this lesson.</a:t>
+              <a:t>The expected answer is: 4.5 × 10 = 45 km. If you got it right, well done.</a:t>
             </a:r>
             <a:endParaRPr lang="en-US" dirty="0"/>
           </a:p>
@@ -4713,6 +4721,622 @@
             <a:fld id="{F7021451-1387-4CA6-816F-3879F97B5CBC}" type="slidenum">
               <a:rPr lang="en-US"/>
               <a:t>52</a:t>
+            </a:fld>
+            <a:endParaRPr lang="en-US"/>
+          </a:p>
+        </p:txBody>
+      </p:sp>
+    </p:spTree>
+    <p:extLst>
+      <p:ext uri="{BB962C8B-B14F-4D97-AF65-F5344CB8AC3E}">
+        <p14:creationId xmlns:p14="http://schemas.microsoft.com/office/powerpoint/2010/main" val="1024086991"/>
+      </p:ext>
+    </p:extLst>
+  </p:cSld>
+  <p:clrMapOvr>
+    <a:masterClrMapping/>
+  </p:clrMapOvr>
+</p:notes>
+</file>
+
+<file path=ppt/notesSlides/notesSlide53.xml><?xml version="1.0" encoding="utf-8"?>
+<p:notes xmlns:a="http://schemas.openxmlformats.org/drawingml/2006/main" xmlns:r="http://schemas.openxmlformats.org/officeDocument/2006/relationships" xmlns:p="http://schemas.openxmlformats.org/presentationml/2006/main">
+  <p:cSld>
+    <p:spTree>
+      <p:nvGrpSpPr>
+        <p:cNvPr id="1" name=""/>
+        <p:cNvGrpSpPr/>
+        <p:nvPr/>
+      </p:nvGrpSpPr>
+      <p:grpSpPr>
+        <a:xfrm>
+          <a:off x="0" y="0"/>
+          <a:ext cx="0" cy="0"/>
+          <a:chOff x="0" y="0"/>
+          <a:chExt cx="0" cy="0"/>
+        </a:xfrm>
+      </p:grpSpPr>
+      <p:sp>
+        <p:nvSpPr>
+          <p:cNvPr id="2" name="Slide Image Placeholder 1"/>
+          <p:cNvSpPr>
+            <a:spLocks noGrp="1" noRot="1" noChangeAspect="1"/>
+          </p:cNvSpPr>
+          <p:nvPr>
+            <p:ph type="sldImg"/>
+          </p:nvPr>
+        </p:nvSpPr>
+        <p:spPr/>
+      </p:sp>
+      <p:sp>
+        <p:nvSpPr>
+          <p:cNvPr id="3" name="Notes Placeholder 2"/>
+          <p:cNvSpPr>
+            <a:spLocks noGrp="1"/>
+          </p:cNvSpPr>
+          <p:nvPr>
+            <p:ph type="body" idx="1"/>
+          </p:nvPr>
+        </p:nvSpPr>
+        <p:spPr/>
+        <p:txBody>
+          <a:bodyPr/>
+          <a:lstStyle/>
+          <a:p>
+            <a:r>
+              <a:rPr lang="en-US" dirty="0"/>
+              <a:t>For those who need more practice, fill in the blanks in your exercise book. The answers are: number 1, globe; number 2, key; number 3, scale.</a:t>
+            </a:r>
+            <a:endParaRPr lang="en-US" dirty="0"/>
+          </a:p>
+        </p:txBody>
+      </p:sp>
+      <p:sp>
+        <p:nvSpPr>
+          <p:cNvPr id="4" name="Slide Number Placeholder 3"/>
+          <p:cNvSpPr>
+            <a:spLocks noGrp="1"/>
+          </p:cNvSpPr>
+          <p:nvPr>
+            <p:ph type="sldNum" sz="quarter" idx="10"/>
+          </p:nvPr>
+        </p:nvSpPr>
+        <p:spPr/>
+        <p:txBody>
+          <a:bodyPr/>
+          <a:lstStyle/>
+          <a:p>
+            <a:fld id="{F7021451-1387-4CA6-816F-3879F97B5CBC}" type="slidenum">
+              <a:rPr lang="en-US"/>
+              <a:t>53</a:t>
+            </a:fld>
+            <a:endParaRPr lang="en-US"/>
+          </a:p>
+        </p:txBody>
+      </p:sp>
+    </p:spTree>
+    <p:extLst>
+      <p:ext uri="{BB962C8B-B14F-4D97-AF65-F5344CB8AC3E}">
+        <p14:creationId xmlns:p14="http://schemas.microsoft.com/office/powerpoint/2010/main" val="1024086991"/>
+      </p:ext>
+    </p:extLst>
+  </p:cSld>
+  <p:clrMapOvr>
+    <a:masterClrMapping/>
+  </p:clrMapOvr>
+</p:notes>
+</file>
+
+<file path=ppt/notesSlides/notesSlide54.xml><?xml version="1.0" encoding="utf-8"?>
+<p:notes xmlns:a="http://schemas.openxmlformats.org/drawingml/2006/main" xmlns:r="http://schemas.openxmlformats.org/officeDocument/2006/relationships" xmlns:p="http://schemas.openxmlformats.org/presentationml/2006/main">
+  <p:cSld>
+    <p:spTree>
+      <p:nvGrpSpPr>
+        <p:cNvPr id="1" name=""/>
+        <p:cNvGrpSpPr/>
+        <p:nvPr/>
+      </p:nvGrpSpPr>
+      <p:grpSpPr>
+        <a:xfrm>
+          <a:off x="0" y="0"/>
+          <a:ext cx="0" cy="0"/>
+          <a:chOff x="0" y="0"/>
+          <a:chExt cx="0" cy="0"/>
+        </a:xfrm>
+      </p:grpSpPr>
+      <p:sp>
+        <p:nvSpPr>
+          <p:cNvPr id="2" name="Slide Image Placeholder 1"/>
+          <p:cNvSpPr>
+            <a:spLocks noGrp="1" noRot="1" noChangeAspect="1"/>
+          </p:cNvSpPr>
+          <p:nvPr>
+            <p:ph type="sldImg"/>
+          </p:nvPr>
+        </p:nvSpPr>
+        <p:spPr/>
+      </p:sp>
+      <p:sp>
+        <p:nvSpPr>
+          <p:cNvPr id="3" name="Notes Placeholder 2"/>
+          <p:cNvSpPr>
+            <a:spLocks noGrp="1"/>
+          </p:cNvSpPr>
+          <p:nvPr>
+            <p:ph type="body" idx="1"/>
+          </p:nvPr>
+        </p:nvSpPr>
+        <p:spPr/>
+        <p:txBody>
+          <a:bodyPr/>
+          <a:lstStyle/>
+          <a:p>
+            <a:r>
+              <a:rPr lang="en-US" dirty="0"/>
+              <a:t>For your homework: On the map of Cameroon in your atlas, measure the distance from Garoua to Ngaoundéré and change it into kilometres with the scale. We shall correct it at the beginning of our next lesson.</a:t>
+            </a:r>
+            <a:endParaRPr lang="en-US" dirty="0"/>
+          </a:p>
+        </p:txBody>
+      </p:sp>
+      <p:sp>
+        <p:nvSpPr>
+          <p:cNvPr id="4" name="Slide Number Placeholder 3"/>
+          <p:cNvSpPr>
+            <a:spLocks noGrp="1"/>
+          </p:cNvSpPr>
+          <p:nvPr>
+            <p:ph type="sldNum" sz="quarter" idx="10"/>
+          </p:nvPr>
+        </p:nvSpPr>
+        <p:spPr/>
+        <p:txBody>
+          <a:bodyPr/>
+          <a:lstStyle/>
+          <a:p>
+            <a:fld id="{F7021451-1387-4CA6-816F-3879F97B5CBC}" type="slidenum">
+              <a:rPr lang="en-US"/>
+              <a:t>54</a:t>
+            </a:fld>
+            <a:endParaRPr lang="en-US"/>
+          </a:p>
+        </p:txBody>
+      </p:sp>
+    </p:spTree>
+    <p:extLst>
+      <p:ext uri="{BB962C8B-B14F-4D97-AF65-F5344CB8AC3E}">
+        <p14:creationId xmlns:p14="http://schemas.microsoft.com/office/powerpoint/2010/main" val="1024086991"/>
+      </p:ext>
+    </p:extLst>
+  </p:cSld>
+  <p:clrMapOvr>
+    <a:masterClrMapping/>
+  </p:clrMapOvr>
+</p:notes>
+</file>
+
+<file path=ppt/notesSlides/notesSlide55.xml><?xml version="1.0" encoding="utf-8"?>
+<p:notes xmlns:a="http://schemas.openxmlformats.org/drawingml/2006/main" xmlns:r="http://schemas.openxmlformats.org/officeDocument/2006/relationships" xmlns:p="http://schemas.openxmlformats.org/presentationml/2006/main">
+  <p:cSld>
+    <p:spTree>
+      <p:nvGrpSpPr>
+        <p:cNvPr id="1" name=""/>
+        <p:cNvGrpSpPr/>
+        <p:nvPr/>
+      </p:nvGrpSpPr>
+      <p:grpSpPr>
+        <a:xfrm>
+          <a:off x="0" y="0"/>
+          <a:ext cx="0" cy="0"/>
+          <a:chOff x="0" y="0"/>
+          <a:chExt cx="0" cy="0"/>
+        </a:xfrm>
+      </p:grpSpPr>
+      <p:sp>
+        <p:nvSpPr>
+          <p:cNvPr id="2" name="Slide Image Placeholder 1"/>
+          <p:cNvSpPr>
+            <a:spLocks noGrp="1" noRot="1" noChangeAspect="1"/>
+          </p:cNvSpPr>
+          <p:nvPr>
+            <p:ph type="sldImg"/>
+          </p:nvPr>
+        </p:nvSpPr>
+        <p:spPr/>
+      </p:sp>
+      <p:sp>
+        <p:nvSpPr>
+          <p:cNvPr id="3" name="Notes Placeholder 2"/>
+          <p:cNvSpPr>
+            <a:spLocks noGrp="1"/>
+          </p:cNvSpPr>
+          <p:nvPr>
+            <p:ph type="body" idx="1"/>
+          </p:nvPr>
+        </p:nvSpPr>
+        <p:spPr/>
+        <p:txBody>
+          <a:bodyPr/>
+          <a:lstStyle/>
+          <a:p>
+            <a:r>
+              <a:rPr lang="en-US" dirty="0"/>
+              <a:t>Our next lesson will be on Practical Work 2: Locate a Place on a Map. Thank you for your attention, and see you next time.</a:t>
+            </a:r>
+            <a:endParaRPr lang="en-US" dirty="0"/>
+          </a:p>
+        </p:txBody>
+      </p:sp>
+      <p:sp>
+        <p:nvSpPr>
+          <p:cNvPr id="4" name="Slide Number Placeholder 3"/>
+          <p:cNvSpPr>
+            <a:spLocks noGrp="1"/>
+          </p:cNvSpPr>
+          <p:nvPr>
+            <p:ph type="sldNum" sz="quarter" idx="10"/>
+          </p:nvPr>
+        </p:nvSpPr>
+        <p:spPr/>
+        <p:txBody>
+          <a:bodyPr/>
+          <a:lstStyle/>
+          <a:p>
+            <a:fld id="{F7021451-1387-4CA6-816F-3879F97B5CBC}" type="slidenum">
+              <a:rPr lang="en-US"/>
+              <a:t>55</a:t>
+            </a:fld>
+            <a:endParaRPr lang="en-US"/>
+          </a:p>
+        </p:txBody>
+      </p:sp>
+    </p:spTree>
+    <p:extLst>
+      <p:ext uri="{BB962C8B-B14F-4D97-AF65-F5344CB8AC3E}">
+        <p14:creationId xmlns:p14="http://schemas.microsoft.com/office/powerpoint/2010/main" val="1024086991"/>
+      </p:ext>
+    </p:extLst>
+  </p:cSld>
+  <p:clrMapOvr>
+    <a:masterClrMapping/>
+  </p:clrMapOvr>
+</p:notes>
+</file>
+
+<file path=ppt/notesSlides/notesSlide56.xml><?xml version="1.0" encoding="utf-8"?>
+<p:notes xmlns:a="http://schemas.openxmlformats.org/drawingml/2006/main" xmlns:r="http://schemas.openxmlformats.org/officeDocument/2006/relationships" xmlns:p="http://schemas.openxmlformats.org/presentationml/2006/main">
+  <p:cSld>
+    <p:spTree>
+      <p:nvGrpSpPr>
+        <p:cNvPr id="1" name=""/>
+        <p:cNvGrpSpPr/>
+        <p:nvPr/>
+      </p:nvGrpSpPr>
+      <p:grpSpPr>
+        <a:xfrm>
+          <a:off x="0" y="0"/>
+          <a:ext cx="0" cy="0"/>
+          <a:chOff x="0" y="0"/>
+          <a:chExt cx="0" cy="0"/>
+        </a:xfrm>
+      </p:grpSpPr>
+      <p:sp>
+        <p:nvSpPr>
+          <p:cNvPr id="2" name="Slide Image Placeholder 1"/>
+          <p:cNvSpPr>
+            <a:spLocks noGrp="1" noRot="1" noChangeAspect="1"/>
+          </p:cNvSpPr>
+          <p:nvPr>
+            <p:ph type="sldImg"/>
+          </p:nvPr>
+        </p:nvSpPr>
+        <p:spPr/>
+      </p:sp>
+      <p:sp>
+        <p:nvSpPr>
+          <p:cNvPr id="3" name="Notes Placeholder 2"/>
+          <p:cNvSpPr>
+            <a:spLocks noGrp="1"/>
+          </p:cNvSpPr>
+          <p:nvPr>
+            <p:ph type="body" idx="1"/>
+          </p:nvPr>
+        </p:nvSpPr>
+        <p:spPr/>
+        <p:txBody>
+          <a:bodyPr/>
+          <a:lstStyle/>
+          <a:p>
+            <a:r>
+              <a:rPr lang="en-US" dirty="0"/>
+              <a:t>Let us play the bilingual game. I say a word in English, and you give me the French word. Then we do the reverse.</a:t>
+            </a:r>
+            <a:endParaRPr lang="en-US" dirty="0"/>
+          </a:p>
+        </p:txBody>
+      </p:sp>
+      <p:sp>
+        <p:nvSpPr>
+          <p:cNvPr id="4" name="Slide Number Placeholder 3"/>
+          <p:cNvSpPr>
+            <a:spLocks noGrp="1"/>
+          </p:cNvSpPr>
+          <p:nvPr>
+            <p:ph type="sldNum" sz="quarter" idx="10"/>
+          </p:nvPr>
+        </p:nvSpPr>
+        <p:spPr/>
+        <p:txBody>
+          <a:bodyPr/>
+          <a:lstStyle/>
+          <a:p>
+            <a:fld id="{F7021451-1387-4CA6-816F-3879F97B5CBC}" type="slidenum">
+              <a:rPr lang="en-US"/>
+              <a:t>56</a:t>
+            </a:fld>
+            <a:endParaRPr lang="en-US"/>
+          </a:p>
+        </p:txBody>
+      </p:sp>
+    </p:spTree>
+    <p:extLst>
+      <p:ext uri="{BB962C8B-B14F-4D97-AF65-F5344CB8AC3E}">
+        <p14:creationId xmlns:p14="http://schemas.microsoft.com/office/powerpoint/2010/main" val="1024086991"/>
+      </p:ext>
+    </p:extLst>
+  </p:cSld>
+  <p:clrMapOvr>
+    <a:masterClrMapping/>
+  </p:clrMapOvr>
+</p:notes>
+</file>
+
+<file path=ppt/notesSlides/notesSlide57.xml><?xml version="1.0" encoding="utf-8"?>
+<p:notes xmlns:a="http://schemas.openxmlformats.org/drawingml/2006/main" xmlns:r="http://schemas.openxmlformats.org/officeDocument/2006/relationships" xmlns:p="http://schemas.openxmlformats.org/presentationml/2006/main">
+  <p:cSld>
+    <p:spTree>
+      <p:nvGrpSpPr>
+        <p:cNvPr id="1" name=""/>
+        <p:cNvGrpSpPr/>
+        <p:nvPr/>
+      </p:nvGrpSpPr>
+      <p:grpSpPr>
+        <a:xfrm>
+          <a:off x="0" y="0"/>
+          <a:ext cx="0" cy="0"/>
+          <a:chOff x="0" y="0"/>
+          <a:chExt cx="0" cy="0"/>
+        </a:xfrm>
+      </p:grpSpPr>
+      <p:sp>
+        <p:nvSpPr>
+          <p:cNvPr id="2" name="Slide Image Placeholder 1"/>
+          <p:cNvSpPr>
+            <a:spLocks noGrp="1" noRot="1" noChangeAspect="1"/>
+          </p:cNvSpPr>
+          <p:nvPr>
+            <p:ph type="sldImg"/>
+          </p:nvPr>
+        </p:nvSpPr>
+        <p:spPr/>
+      </p:sp>
+      <p:sp>
+        <p:nvSpPr>
+          <p:cNvPr id="3" name="Notes Placeholder 2"/>
+          <p:cNvSpPr>
+            <a:spLocks noGrp="1"/>
+          </p:cNvSpPr>
+          <p:nvPr>
+            <p:ph type="body" idx="1"/>
+          </p:nvPr>
+        </p:nvSpPr>
+        <p:spPr/>
+        <p:txBody>
+          <a:bodyPr/>
+          <a:lstStyle/>
+          <a:p>
+            <a:r>
+              <a:rPr lang="en-US" dirty="0"/>
+              <a:t>I record this information in the official logbook of the class after the lesson.</a:t>
+            </a:r>
+            <a:endParaRPr lang="en-US" dirty="0"/>
+          </a:p>
+        </p:txBody>
+      </p:sp>
+      <p:sp>
+        <p:nvSpPr>
+          <p:cNvPr id="4" name="Slide Number Placeholder 3"/>
+          <p:cNvSpPr>
+            <a:spLocks noGrp="1"/>
+          </p:cNvSpPr>
+          <p:nvPr>
+            <p:ph type="sldNum" sz="quarter" idx="10"/>
+          </p:nvPr>
+        </p:nvSpPr>
+        <p:spPr/>
+        <p:txBody>
+          <a:bodyPr/>
+          <a:lstStyle/>
+          <a:p>
+            <a:fld id="{F7021451-1387-4CA6-816F-3879F97B5CBC}" type="slidenum">
+              <a:rPr lang="en-US"/>
+              <a:t>57</a:t>
+            </a:fld>
+            <a:endParaRPr lang="en-US"/>
+          </a:p>
+        </p:txBody>
+      </p:sp>
+    </p:spTree>
+    <p:extLst>
+      <p:ext uri="{BB962C8B-B14F-4D97-AF65-F5344CB8AC3E}">
+        <p14:creationId xmlns:p14="http://schemas.microsoft.com/office/powerpoint/2010/main" val="1024086991"/>
+      </p:ext>
+    </p:extLst>
+  </p:cSld>
+  <p:clrMapOvr>
+    <a:masterClrMapping/>
+  </p:clrMapOvr>
+</p:notes>
+</file>
+
+<file path=ppt/notesSlides/notesSlide58.xml><?xml version="1.0" encoding="utf-8"?>
+<p:notes xmlns:a="http://schemas.openxmlformats.org/drawingml/2006/main" xmlns:r="http://schemas.openxmlformats.org/officeDocument/2006/relationships" xmlns:p="http://schemas.openxmlformats.org/presentationml/2006/main">
+  <p:cSld>
+    <p:spTree>
+      <p:nvGrpSpPr>
+        <p:cNvPr id="1" name=""/>
+        <p:cNvGrpSpPr/>
+        <p:nvPr/>
+      </p:nvGrpSpPr>
+      <p:grpSpPr>
+        <a:xfrm>
+          <a:off x="0" y="0"/>
+          <a:ext cx="0" cy="0"/>
+          <a:chOff x="0" y="0"/>
+          <a:chExt cx="0" cy="0"/>
+        </a:xfrm>
+      </p:grpSpPr>
+      <p:sp>
+        <p:nvSpPr>
+          <p:cNvPr id="2" name="Slide Image Placeholder 1"/>
+          <p:cNvSpPr>
+            <a:spLocks noGrp="1" noRot="1" noChangeAspect="1"/>
+          </p:cNvSpPr>
+          <p:nvPr>
+            <p:ph type="sldImg"/>
+          </p:nvPr>
+        </p:nvSpPr>
+        <p:spPr/>
+      </p:sp>
+      <p:sp>
+        <p:nvSpPr>
+          <p:cNvPr id="3" name="Notes Placeholder 2"/>
+          <p:cNvSpPr>
+            <a:spLocks noGrp="1"/>
+          </p:cNvSpPr>
+          <p:nvPr>
+            <p:ph type="body" idx="1"/>
+          </p:nvPr>
+        </p:nvSpPr>
+        <p:spPr/>
+        <p:txBody>
+          <a:bodyPr/>
+          <a:lstStyle/>
+          <a:p>
+            <a:r>
+              <a:rPr lang="en-US" dirty="0"/>
+              <a:t>I complete the second page of the logbook: the matter taught, the evaluation, the homework and the attendance.</a:t>
+            </a:r>
+            <a:endParaRPr lang="en-US" dirty="0"/>
+          </a:p>
+        </p:txBody>
+      </p:sp>
+      <p:sp>
+        <p:nvSpPr>
+          <p:cNvPr id="4" name="Slide Number Placeholder 3"/>
+          <p:cNvSpPr>
+            <a:spLocks noGrp="1"/>
+          </p:cNvSpPr>
+          <p:nvPr>
+            <p:ph type="sldNum" sz="quarter" idx="10"/>
+          </p:nvPr>
+        </p:nvSpPr>
+        <p:spPr/>
+        <p:txBody>
+          <a:bodyPr/>
+          <a:lstStyle/>
+          <a:p>
+            <a:fld id="{F7021451-1387-4CA6-816F-3879F97B5CBC}" type="slidenum">
+              <a:rPr lang="en-US"/>
+              <a:t>58</a:t>
+            </a:fld>
+            <a:endParaRPr lang="en-US"/>
+          </a:p>
+        </p:txBody>
+      </p:sp>
+    </p:spTree>
+    <p:extLst>
+      <p:ext uri="{BB962C8B-B14F-4D97-AF65-F5344CB8AC3E}">
+        <p14:creationId xmlns:p14="http://schemas.microsoft.com/office/powerpoint/2010/main" val="1024086991"/>
+      </p:ext>
+    </p:extLst>
+  </p:cSld>
+  <p:clrMapOvr>
+    <a:masterClrMapping/>
+  </p:clrMapOvr>
+</p:notes>
+</file>
+
+<file path=ppt/notesSlides/notesSlide59.xml><?xml version="1.0" encoding="utf-8"?>
+<p:notes xmlns:a="http://schemas.openxmlformats.org/drawingml/2006/main" xmlns:r="http://schemas.openxmlformats.org/officeDocument/2006/relationships" xmlns:p="http://schemas.openxmlformats.org/presentationml/2006/main">
+  <p:cSld>
+    <p:spTree>
+      <p:nvGrpSpPr>
+        <p:cNvPr id="1" name=""/>
+        <p:cNvGrpSpPr/>
+        <p:nvPr/>
+      </p:nvGrpSpPr>
+      <p:grpSpPr>
+        <a:xfrm>
+          <a:off x="0" y="0"/>
+          <a:ext cx="0" cy="0"/>
+          <a:chOff x="0" y="0"/>
+          <a:chExt cx="0" cy="0"/>
+        </a:xfrm>
+      </p:grpSpPr>
+      <p:sp>
+        <p:nvSpPr>
+          <p:cNvPr id="2" name="Slide Image Placeholder 1"/>
+          <p:cNvSpPr>
+            <a:spLocks noGrp="1" noRot="1" noChangeAspect="1"/>
+          </p:cNvSpPr>
+          <p:nvPr>
+            <p:ph type="sldImg"/>
+          </p:nvPr>
+        </p:nvSpPr>
+        <p:spPr/>
+      </p:sp>
+      <p:sp>
+        <p:nvSpPr>
+          <p:cNvPr id="3" name="Notes Placeholder 2"/>
+          <p:cNvSpPr>
+            <a:spLocks noGrp="1"/>
+          </p:cNvSpPr>
+          <p:nvPr>
+            <p:ph type="body" idx="1"/>
+          </p:nvPr>
+        </p:nvSpPr>
+        <p:spPr/>
+        <p:txBody>
+          <a:bodyPr/>
+          <a:lstStyle/>
+          <a:p>
+            <a:r>
+              <a:rPr lang="en-US" dirty="0"/>
+              <a:t>This slide is for me, the teacher: it gives the timing of the lesson and what to do if the projector is not available.</a:t>
+            </a:r>
+            <a:endParaRPr lang="en-US" dirty="0"/>
+          </a:p>
+        </p:txBody>
+      </p:sp>
+      <p:sp>
+        <p:nvSpPr>
+          <p:cNvPr id="4" name="Slide Number Placeholder 3"/>
+          <p:cNvSpPr>
+            <a:spLocks noGrp="1"/>
+          </p:cNvSpPr>
+          <p:nvPr>
+            <p:ph type="sldNum" sz="quarter" idx="10"/>
+          </p:nvPr>
+        </p:nvSpPr>
+        <p:spPr/>
+        <p:txBody>
+          <a:bodyPr/>
+          <a:lstStyle/>
+          <a:p>
+            <a:fld id="{F7021451-1387-4CA6-816F-3879F97B5CBC}" type="slidenum">
+              <a:rPr lang="en-US"/>
+              <a:t>59</a:t>
             </a:fld>
             <a:endParaRPr lang="en-US"/>
           </a:p>
@@ -4819,6 +5443,94 @@
 </p:notes>
 </file>
 
+<file path=ppt/notesSlides/notesSlide60.xml><?xml version="1.0" encoding="utf-8"?>
+<p:notes xmlns:a="http://schemas.openxmlformats.org/drawingml/2006/main" xmlns:r="http://schemas.openxmlformats.org/officeDocument/2006/relationships" xmlns:p="http://schemas.openxmlformats.org/presentationml/2006/main">
+  <p:cSld>
+    <p:spTree>
+      <p:nvGrpSpPr>
+        <p:cNvPr id="1" name=""/>
+        <p:cNvGrpSpPr/>
+        <p:nvPr/>
+      </p:nvGrpSpPr>
+      <p:grpSpPr>
+        <a:xfrm>
+          <a:off x="0" y="0"/>
+          <a:ext cx="0" cy="0"/>
+          <a:chOff x="0" y="0"/>
+          <a:chExt cx="0" cy="0"/>
+        </a:xfrm>
+      </p:grpSpPr>
+      <p:sp>
+        <p:nvSpPr>
+          <p:cNvPr id="2" name="Slide Image Placeholder 1"/>
+          <p:cNvSpPr>
+            <a:spLocks noGrp="1" noRot="1" noChangeAspect="1"/>
+          </p:cNvSpPr>
+          <p:nvPr>
+            <p:ph type="sldImg"/>
+          </p:nvPr>
+        </p:nvSpPr>
+        <p:spPr/>
+      </p:sp>
+      <p:sp>
+        <p:nvSpPr>
+          <p:cNvPr id="3" name="Notes Placeholder 2"/>
+          <p:cNvSpPr>
+            <a:spLocks noGrp="1"/>
+          </p:cNvSpPr>
+          <p:nvPr>
+            <p:ph type="body" idx="1"/>
+          </p:nvPr>
+        </p:nvSpPr>
+        <p:spPr/>
+        <p:txBody>
+          <a:bodyPr/>
+          <a:lstStyle/>
+          <a:p>
+            <a:r>
+              <a:rPr lang="en-US" dirty="0"/>
+              <a:t>These are the references and picture credits used to prepare this lesson.</a:t>
+            </a:r>
+            <a:endParaRPr lang="en-US" dirty="0"/>
+          </a:p>
+        </p:txBody>
+      </p:sp>
+      <p:sp>
+        <p:nvSpPr>
+          <p:cNvPr id="4" name="Slide Number Placeholder 3"/>
+          <p:cNvSpPr>
+            <a:spLocks noGrp="1"/>
+          </p:cNvSpPr>
+          <p:nvPr>
+            <p:ph type="sldNum" sz="quarter" idx="10"/>
+          </p:nvPr>
+        </p:nvSpPr>
+        <p:spPr/>
+        <p:txBody>
+          <a:bodyPr/>
+          <a:lstStyle/>
+          <a:p>
+            <a:fld id="{F7021451-1387-4CA6-816F-3879F97B5CBC}" type="slidenum">
+              <a:rPr lang="en-US"/>
+              <a:t>60</a:t>
+            </a:fld>
+            <a:endParaRPr lang="en-US"/>
+          </a:p>
+        </p:txBody>
+      </p:sp>
+    </p:spTree>
+    <p:extLst>
+      <p:ext uri="{BB962C8B-B14F-4D97-AF65-F5344CB8AC3E}">
+        <p14:creationId xmlns:p14="http://schemas.microsoft.com/office/powerpoint/2010/main" val="1024086991"/>
+      </p:ext>
+    </p:extLst>
+  </p:cSld>
+  <p:clrMapOvr>
+    <a:masterClrMapping/>
+  </p:clrMapOvr>
+</p:notes>
+</file>
+
 <file path=ppt/notesSlides/notesSlide7.xml><?xml version="1.0" encoding="utf-8"?>
 <p:notes xmlns:a="http://schemas.openxmlformats.org/drawingml/2006/main" xmlns:r="http://schemas.openxmlformats.org/officeDocument/2006/relationships" xmlns:p="http://schemas.openxmlformats.org/presentationml/2006/main">
   <p:cSld>
@@ -4865,7 +5577,7 @@
           <a:p>
             <a:r>
               <a:rPr lang="en-US" dirty="0"/>
-              <a:t>By the end of this lesson, you should be able to do three things. Number 1: distinguish a globe from a map. Number 2: identify the marginal information on a map. Number 3: calculate real distances using the scale.</a:t>
+              <a:t>Take your time to copy this part; we will continue together.</a:t>
             </a:r>
             <a:endParaRPr lang="en-US" dirty="0"/>
           </a:p>
@@ -4953,7 +5665,7 @@
           <a:p>
             <a:r>
               <a:rPr lang="en-US" dirty="0"/>
-              <a:t>Let us first remember what you already know. The Earth is round like a ball. Maps show places on a flat surface. Latitudes and longitudes help us to locate places. Keep this in mind, because we shall build on it today.</a:t>
+              <a:t>By the end of this lesson, you should be able to do three things. Number 1: identify the forms of representation of the Earth. Number 2: identify the marginal information on a map. Number 3: calculate real distances using the scale.</a:t>
             </a:r>
             <a:endParaRPr lang="en-US" dirty="0"/>
           </a:p>
@@ -5041,7 +5753,7 @@
           <a:p>
             <a:r>
               <a:rPr lang="en-US" dirty="0"/>
-              <a:t>Listen carefully to this situation from real life. Mariam wants to know how far Garoua is from Maroua. On her map, the two towns are 6 cm apart, but she does not know how to change this into kilometres. Think about it, because I am going to ask you some questions.</a:t>
+              <a:t>Let us first remember what you already know. The Earth is round like a ball. Maps show places on a flat surface. Latitudes and longitudes help us to locate places. Keep this in mind, because we shall build on it today.</a:t>
             </a:r>
             <a:endParaRPr lang="en-US" dirty="0"/>
           </a:p>
@@ -6421,7 +7133,7 @@
         <p:spPr>
           <a:xfrm>
             <a:off x="0" y="658368"/>
-            <a:ext cx="5120640" cy="5833872"/>
+            <a:ext cx="3840480" cy="5833872"/>
           </a:xfrm>
           <a:prstGeom prst="rect">
             <a:avLst/>
@@ -6436,8 +7148,8 @@
         </p:nvSpPr>
         <p:spPr>
           <a:xfrm>
-            <a:off x="5349240" y="1005840"/>
-            <a:ext cx="6522415" cy="731520"/>
+            <a:off x="4069080" y="1005840"/>
+            <a:ext cx="7802575" cy="731520"/>
           </a:xfrm>
           <a:prstGeom prst="rect">
             <a:avLst/>
@@ -6463,7 +7175,7 @@
                 <a:ea typeface="Times New Roman" pitchFamily="34" charset="-122"/>
                 <a:cs typeface="Times New Roman" pitchFamily="34" charset="-120"/>
               </a:rPr>
-              <a:t>Situation: Question 1</a:t>
+              <a:t>Situation in Real Life</a:t>
             </a:r>
             <a:endParaRPr lang="en-US" sz="3600" dirty="0"/>
           </a:p>
@@ -6477,8 +7189,8 @@
         </p:nvSpPr>
         <p:spPr>
           <a:xfrm>
-            <a:off x="5349240" y="1783080"/>
-            <a:ext cx="6522415" cy="4663440"/>
+            <a:off x="4069080" y="1783080"/>
+            <a:ext cx="7802575" cy="4663440"/>
           </a:xfrm>
           <a:prstGeom prst="rect">
             <a:avLst/>
@@ -6505,7 +7217,7 @@
                 <a:ea typeface="Times New Roman" pitchFamily="34" charset="-122"/>
                 <a:cs typeface="Times New Roman" pitchFamily="34" charset="-120"/>
               </a:rPr>
-              <a:t>What is the problem in the situation?</a:t>
+              <a:t>Mariam wants to know how far Garoua is from Maroua. On her map, the two towns are 6 cm apart. She asks her father: "How can I change these 6 centimetres into the real distance in kilometres?"</a:t>
             </a:r>
             <a:endParaRPr lang="en-US" sz="4000" dirty="0"/>
           </a:p>
@@ -6682,7 +7394,7 @@
                 <a:ea typeface="Times New Roman" pitchFamily="34" charset="-122"/>
                 <a:cs typeface="Times New Roman" pitchFamily="34" charset="-120"/>
               </a:rPr>
-              <a:t>Answer</a:t>
+              <a:t>Situation: Question 1</a:t>
             </a:r>
             <a:endParaRPr lang="en-US" sz="3600" dirty="0"/>
           </a:p>
@@ -6724,7 +7436,7 @@
                 <a:ea typeface="Times New Roman" pitchFamily="34" charset="-122"/>
                 <a:cs typeface="Times New Roman" pitchFamily="34" charset="-120"/>
               </a:rPr>
-              <a:t>Mariam cannot change the map distance into a real distance.</a:t>
+              <a:t>What is the problem in the situation?</a:t>
             </a:r>
             <a:endParaRPr lang="en-US" sz="4000" dirty="0"/>
           </a:p>
@@ -6901,7 +7613,7 @@
                 <a:ea typeface="Times New Roman" pitchFamily="34" charset="-122"/>
                 <a:cs typeface="Times New Roman" pitchFamily="34" charset="-120"/>
               </a:rPr>
-              <a:t>Situation: Question 2</a:t>
+              <a:t>Answer</a:t>
             </a:r>
             <a:endParaRPr lang="en-US" sz="3600" dirty="0"/>
           </a:p>
@@ -6943,7 +7655,7 @@
                 <a:ea typeface="Times New Roman" pitchFamily="34" charset="-122"/>
                 <a:cs typeface="Times New Roman" pitchFamily="34" charset="-120"/>
               </a:rPr>
-              <a:t>Which part of the map helps her?</a:t>
+              <a:t>Mariam does not know how to change a distance on the map into a real distance.</a:t>
             </a:r>
             <a:endParaRPr lang="en-US" sz="4000" dirty="0"/>
           </a:p>
@@ -7120,7 +7832,7 @@
                 <a:ea typeface="Times New Roman" pitchFamily="34" charset="-122"/>
                 <a:cs typeface="Times New Roman" pitchFamily="34" charset="-120"/>
               </a:rPr>
-              <a:t>Answer</a:t>
+              <a:t>Situation: Question 2</a:t>
             </a:r>
             <a:endParaRPr lang="en-US" sz="3600" dirty="0"/>
           </a:p>
@@ -7162,7 +7874,7 @@
                 <a:ea typeface="Times New Roman" pitchFamily="34" charset="-122"/>
                 <a:cs typeface="Times New Roman" pitchFamily="34" charset="-120"/>
               </a:rPr>
-              <a:t>The scale.</a:t>
+              <a:t>Which part of the map helps her?</a:t>
             </a:r>
             <a:endParaRPr lang="en-US" sz="4000" dirty="0"/>
           </a:p>
@@ -7339,7 +8051,7 @@
                 <a:ea typeface="Times New Roman" pitchFamily="34" charset="-122"/>
                 <a:cs typeface="Times New Roman" pitchFamily="34" charset="-120"/>
               </a:rPr>
-              <a:t>Situation: Question 3</a:t>
+              <a:t>Answer</a:t>
             </a:r>
             <a:endParaRPr lang="en-US" sz="3600" dirty="0"/>
           </a:p>
@@ -7381,7 +8093,7 @@
                 <a:ea typeface="Times New Roman" pitchFamily="34" charset="-122"/>
                 <a:cs typeface="Times New Roman" pitchFamily="34" charset="-120"/>
               </a:rPr>
-              <a:t>What else is written around a map?</a:t>
+              <a:t>The scale.</a:t>
             </a:r>
             <a:endParaRPr lang="en-US" sz="4000" dirty="0"/>
           </a:p>
@@ -7558,7 +8270,7 @@
                 <a:ea typeface="Times New Roman" pitchFamily="34" charset="-122"/>
                 <a:cs typeface="Times New Roman" pitchFamily="34" charset="-120"/>
               </a:rPr>
-              <a:t>Possible Answer</a:t>
+              <a:t>Situation: Question 3</a:t>
             </a:r>
             <a:endParaRPr lang="en-US" sz="3600" dirty="0"/>
           </a:p>
@@ -7600,7 +8312,7 @@
                 <a:ea typeface="Times New Roman" pitchFamily="34" charset="-122"/>
                 <a:cs typeface="Times New Roman" pitchFamily="34" charset="-120"/>
               </a:rPr>
-              <a:t>The title, the key and the north arrow.</a:t>
+              <a:t>What else is written around a map?</a:t>
             </a:r>
             <a:endParaRPr lang="en-US" sz="4000" dirty="0"/>
           </a:p>
@@ -7712,7 +8424,7 @@
                 <a:ea typeface="Calibri" pitchFamily="34" charset="-122"/>
                 <a:cs typeface="Calibri" pitchFamily="34" charset="-120"/>
               </a:rPr>
-              <a:t>ACTION TO TAKE</a:t>
+              <a:t>REAL-LIFE SITUATION</a:t>
             </a:r>
             <a:endParaRPr lang="en-US" sz="1400" dirty="0"/>
           </a:p>
@@ -7777,7 +8489,7 @@
                 <a:ea typeface="Times New Roman" pitchFamily="34" charset="-122"/>
                 <a:cs typeface="Times New Roman" pitchFamily="34" charset="-120"/>
               </a:rPr>
-              <a:t>Action to Take</a:t>
+              <a:t>Possible Answer</a:t>
             </a:r>
             <a:endParaRPr lang="en-US" sz="3600" dirty="0"/>
           </a:p>
@@ -7819,7 +8531,7 @@
                 <a:ea typeface="Times New Roman" pitchFamily="34" charset="-122"/>
                 <a:cs typeface="Times New Roman" pitchFamily="34" charset="-120"/>
               </a:rPr>
-              <a:t>Always read the title, the key and the scale before using a map.</a:t>
+              <a:t>The title, the key, the north arrow and the grid lines.</a:t>
             </a:r>
             <a:endParaRPr lang="en-US" sz="4000" dirty="0"/>
           </a:p>
@@ -7931,7 +8643,7 @@
                 <a:ea typeface="Calibri" pitchFamily="34" charset="-122"/>
                 <a:cs typeface="Calibri" pitchFamily="34" charset="-120"/>
               </a:rPr>
-              <a:t>JUSTIFICATION</a:t>
+              <a:t>ACTION TO TAKE</a:t>
             </a:r>
             <a:endParaRPr lang="en-US" sz="1400" dirty="0"/>
           </a:p>
@@ -7996,7 +8708,7 @@
                 <a:ea typeface="Times New Roman" pitchFamily="34" charset="-122"/>
                 <a:cs typeface="Times New Roman" pitchFamily="34" charset="-120"/>
               </a:rPr>
-              <a:t>Justification of the Lesson</a:t>
+              <a:t>Action to Take</a:t>
             </a:r>
             <a:endParaRPr lang="en-US" sz="3600" dirty="0"/>
           </a:p>
@@ -8038,7 +8750,7 @@
                 <a:ea typeface="Times New Roman" pitchFamily="34" charset="-122"/>
                 <a:cs typeface="Times New Roman" pitchFamily="34" charset="-120"/>
               </a:rPr>
-              <a:t>This practical work helps us to read maps correctly and to calculate real distances.</a:t>
+              <a:t>Always read the title, the key and the scale before using a map.</a:t>
             </a:r>
             <a:endParaRPr lang="en-US" sz="4000" dirty="0"/>
           </a:p>
@@ -8150,54 +8862,15 @@
                 <a:ea typeface="Calibri" pitchFamily="34" charset="-122"/>
                 <a:cs typeface="Calibri" pitchFamily="34" charset="-120"/>
               </a:rPr>
-              <a:t>1. FORMS OF REPRESENTATION</a:t>
+              <a:t>JUSTIFICATION</a:t>
             </a:r>
             <a:endParaRPr lang="en-US" sz="1400" dirty="0"/>
-          </a:p>
-        </p:txBody>
-      </p:sp>
-      <p:sp>
-        <p:nvSpPr>
-          <p:cNvPr id="3" name="Text 1"/>
-          <p:cNvSpPr/>
-          <p:nvPr/>
-        </p:nvSpPr>
-        <p:spPr>
-          <a:xfrm>
-            <a:off x="457200" y="1005840"/>
-            <a:ext cx="11277295" cy="731520"/>
-          </a:xfrm>
-          <a:prstGeom prst="rect">
-            <a:avLst/>
-          </a:prstGeom>
-          <a:noFill/>
-          <a:ln/>
-        </p:spPr>
-        <p:txBody>
-          <a:bodyPr wrap="square" lIns="0" tIns="0" rIns="0" bIns="0" rtlCol="0" anchor="ctr"/>
-          <a:lstStyle/>
-          <a:p>
-            <a:pPr algn="ctr" indent="0" marL="0">
-              <a:buNone/>
-            </a:pPr>
-            <a:r>
-              <a:rPr lang="en-US" sz="3600" b="1" dirty="0">
-                <a:solidFill>
-                  <a:srgbClr val="990011"/>
-                </a:solidFill>
-                <a:latin typeface="Times New Roman" pitchFamily="34" charset="0"/>
-                <a:ea typeface="Times New Roman" pitchFamily="34" charset="-122"/>
-                <a:cs typeface="Times New Roman" pitchFamily="34" charset="-120"/>
-              </a:rPr>
-              <a:t>Activity 1</a:t>
-            </a:r>
-            <a:endParaRPr lang="en-US" sz="3600" dirty="0"/>
           </a:p>
         </p:txBody>
       </p:sp>
       <p:pic>
         <p:nvPicPr>
-          <p:cNvPr id="4" name="Image 0" descr="/home/claude/f4/img/v2/f4_earth_space.jpg">    </p:cNvPr>
+          <p:cNvPr id="3" name="Image 0" descr="/home/claude/f4/img/minesec_sheet.png">    </p:cNvPr>
           <p:cNvPicPr>
             <a:picLocks noChangeAspect="1"/>
           </p:cNvPicPr>
@@ -8211,8 +8884,8 @@
         </p:blipFill>
         <p:spPr>
           <a:xfrm>
-            <a:off x="2300072" y="1783080"/>
-            <a:ext cx="7591552" cy="4270248"/>
+            <a:off x="0" y="658368"/>
+            <a:ext cx="5120640" cy="5833872"/>
           </a:xfrm>
           <a:prstGeom prst="rect">
             <a:avLst/>
@@ -8221,14 +8894,14 @@
       </p:pic>
       <p:sp>
         <p:nvSpPr>
-          <p:cNvPr id="5" name="Text 2"/>
+          <p:cNvPr id="4" name="Text 1"/>
           <p:cNvSpPr/>
           <p:nvPr/>
         </p:nvSpPr>
         <p:spPr>
           <a:xfrm>
-            <a:off x="457200" y="6089904"/>
-            <a:ext cx="11277295" cy="347472"/>
+            <a:off x="5349240" y="1005840"/>
+            <a:ext cx="6522415" cy="731520"/>
           </a:xfrm>
           <a:prstGeom prst="rect">
             <a:avLst/>
@@ -8237,24 +8910,68 @@
           <a:ln/>
         </p:spPr>
         <p:txBody>
-          <a:bodyPr wrap="square" lIns="0" tIns="0" rIns="0" bIns="0" rtlCol="0" anchor="ctr"/>
+          <a:bodyPr wrap="square" lIns="0" tIns="0" rIns="0" bIns="0" rtlCol="0" anchor="ctr">
+            <a:normAutofit/>
+          </a:bodyPr>
           <a:lstStyle/>
           <a:p>
             <a:pPr algn="ctr" indent="0" marL="0">
               <a:buNone/>
             </a:pPr>
             <a:r>
-              <a:rPr lang="en-US" sz="1800" i="1" dirty="0">
-                <a:solidFill>
-                  <a:srgbClr val="555555"/>
+              <a:rPr lang="en-US" sz="3600" b="1" dirty="0">
+                <a:solidFill>
+                  <a:srgbClr val="990011"/>
                 </a:solidFill>
                 <a:latin typeface="Times New Roman" pitchFamily="34" charset="0"/>
                 <a:ea typeface="Times New Roman" pitchFamily="34" charset="-122"/>
                 <a:cs typeface="Times New Roman" pitchFamily="34" charset="-120"/>
               </a:rPr>
-              <a:t>The round Earth.</a:t>
-            </a:r>
-            <a:endParaRPr lang="en-US" sz="1800" dirty="0"/>
+              <a:t>Justification of the Lesson</a:t>
+            </a:r>
+            <a:endParaRPr lang="en-US" sz="3600" dirty="0"/>
+          </a:p>
+        </p:txBody>
+      </p:sp>
+      <p:sp>
+        <p:nvSpPr>
+          <p:cNvPr id="5" name="Text 2"/>
+          <p:cNvSpPr/>
+          <p:nvPr/>
+        </p:nvSpPr>
+        <p:spPr>
+          <a:xfrm>
+            <a:off x="5349240" y="1783080"/>
+            <a:ext cx="6522415" cy="4663440"/>
+          </a:xfrm>
+          <a:prstGeom prst="rect">
+            <a:avLst/>
+          </a:prstGeom>
+          <a:noFill/>
+          <a:ln/>
+        </p:spPr>
+        <p:txBody>
+          <a:bodyPr wrap="square" lIns="0" tIns="0" rIns="0" bIns="0" rtlCol="0" anchor="t"/>
+          <a:lstStyle/>
+          <a:p>
+            <a:pPr algn="l" indent="0" marL="0">
+              <a:spcAft>
+                <a:spcPts val="800"/>
+              </a:spcAft>
+              <a:buNone/>
+            </a:pPr>
+            <a:r>
+              <a:rPr lang="en-US" sz="4000" dirty="0">
+                <a:solidFill>
+                  <a:srgbClr val="111111"/>
+                </a:solidFill>
+                <a:latin typeface="Times New Roman" pitchFamily="34" charset="0"/>
+                <a:ea typeface="Times New Roman" pitchFamily="34" charset="-122"/>
+                <a:cs typeface="Times New Roman" pitchFamily="34" charset="-120"/>
+              </a:rPr>
+              <a:t>This practical work helps us to read maps correctly and to calculate real distances.</a:t>
+            </a:r>
+            <a:endParaRPr lang="en-US" sz="4000" dirty="0"/>
           </a:p>
         </p:txBody>
       </p:sp>
@@ -8370,9 +9087,48 @@
           </a:p>
         </p:txBody>
       </p:sp>
+      <p:sp>
+        <p:nvSpPr>
+          <p:cNvPr id="3" name="Text 1"/>
+          <p:cNvSpPr/>
+          <p:nvPr/>
+        </p:nvSpPr>
+        <p:spPr>
+          <a:xfrm>
+            <a:off x="457200" y="1005840"/>
+            <a:ext cx="11277295" cy="731520"/>
+          </a:xfrm>
+          <a:prstGeom prst="rect">
+            <a:avLst/>
+          </a:prstGeom>
+          <a:noFill/>
+          <a:ln/>
+        </p:spPr>
+        <p:txBody>
+          <a:bodyPr wrap="square" lIns="0" tIns="0" rIns="0" bIns="0" rtlCol="0" anchor="ctr"/>
+          <a:lstStyle/>
+          <a:p>
+            <a:pPr algn="ctr" indent="0" marL="0">
+              <a:buNone/>
+            </a:pPr>
+            <a:r>
+              <a:rPr lang="en-US" sz="3600" b="1" dirty="0">
+                <a:solidFill>
+                  <a:srgbClr val="990011"/>
+                </a:solidFill>
+                <a:latin typeface="Times New Roman" pitchFamily="34" charset="0"/>
+                <a:ea typeface="Times New Roman" pitchFamily="34" charset="-122"/>
+                <a:cs typeface="Times New Roman" pitchFamily="34" charset="-120"/>
+              </a:rPr>
+              <a:t>Activity 1</a:t>
+            </a:r>
+            <a:endParaRPr lang="en-US" sz="3600" dirty="0"/>
+          </a:p>
+        </p:txBody>
+      </p:sp>
       <p:pic>
         <p:nvPicPr>
-          <p:cNvPr id="3" name="Image 0" descr="/home/claude/f4/img/minesec_sheet.png">    </p:cNvPr>
+          <p:cNvPr id="4" name="Image 0" descr="/home/claude/f4/img/v2/globe_big.png">    </p:cNvPr>
           <p:cNvPicPr>
             <a:picLocks noChangeAspect="1"/>
           </p:cNvPicPr>
@@ -8386,8 +9142,8 @@
         </p:blipFill>
         <p:spPr>
           <a:xfrm>
-            <a:off x="0" y="658368"/>
-            <a:ext cx="5120640" cy="5833872"/>
+            <a:off x="1215564" y="1783080"/>
+            <a:ext cx="9760567" cy="4270248"/>
           </a:xfrm>
           <a:prstGeom prst="rect">
             <a:avLst/>
@@ -8396,14 +9152,14 @@
       </p:pic>
       <p:sp>
         <p:nvSpPr>
-          <p:cNvPr id="4" name="Text 1"/>
+          <p:cNvPr id="5" name="Text 2"/>
           <p:cNvSpPr/>
           <p:nvPr/>
         </p:nvSpPr>
         <p:spPr>
           <a:xfrm>
-            <a:off x="5349240" y="1005840"/>
-            <a:ext cx="6522415" cy="731520"/>
+            <a:off x="457200" y="6089904"/>
+            <a:ext cx="11277295" cy="347472"/>
           </a:xfrm>
           <a:prstGeom prst="rect">
             <a:avLst/>
@@ -8412,68 +9168,24 @@
           <a:ln/>
         </p:spPr>
         <p:txBody>
-          <a:bodyPr wrap="square" lIns="0" tIns="0" rIns="0" bIns="0" rtlCol="0" anchor="ctr">
-            <a:normAutofit/>
-          </a:bodyPr>
+          <a:bodyPr wrap="square" lIns="0" tIns="0" rIns="0" bIns="0" rtlCol="0" anchor="ctr"/>
           <a:lstStyle/>
           <a:p>
             <a:pPr algn="ctr" indent="0" marL="0">
               <a:buNone/>
             </a:pPr>
             <a:r>
-              <a:rPr lang="en-US" sz="3600" b="1" dirty="0">
-                <a:solidFill>
-                  <a:srgbClr val="990011"/>
+              <a:rPr lang="en-US" sz="1800" i="1" dirty="0">
+                <a:solidFill>
+                  <a:srgbClr val="555555"/>
                 </a:solidFill>
                 <a:latin typeface="Times New Roman" pitchFamily="34" charset="0"/>
                 <a:ea typeface="Times New Roman" pitchFamily="34" charset="-122"/>
                 <a:cs typeface="Times New Roman" pitchFamily="34" charset="-120"/>
               </a:rPr>
-              <a:t>Activity 1: Question</a:t>
-            </a:r>
-            <a:endParaRPr lang="en-US" sz="3600" dirty="0"/>
-          </a:p>
-        </p:txBody>
-      </p:sp>
-      <p:sp>
-        <p:nvSpPr>
-          <p:cNvPr id="5" name="Text 2"/>
-          <p:cNvSpPr/>
-          <p:nvPr/>
-        </p:nvSpPr>
-        <p:spPr>
-          <a:xfrm>
-            <a:off x="5349240" y="1783080"/>
-            <a:ext cx="6522415" cy="4663440"/>
-          </a:xfrm>
-          <a:prstGeom prst="rect">
-            <a:avLst/>
-          </a:prstGeom>
-          <a:noFill/>
-          <a:ln/>
-        </p:spPr>
-        <p:txBody>
-          <a:bodyPr wrap="square" lIns="0" tIns="0" rIns="0" bIns="0" rtlCol="0" anchor="t"/>
-          <a:lstStyle/>
-          <a:p>
-            <a:pPr algn="l" indent="0" marL="0">
-              <a:spcAft>
-                <a:spcPts val="800"/>
-              </a:spcAft>
-              <a:buNone/>
-            </a:pPr>
-            <a:r>
-              <a:rPr lang="en-US" sz="4000" dirty="0">
-                <a:solidFill>
-                  <a:srgbClr val="111111"/>
-                </a:solidFill>
-                <a:latin typeface="Times New Roman" pitchFamily="34" charset="0"/>
-                <a:ea typeface="Times New Roman" pitchFamily="34" charset="-122"/>
-                <a:cs typeface="Times New Roman" pitchFamily="34" charset="-120"/>
-              </a:rPr>
-              <a:t>What is the best model of the round Earth, and why do we also use flat maps?</a:t>
-            </a:r>
-            <a:endParaRPr lang="en-US" sz="4000" dirty="0"/>
+              <a:t>A round model of the Earth.</a:t>
+            </a:r>
+            <a:endParaRPr lang="en-US" sz="1800" dirty="0"/>
           </a:p>
         </p:txBody>
       </p:sp>
@@ -9243,7 +9955,7 @@
                 <a:ea typeface="Times New Roman" pitchFamily="34" charset="-122"/>
                 <a:cs typeface="Times New Roman" pitchFamily="34" charset="-120"/>
               </a:rPr>
-              <a:t>Activity 1: Answer</a:t>
+              <a:t>Activity 1: Question</a:t>
             </a:r>
             <a:endParaRPr lang="en-US" sz="3600" dirty="0"/>
           </a:p>
@@ -9285,7 +9997,7 @@
                 <a:ea typeface="Times New Roman" pitchFamily="34" charset="-122"/>
                 <a:cs typeface="Times New Roman" pitchFamily="34" charset="-120"/>
               </a:rPr>
-              <a:t>The globe is the best model; flat maps are easier to carry and show more details.</a:t>
+              <a:t>What is this round model of the Earth called?</a:t>
             </a:r>
             <a:endParaRPr lang="en-US" sz="4000" dirty="0"/>
           </a:p>
@@ -9403,48 +10115,9 @@
           </a:p>
         </p:txBody>
       </p:sp>
-      <p:sp>
-        <p:nvSpPr>
-          <p:cNvPr id="3" name="Text 1"/>
-          <p:cNvSpPr/>
-          <p:nvPr/>
-        </p:nvSpPr>
-        <p:spPr>
-          <a:xfrm>
-            <a:off x="457200" y="1005840"/>
-            <a:ext cx="11277295" cy="731520"/>
-          </a:xfrm>
-          <a:prstGeom prst="rect">
-            <a:avLst/>
-          </a:prstGeom>
-          <a:noFill/>
-          <a:ln/>
-        </p:spPr>
-        <p:txBody>
-          <a:bodyPr wrap="square" lIns="0" tIns="0" rIns="0" bIns="0" rtlCol="0" anchor="ctr"/>
-          <a:lstStyle/>
-          <a:p>
-            <a:pPr algn="ctr" indent="0" marL="0">
-              <a:buNone/>
-            </a:pPr>
-            <a:r>
-              <a:rPr lang="en-US" sz="3600" b="1" dirty="0">
-                <a:solidFill>
-                  <a:srgbClr val="990011"/>
-                </a:solidFill>
-                <a:latin typeface="Times New Roman" pitchFamily="34" charset="0"/>
-                <a:ea typeface="Times New Roman" pitchFamily="34" charset="-122"/>
-                <a:cs typeface="Times New Roman" pitchFamily="34" charset="-120"/>
-              </a:rPr>
-              <a:t>Activity 2</a:t>
-            </a:r>
-            <a:endParaRPr lang="en-US" sz="3600" dirty="0"/>
-          </a:p>
-        </p:txBody>
-      </p:sp>
       <p:pic>
         <p:nvPicPr>
-          <p:cNvPr id="4" name="Image 0" descr="/home/claude/f4/img/v2/continents_oceans_big.png">    </p:cNvPr>
+          <p:cNvPr id="3" name="Image 0" descr="/home/claude/f4/img/minesec_sheet.png">    </p:cNvPr>
           <p:cNvPicPr>
             <a:picLocks noChangeAspect="1"/>
           </p:cNvPicPr>
@@ -9458,8 +10131,8 @@
         </p:blipFill>
         <p:spPr>
           <a:xfrm>
-            <a:off x="1034813" y="1783080"/>
-            <a:ext cx="10122069" cy="4270248"/>
+            <a:off x="0" y="658368"/>
+            <a:ext cx="5120640" cy="5833872"/>
           </a:xfrm>
           <a:prstGeom prst="rect">
             <a:avLst/>
@@ -9468,14 +10141,14 @@
       </p:pic>
       <p:sp>
         <p:nvSpPr>
-          <p:cNvPr id="5" name="Text 2"/>
+          <p:cNvPr id="4" name="Text 1"/>
           <p:cNvSpPr/>
           <p:nvPr/>
         </p:nvSpPr>
         <p:spPr>
           <a:xfrm>
-            <a:off x="457200" y="6089904"/>
-            <a:ext cx="11277295" cy="347472"/>
+            <a:off x="5349240" y="1005840"/>
+            <a:ext cx="6522415" cy="731520"/>
           </a:xfrm>
           <a:prstGeom prst="rect">
             <a:avLst/>
@@ -9484,24 +10157,68 @@
           <a:ln/>
         </p:spPr>
         <p:txBody>
-          <a:bodyPr wrap="square" lIns="0" tIns="0" rIns="0" bIns="0" rtlCol="0" anchor="ctr"/>
+          <a:bodyPr wrap="square" lIns="0" tIns="0" rIns="0" bIns="0" rtlCol="0" anchor="ctr">
+            <a:normAutofit/>
+          </a:bodyPr>
           <a:lstStyle/>
           <a:p>
             <a:pPr algn="ctr" indent="0" marL="0">
               <a:buNone/>
             </a:pPr>
             <a:r>
-              <a:rPr lang="en-US" sz="1800" i="1" dirty="0">
-                <a:solidFill>
-                  <a:srgbClr val="555555"/>
+              <a:rPr lang="en-US" sz="3600" b="1" dirty="0">
+                <a:solidFill>
+                  <a:srgbClr val="990011"/>
                 </a:solidFill>
                 <a:latin typeface="Times New Roman" pitchFamily="34" charset="0"/>
                 <a:ea typeface="Times New Roman" pitchFamily="34" charset="-122"/>
                 <a:cs typeface="Times New Roman" pitchFamily="34" charset="-120"/>
               </a:rPr>
-              <a:t>A world map.</a:t>
-            </a:r>
-            <a:endParaRPr lang="en-US" sz="1800" dirty="0"/>
+              <a:t>Activity 1: Answer</a:t>
+            </a:r>
+            <a:endParaRPr lang="en-US" sz="3600" dirty="0"/>
+          </a:p>
+        </p:txBody>
+      </p:sp>
+      <p:sp>
+        <p:nvSpPr>
+          <p:cNvPr id="5" name="Text 2"/>
+          <p:cNvSpPr/>
+          <p:nvPr/>
+        </p:nvSpPr>
+        <p:spPr>
+          <a:xfrm>
+            <a:off x="5349240" y="1783080"/>
+            <a:ext cx="6522415" cy="4663440"/>
+          </a:xfrm>
+          <a:prstGeom prst="rect">
+            <a:avLst/>
+          </a:prstGeom>
+          <a:noFill/>
+          <a:ln/>
+        </p:spPr>
+        <p:txBody>
+          <a:bodyPr wrap="square" lIns="0" tIns="0" rIns="0" bIns="0" rtlCol="0" anchor="t"/>
+          <a:lstStyle/>
+          <a:p>
+            <a:pPr algn="l" indent="0" marL="0">
+              <a:spcAft>
+                <a:spcPts val="800"/>
+              </a:spcAft>
+              <a:buNone/>
+            </a:pPr>
+            <a:r>
+              <a:rPr lang="en-US" sz="4000" dirty="0">
+                <a:solidFill>
+                  <a:srgbClr val="111111"/>
+                </a:solidFill>
+                <a:latin typeface="Times New Roman" pitchFamily="34" charset="0"/>
+                <a:ea typeface="Times New Roman" pitchFamily="34" charset="-122"/>
+                <a:cs typeface="Times New Roman" pitchFamily="34" charset="-120"/>
+              </a:rPr>
+              <a:t>It is a globe.</a:t>
+            </a:r>
+            <a:endParaRPr lang="en-US" sz="4000" dirty="0"/>
           </a:p>
         </p:txBody>
       </p:sp>
@@ -9617,9 +10334,48 @@
           </a:p>
         </p:txBody>
       </p:sp>
+      <p:sp>
+        <p:nvSpPr>
+          <p:cNvPr id="3" name="Text 1"/>
+          <p:cNvSpPr/>
+          <p:nvPr/>
+        </p:nvSpPr>
+        <p:spPr>
+          <a:xfrm>
+            <a:off x="457200" y="1005840"/>
+            <a:ext cx="11277295" cy="731520"/>
+          </a:xfrm>
+          <a:prstGeom prst="rect">
+            <a:avLst/>
+          </a:prstGeom>
+          <a:noFill/>
+          <a:ln/>
+        </p:spPr>
+        <p:txBody>
+          <a:bodyPr wrap="square" lIns="0" tIns="0" rIns="0" bIns="0" rtlCol="0" anchor="ctr"/>
+          <a:lstStyle/>
+          <a:p>
+            <a:pPr algn="ctr" indent="0" marL="0">
+              <a:buNone/>
+            </a:pPr>
+            <a:r>
+              <a:rPr lang="en-US" sz="3600" b="1" dirty="0">
+                <a:solidFill>
+                  <a:srgbClr val="990011"/>
+                </a:solidFill>
+                <a:latin typeface="Times New Roman" pitchFamily="34" charset="0"/>
+                <a:ea typeface="Times New Roman" pitchFamily="34" charset="-122"/>
+                <a:cs typeface="Times New Roman" pitchFamily="34" charset="-120"/>
+              </a:rPr>
+              <a:t>Activity 2</a:t>
+            </a:r>
+            <a:endParaRPr lang="en-US" sz="3600" dirty="0"/>
+          </a:p>
+        </p:txBody>
+      </p:sp>
       <p:pic>
         <p:nvPicPr>
-          <p:cNvPr id="3" name="Image 0" descr="/home/claude/f4/img/minesec_sheet.png">    </p:cNvPr>
+          <p:cNvPr id="4" name="Image 0" descr="/home/claude/f4/img/v2/map_projections_big.png">    </p:cNvPr>
           <p:cNvPicPr>
             <a:picLocks noChangeAspect="1"/>
           </p:cNvPicPr>
@@ -9633,8 +10389,8 @@
         </p:blipFill>
         <p:spPr>
           <a:xfrm>
-            <a:off x="0" y="658368"/>
-            <a:ext cx="5120640" cy="5833872"/>
+            <a:off x="840158" y="1783080"/>
+            <a:ext cx="10511380" cy="4270248"/>
           </a:xfrm>
           <a:prstGeom prst="rect">
             <a:avLst/>
@@ -9643,14 +10399,14 @@
       </p:pic>
       <p:sp>
         <p:nvSpPr>
-          <p:cNvPr id="4" name="Text 1"/>
+          <p:cNvPr id="5" name="Text 2"/>
           <p:cNvSpPr/>
           <p:nvPr/>
         </p:nvSpPr>
         <p:spPr>
           <a:xfrm>
-            <a:off x="5349240" y="1005840"/>
-            <a:ext cx="6522415" cy="731520"/>
+            <a:off x="457200" y="6089904"/>
+            <a:ext cx="11277295" cy="347472"/>
           </a:xfrm>
           <a:prstGeom prst="rect">
             <a:avLst/>
@@ -9659,68 +10415,24 @@
           <a:ln/>
         </p:spPr>
         <p:txBody>
-          <a:bodyPr wrap="square" lIns="0" tIns="0" rIns="0" bIns="0" rtlCol="0" anchor="ctr">
-            <a:normAutofit/>
-          </a:bodyPr>
+          <a:bodyPr wrap="square" lIns="0" tIns="0" rIns="0" bIns="0" rtlCol="0" anchor="ctr"/>
           <a:lstStyle/>
           <a:p>
             <a:pPr algn="ctr" indent="0" marL="0">
               <a:buNone/>
             </a:pPr>
             <a:r>
-              <a:rPr lang="en-US" sz="3600" b="1" dirty="0">
-                <a:solidFill>
-                  <a:srgbClr val="990011"/>
+              <a:rPr lang="en-US" sz="1800" i="1" dirty="0">
+                <a:solidFill>
+                  <a:srgbClr val="555555"/>
                 </a:solidFill>
                 <a:latin typeface="Times New Roman" pitchFamily="34" charset="0"/>
                 <a:ea typeface="Times New Roman" pitchFamily="34" charset="-122"/>
                 <a:cs typeface="Times New Roman" pitchFamily="34" charset="-120"/>
               </a:rPr>
-              <a:t>Activity 2: Question</a:t>
-            </a:r>
-            <a:endParaRPr lang="en-US" sz="3600" dirty="0"/>
-          </a:p>
-        </p:txBody>
-      </p:sp>
-      <p:sp>
-        <p:nvSpPr>
-          <p:cNvPr id="5" name="Text 2"/>
-          <p:cNvSpPr/>
-          <p:nvPr/>
-        </p:nvSpPr>
-        <p:spPr>
-          <a:xfrm>
-            <a:off x="5349240" y="1783080"/>
-            <a:ext cx="6522415" cy="4663440"/>
-          </a:xfrm>
-          <a:prstGeom prst="rect">
-            <a:avLst/>
-          </a:prstGeom>
-          <a:noFill/>
-          <a:ln/>
-        </p:spPr>
-        <p:txBody>
-          <a:bodyPr wrap="square" lIns="0" tIns="0" rIns="0" bIns="0" rtlCol="0" anchor="t"/>
-          <a:lstStyle/>
-          <a:p>
-            <a:pPr algn="l" indent="0" marL="0">
-              <a:spcAft>
-                <a:spcPts val="800"/>
-              </a:spcAft>
-              <a:buNone/>
-            </a:pPr>
-            <a:r>
-              <a:rPr lang="en-US" sz="4000" dirty="0">
-                <a:solidFill>
-                  <a:srgbClr val="111111"/>
-                </a:solidFill>
-                <a:latin typeface="Times New Roman" pitchFamily="34" charset="0"/>
-                <a:ea typeface="Times New Roman" pitchFamily="34" charset="-122"/>
-                <a:cs typeface="Times New Roman" pitchFamily="34" charset="-120"/>
-              </a:rPr>
-              <a:t>What happens to the shapes of the continents when the round Earth is drawn on a flat map?</a:t>
-            </a:r>
-            <a:endParaRPr lang="en-US" sz="4000" dirty="0"/>
+              <a:t>The Earth drawn on flat surfaces.</a:t>
+            </a:r>
+            <a:endParaRPr lang="en-US" sz="1800" dirty="0"/>
           </a:p>
         </p:txBody>
       </p:sp>
@@ -9895,7 +10607,7 @@
                 <a:ea typeface="Times New Roman" pitchFamily="34" charset="-122"/>
                 <a:cs typeface="Times New Roman" pitchFamily="34" charset="-120"/>
               </a:rPr>
-              <a:t>Activity 2: Answer</a:t>
+              <a:t>Activity 2: Question 1</a:t>
             </a:r>
             <a:endParaRPr lang="en-US" sz="3600" dirty="0"/>
           </a:p>
@@ -9937,7 +10649,7 @@
                 <a:ea typeface="Times New Roman" pitchFamily="34" charset="-122"/>
                 <a:cs typeface="Times New Roman" pitchFamily="34" charset="-120"/>
               </a:rPr>
-              <a:t>Some shapes and sizes are changed (distorted), especially near the poles; the way of drawing is called a projection.</a:t>
+              <a:t>Compare these three world maps. Are the shapes of the continents the same?</a:t>
             </a:r>
             <a:endParaRPr lang="en-US" sz="4000" dirty="0"/>
           </a:p>
@@ -10049,54 +10761,15 @@
                 <a:ea typeface="Calibri" pitchFamily="34" charset="-122"/>
                 <a:cs typeface="Calibri" pitchFamily="34" charset="-120"/>
               </a:rPr>
-              <a:t>2. MARGINAL INFORMATION</a:t>
+              <a:t>1. FORMS OF REPRESENTATION</a:t>
             </a:r>
             <a:endParaRPr lang="en-US" sz="1400" dirty="0"/>
-          </a:p>
-        </p:txBody>
-      </p:sp>
-      <p:sp>
-        <p:nvSpPr>
-          <p:cNvPr id="3" name="Text 1"/>
-          <p:cNvSpPr/>
-          <p:nvPr/>
-        </p:nvSpPr>
-        <p:spPr>
-          <a:xfrm>
-            <a:off x="457200" y="1005840"/>
-            <a:ext cx="11277295" cy="731520"/>
-          </a:xfrm>
-          <a:prstGeom prst="rect">
-            <a:avLst/>
-          </a:prstGeom>
-          <a:noFill/>
-          <a:ln/>
-        </p:spPr>
-        <p:txBody>
-          <a:bodyPr wrap="square" lIns="0" tIns="0" rIns="0" bIns="0" rtlCol="0" anchor="ctr"/>
-          <a:lstStyle/>
-          <a:p>
-            <a:pPr algn="ctr" indent="0" marL="0">
-              <a:buNone/>
-            </a:pPr>
-            <a:r>
-              <a:rPr lang="en-US" sz="3600" b="1" dirty="0">
-                <a:solidFill>
-                  <a:srgbClr val="990011"/>
-                </a:solidFill>
-                <a:latin typeface="Times New Roman" pitchFamily="34" charset="0"/>
-                <a:ea typeface="Times New Roman" pitchFamily="34" charset="-122"/>
-                <a:cs typeface="Times New Roman" pitchFamily="34" charset="-120"/>
-              </a:rPr>
-              <a:t>Activity 3</a:t>
-            </a:r>
-            <a:endParaRPr lang="en-US" sz="3600" dirty="0"/>
           </a:p>
         </p:txBody>
       </p:sp>
       <p:pic>
         <p:nvPicPr>
-          <p:cNvPr id="4" name="Image 0" descr="/home/claude/f4/img/v2/map_marginal_big.png">    </p:cNvPr>
+          <p:cNvPr id="3" name="Image 0" descr="/home/claude/f4/img/minesec_sheet.png">    </p:cNvPr>
           <p:cNvPicPr>
             <a:picLocks noChangeAspect="1"/>
           </p:cNvPicPr>
@@ -10110,8 +10783,8 @@
         </p:blipFill>
         <p:spPr>
           <a:xfrm>
-            <a:off x="629930" y="1783080"/>
-            <a:ext cx="10931835" cy="4270248"/>
+            <a:off x="0" y="658368"/>
+            <a:ext cx="5120640" cy="5833872"/>
           </a:xfrm>
           <a:prstGeom prst="rect">
             <a:avLst/>
@@ -10120,14 +10793,14 @@
       </p:pic>
       <p:sp>
         <p:nvSpPr>
-          <p:cNvPr id="5" name="Text 2"/>
+          <p:cNvPr id="4" name="Text 1"/>
           <p:cNvSpPr/>
           <p:nvPr/>
         </p:nvSpPr>
         <p:spPr>
           <a:xfrm>
-            <a:off x="457200" y="6089904"/>
-            <a:ext cx="11277295" cy="347472"/>
+            <a:off x="5349240" y="1005840"/>
+            <a:ext cx="6522415" cy="731520"/>
           </a:xfrm>
           <a:prstGeom prst="rect">
             <a:avLst/>
@@ -10136,24 +10809,68 @@
           <a:ln/>
         </p:spPr>
         <p:txBody>
-          <a:bodyPr wrap="square" lIns="0" tIns="0" rIns="0" bIns="0" rtlCol="0" anchor="ctr"/>
+          <a:bodyPr wrap="square" lIns="0" tIns="0" rIns="0" bIns="0" rtlCol="0" anchor="ctr">
+            <a:normAutofit/>
+          </a:bodyPr>
           <a:lstStyle/>
           <a:p>
             <a:pPr algn="ctr" indent="0" marL="0">
               <a:buNone/>
             </a:pPr>
             <a:r>
-              <a:rPr lang="en-US" sz="1800" i="1" dirty="0">
-                <a:solidFill>
-                  <a:srgbClr val="555555"/>
+              <a:rPr lang="en-US" sz="3600" b="1" dirty="0">
+                <a:solidFill>
+                  <a:srgbClr val="990011"/>
                 </a:solidFill>
                 <a:latin typeface="Times New Roman" pitchFamily="34" charset="0"/>
                 <a:ea typeface="Times New Roman" pitchFamily="34" charset="-122"/>
                 <a:cs typeface="Times New Roman" pitchFamily="34" charset="-120"/>
               </a:rPr>
-              <a:t>The marginal information of a map.</a:t>
-            </a:r>
-            <a:endParaRPr lang="en-US" sz="1800" dirty="0"/>
+              <a:t>Activity 2: Answer 1</a:t>
+            </a:r>
+            <a:endParaRPr lang="en-US" sz="3600" dirty="0"/>
+          </a:p>
+        </p:txBody>
+      </p:sp>
+      <p:sp>
+        <p:nvSpPr>
+          <p:cNvPr id="5" name="Text 2"/>
+          <p:cNvSpPr/>
+          <p:nvPr/>
+        </p:nvSpPr>
+        <p:spPr>
+          <a:xfrm>
+            <a:off x="5349240" y="1783080"/>
+            <a:ext cx="6522415" cy="4663440"/>
+          </a:xfrm>
+          <a:prstGeom prst="rect">
+            <a:avLst/>
+          </a:prstGeom>
+          <a:noFill/>
+          <a:ln/>
+        </p:spPr>
+        <p:txBody>
+          <a:bodyPr wrap="square" lIns="0" tIns="0" rIns="0" bIns="0" rtlCol="0" anchor="t"/>
+          <a:lstStyle/>
+          <a:p>
+            <a:pPr algn="l" indent="0" marL="0">
+              <a:spcAft>
+                <a:spcPts val="800"/>
+              </a:spcAft>
+              <a:buNone/>
+            </a:pPr>
+            <a:r>
+              <a:rPr lang="en-US" sz="4000" dirty="0">
+                <a:solidFill>
+                  <a:srgbClr val="111111"/>
+                </a:solidFill>
+                <a:latin typeface="Times New Roman" pitchFamily="34" charset="0"/>
+                <a:ea typeface="Times New Roman" pitchFamily="34" charset="-122"/>
+                <a:cs typeface="Times New Roman" pitchFamily="34" charset="-120"/>
+              </a:rPr>
+              <a:t>No, the shapes and sizes of the continents change from one map to another.</a:t>
+            </a:r>
+            <a:endParaRPr lang="en-US" sz="4000" dirty="0"/>
           </a:p>
         </p:txBody>
       </p:sp>
@@ -10263,7 +10980,7 @@
                 <a:ea typeface="Calibri" pitchFamily="34" charset="-122"/>
                 <a:cs typeface="Calibri" pitchFamily="34" charset="-120"/>
               </a:rPr>
-              <a:t>2. MARGINAL INFORMATION</a:t>
+              <a:t>1. FORMS OF REPRESENTATION</a:t>
             </a:r>
             <a:endParaRPr lang="en-US" sz="1400" dirty="0"/>
           </a:p>
@@ -10328,7 +11045,7 @@
                 <a:ea typeface="Times New Roman" pitchFamily="34" charset="-122"/>
                 <a:cs typeface="Times New Roman" pitchFamily="34" charset="-120"/>
               </a:rPr>
-              <a:t>Activity 3: Question</a:t>
+              <a:t>Activity 2: Question 2</a:t>
             </a:r>
             <a:endParaRPr lang="en-US" sz="3600" dirty="0"/>
           </a:p>
@@ -10370,7 +11087,7 @@
                 <a:ea typeface="Times New Roman" pitchFamily="34" charset="-122"/>
                 <a:cs typeface="Times New Roman" pitchFamily="34" charset="-120"/>
               </a:rPr>
-              <a:t>Name the elements written around a map.</a:t>
+              <a:t>Why are they different?</a:t>
             </a:r>
             <a:endParaRPr lang="en-US" sz="4000" dirty="0"/>
           </a:p>
@@ -10482,7 +11199,7 @@
                 <a:ea typeface="Calibri" pitchFamily="34" charset="-122"/>
                 <a:cs typeface="Calibri" pitchFamily="34" charset="-120"/>
               </a:rPr>
-              <a:t>2. MARGINAL INFORMATION</a:t>
+              <a:t>1. FORMS OF REPRESENTATION</a:t>
             </a:r>
             <a:endParaRPr lang="en-US" sz="1400" dirty="0"/>
           </a:p>
@@ -10547,7 +11264,7 @@
                 <a:ea typeface="Times New Roman" pitchFamily="34" charset="-122"/>
                 <a:cs typeface="Times New Roman" pitchFamily="34" charset="-120"/>
               </a:rPr>
-              <a:t>Activity 3: Answer</a:t>
+              <a:t>Activity 2: Answer 2</a:t>
             </a:r>
             <a:endParaRPr lang="en-US" sz="3600" dirty="0"/>
           </a:p>
@@ -10589,7 +11306,7 @@
                 <a:ea typeface="Times New Roman" pitchFamily="34" charset="-122"/>
                 <a:cs typeface="Times New Roman" pitchFamily="34" charset="-120"/>
               </a:rPr>
-              <a:t>The title, the key, the scale, the north arrow, the frame and the grid lines.</a:t>
+              <a:t>Because the round Earth is drawn on a flat surface in different ways, called projections.</a:t>
             </a:r>
             <a:endParaRPr lang="en-US" sz="4000" dirty="0"/>
           </a:p>
@@ -10701,7 +11418,7 @@
                 <a:ea typeface="Calibri" pitchFamily="34" charset="-122"/>
                 <a:cs typeface="Calibri" pitchFamily="34" charset="-120"/>
               </a:rPr>
-              <a:t>3. SCALE AND DISTANCE</a:t>
+              <a:t>2. MARGINAL INFORMATION</a:t>
             </a:r>
             <a:endParaRPr lang="en-US" sz="1400" dirty="0"/>
           </a:p>
@@ -10740,7 +11457,7 @@
                 <a:ea typeface="Times New Roman" pitchFamily="34" charset="-122"/>
                 <a:cs typeface="Times New Roman" pitchFamily="34" charset="-120"/>
               </a:rPr>
-              <a:t>Activity 4</a:t>
+              <a:t>Activity 3</a:t>
             </a:r>
             <a:endParaRPr lang="en-US" sz="3600" dirty="0"/>
           </a:p>
@@ -10748,7 +11465,7 @@
       </p:sp>
       <p:pic>
         <p:nvPicPr>
-          <p:cNvPr id="4" name="Image 0" descr="/home/claude/f4/img/v2/scale_types_big.png">    </p:cNvPr>
+          <p:cNvPr id="4" name="Image 0" descr="/home/claude/f4/img/v2/map_marginal_big.png">    </p:cNvPr>
           <p:cNvPicPr>
             <a:picLocks noChangeAspect="1"/>
           </p:cNvPicPr>
@@ -10803,7 +11520,7 @@
                 <a:ea typeface="Times New Roman" pitchFamily="34" charset="-122"/>
                 <a:cs typeface="Times New Roman" pitchFamily="34" charset="-120"/>
               </a:rPr>
-              <a:t>Types of scale.</a:t>
+              <a:t>A map and the information around it.</a:t>
             </a:r>
             <a:endParaRPr lang="en-US" sz="1800" dirty="0"/>
           </a:p>
@@ -10915,7 +11632,7 @@
                 <a:ea typeface="Calibri" pitchFamily="34" charset="-122"/>
                 <a:cs typeface="Calibri" pitchFamily="34" charset="-120"/>
               </a:rPr>
-              <a:t>3. SCALE AND DISTANCE</a:t>
+              <a:t>2. MARGINAL INFORMATION</a:t>
             </a:r>
             <a:endParaRPr lang="en-US" sz="1400" dirty="0"/>
           </a:p>
@@ -10980,7 +11697,7 @@
                 <a:ea typeface="Times New Roman" pitchFamily="34" charset="-122"/>
                 <a:cs typeface="Times New Roman" pitchFamily="34" charset="-120"/>
               </a:rPr>
-              <a:t>Activity 4: Question</a:t>
+              <a:t>Activity 3: Question</a:t>
             </a:r>
             <a:endParaRPr lang="en-US" sz="3600" dirty="0"/>
           </a:p>
@@ -11022,7 +11739,7 @@
                 <a:ea typeface="Times New Roman" pitchFamily="34" charset="-122"/>
                 <a:cs typeface="Times New Roman" pitchFamily="34" charset="-120"/>
               </a:rPr>
-              <a:t>On a map of scale 1 cm to 25 km, Garoua and Maroua are 6 cm apart. What is the real distance?</a:t>
+              <a:t>Name the elements written around this map.</a:t>
             </a:r>
             <a:endParaRPr lang="en-US" sz="4000" dirty="0"/>
           </a:p>
@@ -11134,7 +11851,7 @@
                 <a:ea typeface="Calibri" pitchFamily="34" charset="-122"/>
                 <a:cs typeface="Calibri" pitchFamily="34" charset="-120"/>
               </a:rPr>
-              <a:t>3. SCALE AND DISTANCE</a:t>
+              <a:t>2. MARGINAL INFORMATION</a:t>
             </a:r>
             <a:endParaRPr lang="en-US" sz="1400" dirty="0"/>
           </a:p>
@@ -11199,7 +11916,7 @@
                 <a:ea typeface="Times New Roman" pitchFamily="34" charset="-122"/>
                 <a:cs typeface="Times New Roman" pitchFamily="34" charset="-120"/>
               </a:rPr>
-              <a:t>Activity 4: Answer</a:t>
+              <a:t>Activity 3: Answer</a:t>
             </a:r>
             <a:endParaRPr lang="en-US" sz="3600" dirty="0"/>
           </a:p>
@@ -11241,7 +11958,7 @@
                 <a:ea typeface="Times New Roman" pitchFamily="34" charset="-122"/>
                 <a:cs typeface="Times New Roman" pitchFamily="34" charset="-120"/>
               </a:rPr>
-              <a:t>6 × 25 = 150 km.</a:t>
+              <a:t>The title, the key, the scale, the north arrow, the frame and the grid lines.</a:t>
             </a:r>
             <a:endParaRPr lang="en-US" sz="4000" dirty="0"/>
           </a:p>
@@ -12062,7 +12779,7 @@
                           <a:ea typeface="Calibri" pitchFamily="34" charset="-122"/>
                           <a:cs typeface="Calibri" pitchFamily="34" charset="-120"/>
                         </a:rPr>
-                        <a:t>Forms of representation of the Earth's shape (globe, world map, projections); marginal information on maps; reading a scale and calculating distances.</a:t>
+                        <a:t>Theoretical basis: forms of representation of the Earth's shape (globe, world map, projections). Practical exercise: identification of the marginal information on maps (title, key, scale, cardinal points, grid lines, latitudes and longitudes, orientation). Contextualisation: read the scale of a map and calculate distances between places.</a:t>
                       </a:r>
                       <a:endParaRPr lang="en-US" sz="1700" dirty="0">
                         <a:latin typeface="Calibri" charset="0"/>
@@ -12362,7 +13079,7 @@
                 <a:ea typeface="Calibri" pitchFamily="34" charset="-122"/>
                 <a:cs typeface="Calibri" pitchFamily="34" charset="-120"/>
               </a:rPr>
-              <a:t>3. SCALE AND DISTANCE</a:t>
+              <a:t>3. READING THE SCALE</a:t>
             </a:r>
             <a:endParaRPr lang="en-US" sz="1400" dirty="0"/>
           </a:p>
@@ -12401,7 +13118,7 @@
                 <a:ea typeface="Times New Roman" pitchFamily="34" charset="-122"/>
                 <a:cs typeface="Times New Roman" pitchFamily="34" charset="-120"/>
               </a:rPr>
-              <a:t>Activity 5</a:t>
+              <a:t>Activity 4</a:t>
             </a:r>
             <a:endParaRPr lang="en-US" sz="3600" dirty="0"/>
           </a:p>
@@ -12409,7 +13126,7 @@
       </p:sp>
       <p:pic>
         <p:nvPicPr>
-          <p:cNvPr id="4" name="Image 0" descr="/home/claude/f4/img/v2/cameroon_grid_big.png">    </p:cNvPr>
+          <p:cNvPr id="4" name="Image 0" descr="/home/claude/f4/img/v2/scale_types_big.png">    </p:cNvPr>
           <p:cNvPicPr>
             <a:picLocks noChangeAspect="1"/>
           </p:cNvPicPr>
@@ -12423,8 +13140,8 @@
         </p:blipFill>
         <p:spPr>
           <a:xfrm>
-            <a:off x="2300072" y="1783080"/>
-            <a:ext cx="7591552" cy="4270248"/>
+            <a:off x="629930" y="1783080"/>
+            <a:ext cx="10931835" cy="4270248"/>
           </a:xfrm>
           <a:prstGeom prst="rect">
             <a:avLst/>
@@ -12464,7 +13181,7 @@
                 <a:ea typeface="Times New Roman" pitchFamily="34" charset="-122"/>
                 <a:cs typeface="Times New Roman" pitchFamily="34" charset="-120"/>
               </a:rPr>
-              <a:t>A map of Cameroon with grid lines.</a:t>
+              <a:t>Ways of writing the scale of a map.</a:t>
             </a:r>
             <a:endParaRPr lang="en-US" sz="1800" dirty="0"/>
           </a:p>
@@ -12576,7 +13293,7 @@
                 <a:ea typeface="Calibri" pitchFamily="34" charset="-122"/>
                 <a:cs typeface="Calibri" pitchFamily="34" charset="-120"/>
               </a:rPr>
-              <a:t>3. SCALE AND DISTANCE</a:t>
+              <a:t>3. READING THE SCALE</a:t>
             </a:r>
             <a:endParaRPr lang="en-US" sz="1400" dirty="0"/>
           </a:p>
@@ -12641,7 +13358,7 @@
                 <a:ea typeface="Times New Roman" pitchFamily="34" charset="-122"/>
                 <a:cs typeface="Times New Roman" pitchFamily="34" charset="-120"/>
               </a:rPr>
-              <a:t>Activity 5: Question</a:t>
+              <a:t>Activity 4: Question</a:t>
             </a:r>
             <a:endParaRPr lang="en-US" sz="3600" dirty="0"/>
           </a:p>
@@ -12683,7 +13400,7 @@
                 <a:ea typeface="Times New Roman" pitchFamily="34" charset="-122"/>
                 <a:cs typeface="Times New Roman" pitchFamily="34" charset="-120"/>
               </a:rPr>
-              <a:t>Which elements help us to find directions on this map?</a:t>
+              <a:t>What does the scale "1 cm to 25 km" mean?</a:t>
             </a:r>
             <a:endParaRPr lang="en-US" sz="4000" dirty="0"/>
           </a:p>
@@ -12795,7 +13512,7 @@
                 <a:ea typeface="Calibri" pitchFamily="34" charset="-122"/>
                 <a:cs typeface="Calibri" pitchFamily="34" charset="-120"/>
               </a:rPr>
-              <a:t>3. SCALE AND DISTANCE</a:t>
+              <a:t>3. READING THE SCALE</a:t>
             </a:r>
             <a:endParaRPr lang="en-US" sz="1400" dirty="0"/>
           </a:p>
@@ -12860,7 +13577,7 @@
                 <a:ea typeface="Times New Roman" pitchFamily="34" charset="-122"/>
                 <a:cs typeface="Times New Roman" pitchFamily="34" charset="-120"/>
               </a:rPr>
-              <a:t>Activity 5: Answer</a:t>
+              <a:t>Activity 4: Answer</a:t>
             </a:r>
             <a:endParaRPr lang="en-US" sz="3600" dirty="0"/>
           </a:p>
@@ -12902,7 +13619,7 @@
                 <a:ea typeface="Times New Roman" pitchFamily="34" charset="-122"/>
                 <a:cs typeface="Times New Roman" pitchFamily="34" charset="-120"/>
               </a:rPr>
-              <a:t>The north arrow and the cardinal points (N, S, E, W).</a:t>
+              <a:t>One centimetre on the map represents 25 kilometres on the ground.</a:t>
             </a:r>
             <a:endParaRPr lang="en-US" sz="4000" dirty="0"/>
           </a:p>
@@ -13014,15 +13731,54 @@
                 <a:ea typeface="Calibri" pitchFamily="34" charset="-122"/>
                 <a:cs typeface="Calibri" pitchFamily="34" charset="-120"/>
               </a:rPr>
-              <a:t>BOARD SUMMARY</a:t>
+              <a:t>3. CALCULATING DISTANCES</a:t>
             </a:r>
             <a:endParaRPr lang="en-US" sz="1400" dirty="0"/>
+          </a:p>
+        </p:txBody>
+      </p:sp>
+      <p:sp>
+        <p:nvSpPr>
+          <p:cNvPr id="3" name="Text 1"/>
+          <p:cNvSpPr/>
+          <p:nvPr/>
+        </p:nvSpPr>
+        <p:spPr>
+          <a:xfrm>
+            <a:off x="457200" y="1005840"/>
+            <a:ext cx="11277295" cy="731520"/>
+          </a:xfrm>
+          <a:prstGeom prst="rect">
+            <a:avLst/>
+          </a:prstGeom>
+          <a:noFill/>
+          <a:ln/>
+        </p:spPr>
+        <p:txBody>
+          <a:bodyPr wrap="square" lIns="0" tIns="0" rIns="0" bIns="0" rtlCol="0" anchor="ctr"/>
+          <a:lstStyle/>
+          <a:p>
+            <a:pPr algn="ctr" indent="0" marL="0">
+              <a:buNone/>
+            </a:pPr>
+            <a:r>
+              <a:rPr lang="en-US" sz="3600" b="1" dirty="0">
+                <a:solidFill>
+                  <a:srgbClr val="990011"/>
+                </a:solidFill>
+                <a:latin typeface="Times New Roman" pitchFamily="34" charset="0"/>
+                <a:ea typeface="Times New Roman" pitchFamily="34" charset="-122"/>
+                <a:cs typeface="Times New Roman" pitchFamily="34" charset="-120"/>
+              </a:rPr>
+              <a:t>Activity 5</a:t>
+            </a:r>
+            <a:endParaRPr lang="en-US" sz="3600" dirty="0"/>
           </a:p>
         </p:txBody>
       </p:sp>
       <p:pic>
         <p:nvPicPr>
-          <p:cNvPr id="3" name="Image 0" descr="/home/claude/f4/img/minesec_sheet.png">    </p:cNvPr>
+          <p:cNvPr id="4" name="Image 0" descr="/home/claude/f4/img/v2/cameroon_grid_big.png">    </p:cNvPr>
           <p:cNvPicPr>
             <a:picLocks noChangeAspect="1"/>
           </p:cNvPicPr>
@@ -13036,8 +13792,8 @@
         </p:blipFill>
         <p:spPr>
           <a:xfrm>
-            <a:off x="0" y="658368"/>
-            <a:ext cx="5120640" cy="5833872"/>
+            <a:off x="2300072" y="1783080"/>
+            <a:ext cx="7591552" cy="4270248"/>
           </a:xfrm>
           <a:prstGeom prst="rect">
             <a:avLst/>
@@ -13046,14 +13802,14 @@
       </p:pic>
       <p:sp>
         <p:nvSpPr>
-          <p:cNvPr id="4" name="Text 1"/>
+          <p:cNvPr id="5" name="Text 2"/>
           <p:cNvSpPr/>
           <p:nvPr/>
         </p:nvSpPr>
         <p:spPr>
           <a:xfrm>
-            <a:off x="5349240" y="1005840"/>
-            <a:ext cx="6522415" cy="731520"/>
+            <a:off x="457200" y="6089904"/>
+            <a:ext cx="11277295" cy="347472"/>
           </a:xfrm>
           <a:prstGeom prst="rect">
             <a:avLst/>
@@ -13062,108 +13818,24 @@
           <a:ln/>
         </p:spPr>
         <p:txBody>
-          <a:bodyPr wrap="square" lIns="0" tIns="0" rIns="0" bIns="0" rtlCol="0" anchor="ctr">
-            <a:normAutofit/>
-          </a:bodyPr>
+          <a:bodyPr wrap="square" lIns="0" tIns="0" rIns="0" bIns="0" rtlCol="0" anchor="ctr"/>
           <a:lstStyle/>
           <a:p>
             <a:pPr algn="ctr" indent="0" marL="0">
               <a:buNone/>
             </a:pPr>
             <a:r>
-              <a:rPr lang="en-US" sz="3600" b="1" dirty="0">
-                <a:solidFill>
-                  <a:srgbClr val="990011"/>
+              <a:rPr lang="en-US" sz="1800" i="1" dirty="0">
+                <a:solidFill>
+                  <a:srgbClr val="555555"/>
                 </a:solidFill>
                 <a:latin typeface="Times New Roman" pitchFamily="34" charset="0"/>
                 <a:ea typeface="Times New Roman" pitchFamily="34" charset="-122"/>
                 <a:cs typeface="Times New Roman" pitchFamily="34" charset="-120"/>
               </a:rPr>
-              <a:t>Board Summary</a:t>
-            </a:r>
-            <a:endParaRPr lang="en-US" sz="3600" dirty="0"/>
-          </a:p>
-        </p:txBody>
-      </p:sp>
-      <p:sp>
-        <p:nvSpPr>
-          <p:cNvPr id="5" name="Text 2"/>
-          <p:cNvSpPr/>
-          <p:nvPr/>
-        </p:nvSpPr>
-        <p:spPr>
-          <a:xfrm>
-            <a:off x="5349240" y="1783080"/>
-            <a:ext cx="6522415" cy="4663440"/>
-          </a:xfrm>
-          <a:prstGeom prst="rect">
-            <a:avLst/>
-          </a:prstGeom>
-          <a:noFill/>
-          <a:ln/>
-        </p:spPr>
-        <p:txBody>
-          <a:bodyPr wrap="square" lIns="0" tIns="0" rIns="0" bIns="0" rtlCol="0" anchor="t"/>
-          <a:lstStyle/>
-          <a:p>
-            <a:pPr algn="l" indent="0" marL="0">
-              <a:spcAft>
-                <a:spcPts val="800"/>
-              </a:spcAft>
-              <a:buNone/>
-            </a:pPr>
-            <a:r>
-              <a:rPr lang="en-US" sz="4000" b="1" dirty="0">
-                <a:solidFill>
-                  <a:srgbClr val="111111"/>
-                </a:solidFill>
-                <a:latin typeface="Times New Roman" pitchFamily="34" charset="0"/>
-                <a:ea typeface="Times New Roman" pitchFamily="34" charset="-122"/>
-                <a:cs typeface="Times New Roman" pitchFamily="34" charset="-120"/>
-              </a:rPr>
-              <a:t>Topic: The Earth in the Universe</a:t>
-            </a:r>
-            <a:endParaRPr lang="en-US" sz="4000" dirty="0"/>
-          </a:p>
-          <a:p>
-            <a:pPr algn="l" indent="0" marL="0">
-              <a:spcAft>
-                <a:spcPts val="800"/>
-              </a:spcAft>
-              <a:buNone/>
-            </a:pPr>
-            <a:r>
-              <a:rPr lang="en-US" sz="4000" b="1" dirty="0">
-                <a:solidFill>
-                  <a:srgbClr val="111111"/>
-                </a:solidFill>
-                <a:latin typeface="Times New Roman" pitchFamily="34" charset="0"/>
-                <a:ea typeface="Times New Roman" pitchFamily="34" charset="-122"/>
-                <a:cs typeface="Times New Roman" pitchFamily="34" charset="-120"/>
-              </a:rPr>
-              <a:t>Sub-topic: The Earth: A Planet of the Solar System</a:t>
-            </a:r>
-            <a:endParaRPr lang="en-US" sz="4000" dirty="0"/>
-          </a:p>
-          <a:p>
-            <a:pPr algn="l" indent="0" marL="0">
-              <a:spcAft>
-                <a:spcPts val="800"/>
-              </a:spcAft>
-              <a:buNone/>
-            </a:pPr>
-            <a:r>
-              <a:rPr lang="en-US" sz="4000" b="1" dirty="0">
-                <a:solidFill>
-                  <a:srgbClr val="990011"/>
-                </a:solidFill>
-                <a:latin typeface="Times New Roman" pitchFamily="34" charset="0"/>
-                <a:ea typeface="Times New Roman" pitchFamily="34" charset="-122"/>
-                <a:cs typeface="Times New Roman" pitchFamily="34" charset="-120"/>
-              </a:rPr>
-              <a:t>Practical Work 1: Representation of the Earth's Shape and Size</a:t>
-            </a:r>
-            <a:endParaRPr lang="en-US" sz="4000" dirty="0"/>
+              <a:t>A map of Cameroon.</a:t>
+            </a:r>
+            <a:endParaRPr lang="en-US" sz="1800" dirty="0"/>
           </a:p>
         </p:txBody>
       </p:sp>
@@ -13273,7 +13945,7 @@
                 <a:ea typeface="Calibri" pitchFamily="34" charset="-122"/>
                 <a:cs typeface="Calibri" pitchFamily="34" charset="-120"/>
               </a:rPr>
-              <a:t>BOARD SUMMARY</a:t>
+              <a:t>3. CALCULATING DISTANCES</a:t>
             </a:r>
             <a:endParaRPr lang="en-US" sz="1400" dirty="0"/>
           </a:p>
@@ -13338,7 +14010,7 @@
                 <a:ea typeface="Times New Roman" pitchFamily="34" charset="-122"/>
                 <a:cs typeface="Times New Roman" pitchFamily="34" charset="-120"/>
               </a:rPr>
-              <a:t>DEFINITIONS</a:t>
+              <a:t>Activity 5: Question</a:t>
             </a:r>
             <a:endParaRPr lang="en-US" sz="3600" dirty="0"/>
           </a:p>
@@ -13372,7 +14044,7 @@
               <a:buNone/>
             </a:pPr>
             <a:r>
-              <a:rPr lang="en-US" sz="4000" i="1" dirty="0">
+              <a:rPr lang="en-US" sz="4000" dirty="0">
                 <a:solidFill>
                   <a:srgbClr val="111111"/>
                 </a:solidFill>
@@ -13380,81 +14052,7 @@
                 <a:ea typeface="Times New Roman" pitchFamily="34" charset="-122"/>
                 <a:cs typeface="Times New Roman" pitchFamily="34" charset="-120"/>
               </a:rPr>
-              <a:t>The key terms of this lesson are defined as follows:</a:t>
-            </a:r>
-            <a:endParaRPr lang="en-US" sz="4000" dirty="0"/>
-          </a:p>
-          <a:p>
-            <a:pPr algn="l" indent="0" marL="0">
-              <a:spcAft>
-                <a:spcPts val="800"/>
-              </a:spcAft>
-              <a:buNone/>
-            </a:pPr>
-            <a:r>
-              <a:rPr lang="en-US" sz="4000" b="1" dirty="0">
-                <a:solidFill>
-                  <a:srgbClr val="111111"/>
-                </a:solidFill>
-                <a:latin typeface="Times New Roman" pitchFamily="34" charset="0"/>
-                <a:ea typeface="Times New Roman" pitchFamily="34" charset="-122"/>
-                <a:cs typeface="Times New Roman" pitchFamily="34" charset="-120"/>
-              </a:rPr>
-              <a:t>Globe: </a:t>
-            </a:r>
-            <a:pPr algn="l" indent="0" marL="0">
-              <a:spcAft>
-                <a:spcPts val="800"/>
-              </a:spcAft>
-              <a:buNone/>
-            </a:pPr>
-            <a:r>
-              <a:rPr lang="en-US" sz="4000" dirty="0">
-                <a:solidFill>
-                  <a:srgbClr val="111111"/>
-                </a:solidFill>
-                <a:latin typeface="Times New Roman" pitchFamily="34" charset="0"/>
-                <a:ea typeface="Times New Roman" pitchFamily="34" charset="-122"/>
-                <a:cs typeface="Times New Roman" pitchFamily="34" charset="-120"/>
-              </a:rPr>
-              <a:t>It is a round model of the Earth.</a:t>
-            </a:r>
-            <a:endParaRPr lang="en-US" sz="4000" dirty="0"/>
-          </a:p>
-          <a:p>
-            <a:pPr algn="l" indent="0" marL="0">
-              <a:spcAft>
-                <a:spcPts val="800"/>
-              </a:spcAft>
-              <a:buNone/>
-            </a:pPr>
-            <a:r>
-              <a:rPr lang="en-US" sz="4000" b="1" dirty="0">
-                <a:solidFill>
-                  <a:srgbClr val="111111"/>
-                </a:solidFill>
-                <a:latin typeface="Times New Roman" pitchFamily="34" charset="0"/>
-                <a:ea typeface="Times New Roman" pitchFamily="34" charset="-122"/>
-                <a:cs typeface="Times New Roman" pitchFamily="34" charset="-120"/>
-              </a:rPr>
-              <a:t>Map: </a:t>
-            </a:r>
-            <a:pPr algn="l" indent="0" marL="0">
-              <a:spcAft>
-                <a:spcPts val="800"/>
-              </a:spcAft>
-              <a:buNone/>
-            </a:pPr>
-            <a:r>
-              <a:rPr lang="en-US" sz="4000" dirty="0">
-                <a:solidFill>
-                  <a:srgbClr val="111111"/>
-                </a:solidFill>
-                <a:latin typeface="Times New Roman" pitchFamily="34" charset="0"/>
-                <a:ea typeface="Times New Roman" pitchFamily="34" charset="-122"/>
-                <a:cs typeface="Times New Roman" pitchFamily="34" charset="-120"/>
-              </a:rPr>
-              <a:t>It is a drawing of the Earth or part of it on a flat surface.</a:t>
+              <a:t>With a scale of 1 cm to 25 km, Garoua and Maroua are 6 cm apart. What is the real distance?</a:t>
             </a:r>
             <a:endParaRPr lang="en-US" sz="4000" dirty="0"/>
           </a:p>
@@ -13566,7 +14164,7 @@
                 <a:ea typeface="Calibri" pitchFamily="34" charset="-122"/>
                 <a:cs typeface="Calibri" pitchFamily="34" charset="-120"/>
               </a:rPr>
-              <a:t>BOARD SUMMARY</a:t>
+              <a:t>3. CALCULATING DISTANCES</a:t>
             </a:r>
             <a:endParaRPr lang="en-US" sz="1400" dirty="0"/>
           </a:p>
@@ -13589,7 +14187,7 @@
         <p:spPr>
           <a:xfrm>
             <a:off x="0" y="658368"/>
-            <a:ext cx="3840480" cy="5833872"/>
+            <a:ext cx="5120640" cy="5833872"/>
           </a:xfrm>
           <a:prstGeom prst="rect">
             <a:avLst/>
@@ -13604,8 +14202,8 @@
         </p:nvSpPr>
         <p:spPr>
           <a:xfrm>
-            <a:off x="4069080" y="1005840"/>
-            <a:ext cx="7802575" cy="731520"/>
+            <a:off x="5349240" y="1005840"/>
+            <a:ext cx="6522415" cy="731520"/>
           </a:xfrm>
           <a:prstGeom prst="rect">
             <a:avLst/>
@@ -13631,7 +14229,7 @@
                 <a:ea typeface="Times New Roman" pitchFamily="34" charset="-122"/>
                 <a:cs typeface="Times New Roman" pitchFamily="34" charset="-120"/>
               </a:rPr>
-              <a:t>1. Forms of Representation of the Earth</a:t>
+              <a:t>Activity 5: Answer</a:t>
             </a:r>
             <a:endParaRPr lang="en-US" sz="3600" dirty="0"/>
           </a:p>
@@ -13645,8 +14243,8 @@
         </p:nvSpPr>
         <p:spPr>
           <a:xfrm>
-            <a:off x="4069080" y="1783080"/>
-            <a:ext cx="7802575" cy="4663440"/>
+            <a:off x="5349240" y="1783080"/>
+            <a:ext cx="6522415" cy="4663440"/>
           </a:xfrm>
           <a:prstGeom prst="rect">
             <a:avLst/>
@@ -13665,7 +14263,7 @@
               <a:buNone/>
             </a:pPr>
             <a:r>
-              <a:rPr lang="en-US" sz="4000" i="1" dirty="0">
+              <a:rPr lang="en-US" sz="4000" dirty="0">
                 <a:solidFill>
                   <a:srgbClr val="111111"/>
                 </a:solidFill>
@@ -13673,81 +14271,7 @@
                 <a:ea typeface="Times New Roman" pitchFamily="34" charset="-122"/>
                 <a:cs typeface="Times New Roman" pitchFamily="34" charset="-120"/>
               </a:rPr>
-              <a:t>The Earth is represented in the following ways:</a:t>
-            </a:r>
-            <a:endParaRPr lang="en-US" sz="4000" dirty="0"/>
-          </a:p>
-          <a:p>
-            <a:pPr algn="l" indent="0" marL="0">
-              <a:spcAft>
-                <a:spcPts val="800"/>
-              </a:spcAft>
-              <a:buNone/>
-            </a:pPr>
-            <a:r>
-              <a:rPr lang="en-US" sz="4000" b="1" dirty="0">
-                <a:solidFill>
-                  <a:srgbClr val="111111"/>
-                </a:solidFill>
-                <a:latin typeface="Times New Roman" pitchFamily="34" charset="0"/>
-                <a:ea typeface="Times New Roman" pitchFamily="34" charset="-122"/>
-                <a:cs typeface="Times New Roman" pitchFamily="34" charset="-120"/>
-              </a:rPr>
-              <a:t>Globe: </a:t>
-            </a:r>
-            <a:pPr algn="l" indent="0" marL="0">
-              <a:spcAft>
-                <a:spcPts val="800"/>
-              </a:spcAft>
-              <a:buNone/>
-            </a:pPr>
-            <a:r>
-              <a:rPr lang="en-US" sz="4000" dirty="0">
-                <a:solidFill>
-                  <a:srgbClr val="111111"/>
-                </a:solidFill>
-                <a:latin typeface="Times New Roman" pitchFamily="34" charset="0"/>
-                <a:ea typeface="Times New Roman" pitchFamily="34" charset="-122"/>
-                <a:cs typeface="Times New Roman" pitchFamily="34" charset="-120"/>
-              </a:rPr>
-              <a:t>A globe shows the true shape of the Earth but few details.</a:t>
-            </a:r>
-            <a:endParaRPr lang="en-US" sz="4000" dirty="0"/>
-          </a:p>
-          <a:p>
-            <a:pPr algn="l" indent="0" marL="0">
-              <a:spcAft>
-                <a:spcPts val="800"/>
-              </a:spcAft>
-              <a:buNone/>
-            </a:pPr>
-            <a:r>
-              <a:rPr lang="en-US" sz="4000" b="1" dirty="0">
-                <a:solidFill>
-                  <a:srgbClr val="111111"/>
-                </a:solidFill>
-                <a:latin typeface="Times New Roman" pitchFamily="34" charset="0"/>
-                <a:ea typeface="Times New Roman" pitchFamily="34" charset="-122"/>
-                <a:cs typeface="Times New Roman" pitchFamily="34" charset="-120"/>
-              </a:rPr>
-              <a:t>World map: </a:t>
-            </a:r>
-            <a:pPr algn="l" indent="0" marL="0">
-              <a:spcAft>
-                <a:spcPts val="800"/>
-              </a:spcAft>
-              <a:buNone/>
-            </a:pPr>
-            <a:r>
-              <a:rPr lang="en-US" sz="4000" dirty="0">
-                <a:solidFill>
-                  <a:srgbClr val="111111"/>
-                </a:solidFill>
-                <a:latin typeface="Times New Roman" pitchFamily="34" charset="0"/>
-                <a:ea typeface="Times New Roman" pitchFamily="34" charset="-122"/>
-                <a:cs typeface="Times New Roman" pitchFamily="34" charset="-120"/>
-              </a:rPr>
-              <a:t>A world map shows the whole Earth on a flat surface.</a:t>
+              <a:t>6 × 25 = 150 km.</a:t>
             </a:r>
             <a:endParaRPr lang="en-US" sz="4000" dirty="0"/>
           </a:p>
@@ -13924,7 +14448,7 @@
                 <a:ea typeface="Times New Roman" pitchFamily="34" charset="-122"/>
                 <a:cs typeface="Times New Roman" pitchFamily="34" charset="-120"/>
               </a:rPr>
-              <a:t>1. Forms of Representation of the Earth (continued)</a:t>
+              <a:t>Board Summary</a:t>
             </a:r>
             <a:endParaRPr lang="en-US" sz="3600" dirty="0"/>
           </a:p>
@@ -13966,8 +14490,11 @@
                 <a:ea typeface="Times New Roman" pitchFamily="34" charset="-122"/>
                 <a:cs typeface="Times New Roman" pitchFamily="34" charset="-120"/>
               </a:rPr>
-              <a:t>Projection: </a:t>
-            </a:r>
+              <a:t>Topic: The Earth in the Universe</a:t>
+            </a:r>
+            <a:endParaRPr lang="en-US" sz="4000" dirty="0"/>
+          </a:p>
+          <a:p>
             <a:pPr algn="l" indent="0" marL="0">
               <a:spcAft>
                 <a:spcPts val="800"/>
@@ -13975,7 +14502,7 @@
               <a:buNone/>
             </a:pPr>
             <a:r>
-              <a:rPr lang="en-US" sz="4000" dirty="0">
+              <a:rPr lang="en-US" sz="4000" b="1" dirty="0">
                 <a:solidFill>
                   <a:srgbClr val="111111"/>
                 </a:solidFill>
@@ -13983,7 +14510,27 @@
                 <a:ea typeface="Times New Roman" pitchFamily="34" charset="-122"/>
                 <a:cs typeface="Times New Roman" pitchFamily="34" charset="-120"/>
               </a:rPr>
-              <a:t>A projection is a method of drawing the round Earth on a flat map, which changes some shapes.</a:t>
+              <a:t>Sub-topic: The Earth: A Planet of the Solar System</a:t>
+            </a:r>
+            <a:endParaRPr lang="en-US" sz="4000" dirty="0"/>
+          </a:p>
+          <a:p>
+            <a:pPr algn="l" indent="0" marL="0">
+              <a:spcAft>
+                <a:spcPts val="800"/>
+              </a:spcAft>
+              <a:buNone/>
+            </a:pPr>
+            <a:r>
+              <a:rPr lang="en-US" sz="4000" b="1" dirty="0">
+                <a:solidFill>
+                  <a:srgbClr val="990011"/>
+                </a:solidFill>
+                <a:latin typeface="Times New Roman" pitchFamily="34" charset="0"/>
+                <a:ea typeface="Times New Roman" pitchFamily="34" charset="-122"/>
+                <a:cs typeface="Times New Roman" pitchFamily="34" charset="-120"/>
+              </a:rPr>
+              <a:t>Practical Work 1: Representation of the Earth's Shape and Size</a:t>
             </a:r>
             <a:endParaRPr lang="en-US" sz="4000" dirty="0"/>
           </a:p>
@@ -14118,7 +14665,7 @@
         <p:spPr>
           <a:xfrm>
             <a:off x="0" y="658368"/>
-            <a:ext cx="2468880" cy="5833872"/>
+            <a:ext cx="5120640" cy="5833872"/>
           </a:xfrm>
           <a:prstGeom prst="rect">
             <a:avLst/>
@@ -14133,8 +14680,8 @@
         </p:nvSpPr>
         <p:spPr>
           <a:xfrm>
-            <a:off x="2697480" y="1005840"/>
-            <a:ext cx="9174175" cy="731520"/>
+            <a:off x="5349240" y="1005840"/>
+            <a:ext cx="6522415" cy="731520"/>
           </a:xfrm>
           <a:prstGeom prst="rect">
             <a:avLst/>
@@ -14160,7 +14707,7 @@
                 <a:ea typeface="Times New Roman" pitchFamily="34" charset="-122"/>
                 <a:cs typeface="Times New Roman" pitchFamily="34" charset="-120"/>
               </a:rPr>
-              <a:t>2. Marginal Information on Maps</a:t>
+              <a:t>DEFINITIONS</a:t>
             </a:r>
             <a:endParaRPr lang="en-US" sz="3600" dirty="0"/>
           </a:p>
@@ -14174,8 +14721,8 @@
         </p:nvSpPr>
         <p:spPr>
           <a:xfrm>
-            <a:off x="2697480" y="1783080"/>
-            <a:ext cx="9174175" cy="4663440"/>
+            <a:off x="5349240" y="1783080"/>
+            <a:ext cx="6522415" cy="4663440"/>
           </a:xfrm>
           <a:prstGeom prst="rect">
             <a:avLst/>
@@ -14202,7 +14749,7 @@
                 <a:ea typeface="Times New Roman" pitchFamily="34" charset="-122"/>
                 <a:cs typeface="Times New Roman" pitchFamily="34" charset="-120"/>
               </a:rPr>
-              <a:t>A good map has the following elements:</a:t>
+              <a:t>The key terms of this lesson are defined as follows:</a:t>
             </a:r>
             <a:endParaRPr lang="en-US" sz="4000" dirty="0"/>
           </a:p>
@@ -14222,7 +14769,7 @@
                 <a:ea typeface="Times New Roman" pitchFamily="34" charset="-122"/>
                 <a:cs typeface="Times New Roman" pitchFamily="34" charset="-120"/>
               </a:rPr>
-              <a:t>Title: </a:t>
+              <a:t>Globe: </a:t>
             </a:r>
             <a:pPr algn="l" indent="0" marL="0">
               <a:spcAft>
@@ -14239,7 +14786,7 @@
                 <a:ea typeface="Times New Roman" pitchFamily="34" charset="-122"/>
                 <a:cs typeface="Times New Roman" pitchFamily="34" charset="-120"/>
               </a:rPr>
-              <a:t>It tells what the map shows.</a:t>
+              <a:t>It is a round model of the Earth.</a:t>
             </a:r>
             <a:endParaRPr lang="en-US" sz="4000" dirty="0"/>
           </a:p>
@@ -14259,7 +14806,7 @@
                 <a:ea typeface="Times New Roman" pitchFamily="34" charset="-122"/>
                 <a:cs typeface="Times New Roman" pitchFamily="34" charset="-120"/>
               </a:rPr>
-              <a:t>Key: </a:t>
+              <a:t>Map: </a:t>
             </a:r>
             <a:pPr algn="l" indent="0" marL="0">
               <a:spcAft>
@@ -14276,44 +14823,7 @@
                 <a:ea typeface="Times New Roman" pitchFamily="34" charset="-122"/>
                 <a:cs typeface="Times New Roman" pitchFamily="34" charset="-120"/>
               </a:rPr>
-              <a:t>It explains the signs and colours used on the map.</a:t>
-            </a:r>
-            <a:endParaRPr lang="en-US" sz="4000" dirty="0"/>
-          </a:p>
-          <a:p>
-            <a:pPr algn="l" indent="0" marL="0">
-              <a:spcAft>
-                <a:spcPts val="800"/>
-              </a:spcAft>
-              <a:buNone/>
-            </a:pPr>
-            <a:r>
-              <a:rPr lang="en-US" sz="4000" b="1" dirty="0">
-                <a:solidFill>
-                  <a:srgbClr val="111111"/>
-                </a:solidFill>
-                <a:latin typeface="Times New Roman" pitchFamily="34" charset="0"/>
-                <a:ea typeface="Times New Roman" pitchFamily="34" charset="-122"/>
-                <a:cs typeface="Times New Roman" pitchFamily="34" charset="-120"/>
-              </a:rPr>
-              <a:t>Scale: </a:t>
-            </a:r>
-            <a:pPr algn="l" indent="0" marL="0">
-              <a:spcAft>
-                <a:spcPts val="800"/>
-              </a:spcAft>
-              <a:buNone/>
-            </a:pPr>
-            <a:r>
-              <a:rPr lang="en-US" sz="4000" dirty="0">
-                <a:solidFill>
-                  <a:srgbClr val="111111"/>
-                </a:solidFill>
-                <a:latin typeface="Times New Roman" pitchFamily="34" charset="0"/>
-                <a:ea typeface="Times New Roman" pitchFamily="34" charset="-122"/>
-                <a:cs typeface="Times New Roman" pitchFamily="34" charset="-120"/>
-              </a:rPr>
-              <a:t>It shows the relation between a distance on the map and on the ground.</a:t>
+              <a:t>It is a drawing of the Earth or part of it on a flat surface.</a:t>
             </a:r>
             <a:endParaRPr lang="en-US" sz="4000" dirty="0"/>
           </a:p>
@@ -14490,7 +15000,7 @@
                 <a:ea typeface="Times New Roman" pitchFamily="34" charset="-122"/>
                 <a:cs typeface="Times New Roman" pitchFamily="34" charset="-120"/>
               </a:rPr>
-              <a:t>2. Marginal Information on Maps (continued)</a:t>
+              <a:t>DEFINITIONS (continued)</a:t>
             </a:r>
             <a:endParaRPr lang="en-US" sz="3600" dirty="0"/>
           </a:p>
@@ -14532,7 +15042,7 @@
                 <a:ea typeface="Times New Roman" pitchFamily="34" charset="-122"/>
                 <a:cs typeface="Times New Roman" pitchFamily="34" charset="-120"/>
               </a:rPr>
-              <a:t>North arrow and grid lines: </a:t>
+              <a:t>Projection: </a:t>
             </a:r>
             <a:pPr algn="l" indent="0" marL="0">
               <a:spcAft>
@@ -14549,7 +15059,7 @@
                 <a:ea typeface="Times New Roman" pitchFamily="34" charset="-122"/>
                 <a:cs typeface="Times New Roman" pitchFamily="34" charset="-120"/>
               </a:rPr>
-              <a:t>They show directions and help to locate places.</a:t>
+              <a:t>It is a method of drawing the round Earth on a flat map.</a:t>
             </a:r>
             <a:endParaRPr lang="en-US" sz="4000" dirty="0"/>
           </a:p>
@@ -14675,8 +15185,8 @@
         </p:nvSpPr>
         <p:spPr>
           <a:xfrm>
-            <a:off x="457200" y="1005840"/>
-            <a:ext cx="11277295" cy="731520"/>
+            <a:off x="365760" y="1005840"/>
+            <a:ext cx="11460175" cy="731520"/>
           </a:xfrm>
           <a:prstGeom prst="rect">
             <a:avLst/>
@@ -14685,7 +15195,9 @@
           <a:ln/>
         </p:spPr>
         <p:txBody>
-          <a:bodyPr wrap="square" lIns="0" tIns="0" rIns="0" bIns="0" rtlCol="0" anchor="ctr"/>
+          <a:bodyPr wrap="square" lIns="0" tIns="0" rIns="0" bIns="0" rtlCol="0" anchor="ctr">
+            <a:normAutofit/>
+          </a:bodyPr>
           <a:lstStyle/>
           <a:p>
             <a:pPr algn="ctr" indent="0" marL="0">
@@ -14700,15 +15212,94 @@
                 <a:ea typeface="Times New Roman" pitchFamily="34" charset="-122"/>
                 <a:cs typeface="Times New Roman" pitchFamily="34" charset="-120"/>
               </a:rPr>
-              <a:t>2. Marginal Information on Maps</a:t>
+              <a:t>1. Forms of Representation of the Earth</a:t>
             </a:r>
             <a:endParaRPr lang="en-US" sz="3600" dirty="0"/>
+          </a:p>
+        </p:txBody>
+      </p:sp>
+      <p:sp>
+        <p:nvSpPr>
+          <p:cNvPr id="4" name="Text 2"/>
+          <p:cNvSpPr/>
+          <p:nvPr/>
+        </p:nvSpPr>
+        <p:spPr>
+          <a:xfrm>
+            <a:off x="365760" y="1783080"/>
+            <a:ext cx="4846320" cy="4617720"/>
+          </a:xfrm>
+          <a:prstGeom prst="rect">
+            <a:avLst/>
+          </a:prstGeom>
+          <a:noFill/>
+          <a:ln/>
+        </p:spPr>
+        <p:txBody>
+          <a:bodyPr wrap="square" lIns="0" tIns="0" rIns="0" bIns="0" rtlCol="0" anchor="t"/>
+          <a:lstStyle/>
+          <a:p>
+            <a:pPr algn="l" indent="0" marL="0">
+              <a:spcAft>
+                <a:spcPts val="800"/>
+              </a:spcAft>
+              <a:buNone/>
+            </a:pPr>
+            <a:r>
+              <a:rPr lang="en-US" sz="3400" i="1" dirty="0">
+                <a:solidFill>
+                  <a:srgbClr val="111111"/>
+                </a:solidFill>
+                <a:latin typeface="Times New Roman" pitchFamily="34" charset="0"/>
+                <a:ea typeface="Times New Roman" pitchFamily="34" charset="-122"/>
+                <a:cs typeface="Times New Roman" pitchFamily="34" charset="-120"/>
+              </a:rPr>
+              <a:t>The Earth is represented in the following forms:</a:t>
+            </a:r>
+            <a:endParaRPr lang="en-US" sz="3400" dirty="0"/>
+          </a:p>
+          <a:p>
+            <a:pPr algn="l" indent="0" marL="0">
+              <a:spcAft>
+                <a:spcPts val="800"/>
+              </a:spcAft>
+              <a:buNone/>
+            </a:pPr>
+            <a:r>
+              <a:rPr lang="en-US" sz="3400" b="1" dirty="0">
+                <a:solidFill>
+                  <a:srgbClr val="111111"/>
+                </a:solidFill>
+                <a:latin typeface="Times New Roman" pitchFamily="34" charset="0"/>
+                <a:ea typeface="Times New Roman" pitchFamily="34" charset="-122"/>
+                <a:cs typeface="Times New Roman" pitchFamily="34" charset="-120"/>
+              </a:rPr>
+              <a:t>The globe: </a:t>
+            </a:r>
+            <a:pPr algn="l" indent="0" marL="0">
+              <a:spcAft>
+                <a:spcPts val="800"/>
+              </a:spcAft>
+              <a:buNone/>
+            </a:pPr>
+            <a:r>
+              <a:rPr lang="en-US" sz="3400" dirty="0">
+                <a:solidFill>
+                  <a:srgbClr val="111111"/>
+                </a:solidFill>
+                <a:latin typeface="Times New Roman" pitchFamily="34" charset="0"/>
+                <a:ea typeface="Times New Roman" pitchFamily="34" charset="-122"/>
+                <a:cs typeface="Times New Roman" pitchFamily="34" charset="-120"/>
+              </a:rPr>
+              <a:t>It shows the true shape and sizes of the continents. However, it shows only half of the Earth at once and few details.</a:t>
+            </a:r>
+            <a:endParaRPr lang="en-US" sz="3400" dirty="0"/>
           </a:p>
         </p:txBody>
       </p:sp>
       <p:pic>
         <p:nvPicPr>
-          <p:cNvPr id="4" name="Image 0" descr="/home/claude/f4/img/v2/map_marginal_big.png">    </p:cNvPr>
+          <p:cNvPr id="5" name="Image 0" descr="/home/claude/f4/img/v2/globe_big.png">    </p:cNvPr>
           <p:cNvPicPr>
             <a:picLocks noChangeAspect="1"/>
           </p:cNvPicPr>
@@ -14722,8 +15313,8 @@
         </p:blipFill>
         <p:spPr>
           <a:xfrm>
-            <a:off x="629930" y="1783080"/>
-            <a:ext cx="10931835" cy="4270248"/>
+            <a:off x="5349240" y="2461422"/>
+            <a:ext cx="6659575" cy="2913564"/>
           </a:xfrm>
           <a:prstGeom prst="rect">
             <a:avLst/>
@@ -14732,14 +15323,14 @@
       </p:pic>
       <p:sp>
         <p:nvSpPr>
-          <p:cNvPr id="5" name="Text 2"/>
+          <p:cNvPr id="6" name="Text 3"/>
           <p:cNvSpPr/>
           <p:nvPr/>
         </p:nvSpPr>
         <p:spPr>
           <a:xfrm>
-            <a:off x="457200" y="6089904"/>
-            <a:ext cx="11277295" cy="347472"/>
+            <a:off x="5349240" y="6089904"/>
+            <a:ext cx="6659575" cy="347472"/>
           </a:xfrm>
           <a:prstGeom prst="rect">
             <a:avLst/>
@@ -14755,7 +15346,7 @@
               <a:buNone/>
             </a:pPr>
             <a:r>
-              <a:rPr lang="en-US" sz="1800" i="1" dirty="0">
+              <a:rPr lang="en-US" sz="1600" i="1" dirty="0">
                 <a:solidFill>
                   <a:srgbClr val="555555"/>
                 </a:solidFill>
@@ -14763,9 +15354,9 @@
                 <a:ea typeface="Times New Roman" pitchFamily="34" charset="-122"/>
                 <a:cs typeface="Times New Roman" pitchFamily="34" charset="-120"/>
               </a:rPr>
-              <a:t>Illustration: marginal information of a map</a:t>
-            </a:r>
-            <a:endParaRPr lang="en-US" sz="1800" dirty="0"/>
+              <a:t>Illustration: the globe</a:t>
+            </a:r>
+            <a:endParaRPr lang="en-US" sz="1600" dirty="0"/>
           </a:p>
         </p:txBody>
       </p:sp>
@@ -15120,9 +15711,109 @@
           </a:p>
         </p:txBody>
       </p:sp>
+      <p:sp>
+        <p:nvSpPr>
+          <p:cNvPr id="3" name="Text 1"/>
+          <p:cNvSpPr/>
+          <p:nvPr/>
+        </p:nvSpPr>
+        <p:spPr>
+          <a:xfrm>
+            <a:off x="365760" y="1005840"/>
+            <a:ext cx="11460175" cy="731520"/>
+          </a:xfrm>
+          <a:prstGeom prst="rect">
+            <a:avLst/>
+          </a:prstGeom>
+          <a:noFill/>
+          <a:ln/>
+        </p:spPr>
+        <p:txBody>
+          <a:bodyPr wrap="square" lIns="0" tIns="0" rIns="0" bIns="0" rtlCol="0" anchor="ctr">
+            <a:normAutofit/>
+          </a:bodyPr>
+          <a:lstStyle/>
+          <a:p>
+            <a:pPr algn="ctr" indent="0" marL="0">
+              <a:buNone/>
+            </a:pPr>
+            <a:r>
+              <a:rPr lang="en-US" sz="3600" b="1" dirty="0">
+                <a:solidFill>
+                  <a:srgbClr val="990011"/>
+                </a:solidFill>
+                <a:latin typeface="Times New Roman" pitchFamily="34" charset="0"/>
+                <a:ea typeface="Times New Roman" pitchFamily="34" charset="-122"/>
+                <a:cs typeface="Times New Roman" pitchFamily="34" charset="-120"/>
+              </a:rPr>
+              <a:t>1. Forms of Representation of the Earth</a:t>
+            </a:r>
+            <a:endParaRPr lang="en-US" sz="3600" dirty="0"/>
+          </a:p>
+        </p:txBody>
+      </p:sp>
+      <p:sp>
+        <p:nvSpPr>
+          <p:cNvPr id="4" name="Text 2"/>
+          <p:cNvSpPr/>
+          <p:nvPr/>
+        </p:nvSpPr>
+        <p:spPr>
+          <a:xfrm>
+            <a:off x="365760" y="1783080"/>
+            <a:ext cx="4846320" cy="4617720"/>
+          </a:xfrm>
+          <a:prstGeom prst="rect">
+            <a:avLst/>
+          </a:prstGeom>
+          <a:noFill/>
+          <a:ln/>
+        </p:spPr>
+        <p:txBody>
+          <a:bodyPr wrap="square" lIns="0" tIns="0" rIns="0" bIns="0" rtlCol="0" anchor="t"/>
+          <a:lstStyle/>
+          <a:p>
+            <a:pPr algn="l" indent="0" marL="0">
+              <a:spcAft>
+                <a:spcPts val="800"/>
+              </a:spcAft>
+              <a:buNone/>
+            </a:pPr>
+            <a:r>
+              <a:rPr lang="en-US" sz="3600" b="1" dirty="0">
+                <a:solidFill>
+                  <a:srgbClr val="111111"/>
+                </a:solidFill>
+                <a:latin typeface="Times New Roman" pitchFamily="34" charset="0"/>
+                <a:ea typeface="Times New Roman" pitchFamily="34" charset="-122"/>
+                <a:cs typeface="Times New Roman" pitchFamily="34" charset="-120"/>
+              </a:rPr>
+              <a:t>The world map: </a:t>
+            </a:r>
+            <a:pPr algn="l" indent="0" marL="0">
+              <a:spcAft>
+                <a:spcPts val="800"/>
+              </a:spcAft>
+              <a:buNone/>
+            </a:pPr>
+            <a:r>
+              <a:rPr lang="en-US" sz="3600" dirty="0">
+                <a:solidFill>
+                  <a:srgbClr val="111111"/>
+                </a:solidFill>
+                <a:latin typeface="Times New Roman" pitchFamily="34" charset="0"/>
+                <a:ea typeface="Times New Roman" pitchFamily="34" charset="-122"/>
+                <a:cs typeface="Times New Roman" pitchFamily="34" charset="-120"/>
+              </a:rPr>
+              <a:t>It shows the whole Earth at once on a flat surface. It is easy to carry and shows many details.</a:t>
+            </a:r>
+            <a:endParaRPr lang="en-US" sz="3600" dirty="0"/>
+          </a:p>
+        </p:txBody>
+      </p:sp>
       <p:pic>
         <p:nvPicPr>
-          <p:cNvPr id="3" name="Image 0" descr="/home/claude/f4/img/minesec_sheet.png">    </p:cNvPr>
+          <p:cNvPr id="5" name="Image 0" descr="/home/claude/f4/img/v2/continents_oceans_big.png">    </p:cNvPr>
           <p:cNvPicPr>
             <a:picLocks noChangeAspect="1"/>
           </p:cNvPicPr>
@@ -15136,8 +15827,8 @@
         </p:blipFill>
         <p:spPr>
           <a:xfrm>
-            <a:off x="0" y="658368"/>
-            <a:ext cx="2468880" cy="5833872"/>
+            <a:off x="5349240" y="2513450"/>
+            <a:ext cx="6659575" cy="2809508"/>
           </a:xfrm>
           <a:prstGeom prst="rect">
             <a:avLst/>
@@ -15146,14 +15837,14 @@
       </p:pic>
       <p:sp>
         <p:nvSpPr>
-          <p:cNvPr id="4" name="Text 1"/>
+          <p:cNvPr id="6" name="Text 3"/>
           <p:cNvSpPr/>
           <p:nvPr/>
         </p:nvSpPr>
         <p:spPr>
           <a:xfrm>
-            <a:off x="2697480" y="1005840"/>
-            <a:ext cx="9174175" cy="731520"/>
+            <a:off x="5349240" y="6089904"/>
+            <a:ext cx="6659575" cy="347472"/>
           </a:xfrm>
           <a:prstGeom prst="rect">
             <a:avLst/>
@@ -15162,142 +15853,24 @@
           <a:ln/>
         </p:spPr>
         <p:txBody>
-          <a:bodyPr wrap="square" lIns="0" tIns="0" rIns="0" bIns="0" rtlCol="0" anchor="ctr">
-            <a:normAutofit/>
-          </a:bodyPr>
+          <a:bodyPr wrap="square" lIns="0" tIns="0" rIns="0" bIns="0" rtlCol="0" anchor="ctr"/>
           <a:lstStyle/>
           <a:p>
             <a:pPr algn="ctr" indent="0" marL="0">
               <a:buNone/>
             </a:pPr>
             <a:r>
-              <a:rPr lang="en-US" sz="3600" b="1" dirty="0">
-                <a:solidFill>
-                  <a:srgbClr val="990011"/>
+              <a:rPr lang="en-US" sz="1600" i="1" dirty="0">
+                <a:solidFill>
+                  <a:srgbClr val="555555"/>
                 </a:solidFill>
                 <a:latin typeface="Times New Roman" pitchFamily="34" charset="0"/>
                 <a:ea typeface="Times New Roman" pitchFamily="34" charset="-122"/>
                 <a:cs typeface="Times New Roman" pitchFamily="34" charset="-120"/>
               </a:rPr>
-              <a:t>3. Calculating Distances</a:t>
-            </a:r>
-            <a:endParaRPr lang="en-US" sz="3600" dirty="0"/>
-          </a:p>
-        </p:txBody>
-      </p:sp>
-      <p:sp>
-        <p:nvSpPr>
-          <p:cNvPr id="5" name="Text 2"/>
-          <p:cNvSpPr/>
-          <p:nvPr/>
-        </p:nvSpPr>
-        <p:spPr>
-          <a:xfrm>
-            <a:off x="2697480" y="1783080"/>
-            <a:ext cx="9174175" cy="4663440"/>
-          </a:xfrm>
-          <a:prstGeom prst="rect">
-            <a:avLst/>
-          </a:prstGeom>
-          <a:noFill/>
-          <a:ln/>
-        </p:spPr>
-        <p:txBody>
-          <a:bodyPr wrap="square" lIns="0" tIns="0" rIns="0" bIns="0" rtlCol="0" anchor="t"/>
-          <a:lstStyle/>
-          <a:p>
-            <a:pPr algn="l" indent="0" marL="0">
-              <a:spcAft>
-                <a:spcPts val="800"/>
-              </a:spcAft>
-              <a:buNone/>
-            </a:pPr>
-            <a:r>
-              <a:rPr lang="en-US" sz="4000" i="1" dirty="0">
-                <a:solidFill>
-                  <a:srgbClr val="111111"/>
-                </a:solidFill>
-                <a:latin typeface="Times New Roman" pitchFamily="34" charset="0"/>
-                <a:ea typeface="Times New Roman" pitchFamily="34" charset="-122"/>
-                <a:cs typeface="Times New Roman" pitchFamily="34" charset="-120"/>
-              </a:rPr>
-              <a:t>We calculate a real distance as follows:</a:t>
-            </a:r>
-            <a:endParaRPr lang="en-US" sz="4000" dirty="0"/>
-          </a:p>
-          <a:p>
-            <a:pPr algn="l" indent="0" marL="0">
-              <a:spcAft>
-                <a:spcPts val="800"/>
-              </a:spcAft>
-              <a:buNone/>
-            </a:pPr>
-            <a:r>
-              <a:rPr lang="en-US" sz="4000" b="1" dirty="0">
-                <a:solidFill>
-                  <a:srgbClr val="111111"/>
-                </a:solidFill>
-                <a:latin typeface="Times New Roman" pitchFamily="34" charset="0"/>
-                <a:ea typeface="Times New Roman" pitchFamily="34" charset="-122"/>
-                <a:cs typeface="Times New Roman" pitchFamily="34" charset="-120"/>
-              </a:rPr>
-              <a:t>Method: </a:t>
-            </a:r>
-            <a:pPr algn="l" indent="0" marL="0">
-              <a:spcAft>
-                <a:spcPts val="800"/>
-              </a:spcAft>
-              <a:buNone/>
-            </a:pPr>
-            <a:r>
-              <a:rPr lang="en-US" sz="4000" dirty="0">
-                <a:solidFill>
-                  <a:srgbClr val="111111"/>
-                </a:solidFill>
-                <a:latin typeface="Times New Roman" pitchFamily="34" charset="0"/>
-                <a:ea typeface="Times New Roman" pitchFamily="34" charset="-122"/>
-                <a:cs typeface="Times New Roman" pitchFamily="34" charset="-120"/>
-              </a:rPr>
-              <a:t>We measure the distance on the map with a ruler and multiply it by the scale.</a:t>
-            </a:r>
-            <a:endParaRPr lang="en-US" sz="4000" dirty="0"/>
-          </a:p>
-          <a:p>
-            <a:pPr algn="l" indent="0" marL="0">
-              <a:spcAft>
-                <a:spcPts val="800"/>
-              </a:spcAft>
-              <a:buNone/>
-            </a:pPr>
-            <a:r>
-              <a:rPr lang="en-US" sz="4000" b="1" dirty="0">
-                <a:solidFill>
-                  <a:srgbClr val="111111"/>
-                </a:solidFill>
-                <a:latin typeface="Times New Roman" pitchFamily="34" charset="0"/>
-                <a:ea typeface="Times New Roman" pitchFamily="34" charset="-122"/>
-                <a:cs typeface="Times New Roman" pitchFamily="34" charset="-120"/>
-              </a:rPr>
-              <a:t>Example: </a:t>
-            </a:r>
-            <a:pPr algn="l" indent="0" marL="0">
-              <a:spcAft>
-                <a:spcPts val="800"/>
-              </a:spcAft>
-              <a:buNone/>
-            </a:pPr>
-            <a:r>
-              <a:rPr lang="en-US" sz="4000" dirty="0">
-                <a:solidFill>
-                  <a:srgbClr val="111111"/>
-                </a:solidFill>
-                <a:latin typeface="Times New Roman" pitchFamily="34" charset="0"/>
-                <a:ea typeface="Times New Roman" pitchFamily="34" charset="-122"/>
-                <a:cs typeface="Times New Roman" pitchFamily="34" charset="-120"/>
-              </a:rPr>
-              <a:t>With a scale of 1 cm to 25 km, 6 cm on the map equals 6 × 25 = 150 km.</a:t>
-            </a:r>
-            <a:endParaRPr lang="en-US" sz="4000" dirty="0"/>
+              <a:t>Illustration: a world map</a:t>
+            </a:r>
+            <a:endParaRPr lang="en-US" sz="1600" dirty="0"/>
           </a:p>
         </p:txBody>
       </p:sp>
@@ -15407,15 +15980,115 @@
                 <a:ea typeface="Calibri" pitchFamily="34" charset="-122"/>
                 <a:cs typeface="Calibri" pitchFamily="34" charset="-120"/>
               </a:rPr>
-              <a:t>FORMATIVE EVALUATION</a:t>
+              <a:t>BOARD SUMMARY</a:t>
             </a:r>
             <a:endParaRPr lang="en-US" sz="1400" dirty="0"/>
+          </a:p>
+        </p:txBody>
+      </p:sp>
+      <p:sp>
+        <p:nvSpPr>
+          <p:cNvPr id="3" name="Text 1"/>
+          <p:cNvSpPr/>
+          <p:nvPr/>
+        </p:nvSpPr>
+        <p:spPr>
+          <a:xfrm>
+            <a:off x="365760" y="1005840"/>
+            <a:ext cx="11460175" cy="731520"/>
+          </a:xfrm>
+          <a:prstGeom prst="rect">
+            <a:avLst/>
+          </a:prstGeom>
+          <a:noFill/>
+          <a:ln/>
+        </p:spPr>
+        <p:txBody>
+          <a:bodyPr wrap="square" lIns="0" tIns="0" rIns="0" bIns="0" rtlCol="0" anchor="ctr">
+            <a:normAutofit/>
+          </a:bodyPr>
+          <a:lstStyle/>
+          <a:p>
+            <a:pPr algn="ctr" indent="0" marL="0">
+              <a:buNone/>
+            </a:pPr>
+            <a:r>
+              <a:rPr lang="en-US" sz="3600" b="1" dirty="0">
+                <a:solidFill>
+                  <a:srgbClr val="990011"/>
+                </a:solidFill>
+                <a:latin typeface="Times New Roman" pitchFamily="34" charset="0"/>
+                <a:ea typeface="Times New Roman" pitchFamily="34" charset="-122"/>
+                <a:cs typeface="Times New Roman" pitchFamily="34" charset="-120"/>
+              </a:rPr>
+              <a:t>1. Forms of Representation of the Earth</a:t>
+            </a:r>
+            <a:endParaRPr lang="en-US" sz="3600" dirty="0"/>
+          </a:p>
+        </p:txBody>
+      </p:sp>
+      <p:sp>
+        <p:nvSpPr>
+          <p:cNvPr id="4" name="Text 2"/>
+          <p:cNvSpPr/>
+          <p:nvPr/>
+        </p:nvSpPr>
+        <p:spPr>
+          <a:xfrm>
+            <a:off x="365760" y="1783080"/>
+            <a:ext cx="4846320" cy="4617720"/>
+          </a:xfrm>
+          <a:prstGeom prst="rect">
+            <a:avLst/>
+          </a:prstGeom>
+          <a:noFill/>
+          <a:ln/>
+        </p:spPr>
+        <p:txBody>
+          <a:bodyPr wrap="square" lIns="0" tIns="0" rIns="0" bIns="0" rtlCol="0" anchor="t"/>
+          <a:lstStyle/>
+          <a:p>
+            <a:pPr algn="l" indent="0" marL="0">
+              <a:spcAft>
+                <a:spcPts val="800"/>
+              </a:spcAft>
+              <a:buNone/>
+            </a:pPr>
+            <a:r>
+              <a:rPr lang="en-US" sz="3600" b="1" dirty="0">
+                <a:solidFill>
+                  <a:srgbClr val="111111"/>
+                </a:solidFill>
+                <a:latin typeface="Times New Roman" pitchFamily="34" charset="0"/>
+                <a:ea typeface="Times New Roman" pitchFamily="34" charset="-122"/>
+                <a:cs typeface="Times New Roman" pitchFamily="34" charset="-120"/>
+              </a:rPr>
+              <a:t>Map projections: </a:t>
+            </a:r>
+            <a:pPr algn="l" indent="0" marL="0">
+              <a:spcAft>
+                <a:spcPts val="800"/>
+              </a:spcAft>
+              <a:buNone/>
+            </a:pPr>
+            <a:r>
+              <a:rPr lang="en-US" sz="3600" dirty="0">
+                <a:solidFill>
+                  <a:srgbClr val="111111"/>
+                </a:solidFill>
+                <a:latin typeface="Times New Roman" pitchFamily="34" charset="0"/>
+                <a:ea typeface="Times New Roman" pitchFamily="34" charset="-122"/>
+                <a:cs typeface="Times New Roman" pitchFamily="34" charset="-120"/>
+              </a:rPr>
+              <a:t>Each projection keeps some shapes or sizes and changes others. Examples are cylindrical, equal-area and azimuthal projections.</a:t>
+            </a:r>
+            <a:endParaRPr lang="en-US" sz="3600" dirty="0"/>
           </a:p>
         </p:txBody>
       </p:sp>
       <p:pic>
         <p:nvPicPr>
-          <p:cNvPr id="3" name="Image 0" descr="/home/claude/f4/img/minesec_sheet.png">    </p:cNvPr>
+          <p:cNvPr id="5" name="Image 0" descr="/home/claude/f4/img/v2/map_projections_big.png">    </p:cNvPr>
           <p:cNvPicPr>
             <a:picLocks noChangeAspect="1"/>
           </p:cNvPicPr>
@@ -15429,8 +16102,8 @@
         </p:blipFill>
         <p:spPr>
           <a:xfrm>
-            <a:off x="0" y="658368"/>
-            <a:ext cx="5120640" cy="5833872"/>
+            <a:off x="5349240" y="2565478"/>
+            <a:ext cx="6659575" cy="2705452"/>
           </a:xfrm>
           <a:prstGeom prst="rect">
             <a:avLst/>
@@ -15439,14 +16112,14 @@
       </p:pic>
       <p:sp>
         <p:nvSpPr>
-          <p:cNvPr id="4" name="Text 1"/>
+          <p:cNvPr id="6" name="Text 3"/>
           <p:cNvSpPr/>
           <p:nvPr/>
         </p:nvSpPr>
         <p:spPr>
           <a:xfrm>
-            <a:off x="5349240" y="1005840"/>
-            <a:ext cx="6522415" cy="731520"/>
+            <a:off x="5349240" y="6089904"/>
+            <a:ext cx="6659575" cy="347472"/>
           </a:xfrm>
           <a:prstGeom prst="rect">
             <a:avLst/>
@@ -15455,68 +16128,24 @@
           <a:ln/>
         </p:spPr>
         <p:txBody>
-          <a:bodyPr wrap="square" lIns="0" tIns="0" rIns="0" bIns="0" rtlCol="0" anchor="ctr">
-            <a:normAutofit/>
-          </a:bodyPr>
+          <a:bodyPr wrap="square" lIns="0" tIns="0" rIns="0" bIns="0" rtlCol="0" anchor="ctr"/>
           <a:lstStyle/>
           <a:p>
             <a:pPr algn="ctr" indent="0" marL="0">
               <a:buNone/>
             </a:pPr>
             <a:r>
-              <a:rPr lang="en-US" sz="3600" b="1" dirty="0">
-                <a:solidFill>
-                  <a:srgbClr val="990011"/>
+              <a:rPr lang="en-US" sz="1600" i="1" dirty="0">
+                <a:solidFill>
+                  <a:srgbClr val="555555"/>
                 </a:solidFill>
                 <a:latin typeface="Times New Roman" pitchFamily="34" charset="0"/>
                 <a:ea typeface="Times New Roman" pitchFamily="34" charset="-122"/>
                 <a:cs typeface="Times New Roman" pitchFamily="34" charset="-120"/>
               </a:rPr>
-              <a:t>Evaluation 1</a:t>
-            </a:r>
-            <a:endParaRPr lang="en-US" sz="3600" dirty="0"/>
-          </a:p>
-        </p:txBody>
-      </p:sp>
-      <p:sp>
-        <p:nvSpPr>
-          <p:cNvPr id="5" name="Text 2"/>
-          <p:cNvSpPr/>
-          <p:nvPr/>
-        </p:nvSpPr>
-        <p:spPr>
-          <a:xfrm>
-            <a:off x="5349240" y="1783080"/>
-            <a:ext cx="6522415" cy="4663440"/>
-          </a:xfrm>
-          <a:prstGeom prst="rect">
-            <a:avLst/>
-          </a:prstGeom>
-          <a:noFill/>
-          <a:ln/>
-        </p:spPr>
-        <p:txBody>
-          <a:bodyPr wrap="square" lIns="0" tIns="0" rIns="0" bIns="0" rtlCol="0" anchor="t"/>
-          <a:lstStyle/>
-          <a:p>
-            <a:pPr algn="l" indent="0" marL="0">
-              <a:spcAft>
-                <a:spcPts val="800"/>
-              </a:spcAft>
-              <a:buNone/>
-            </a:pPr>
-            <a:r>
-              <a:rPr lang="en-US" sz="4000" dirty="0">
-                <a:solidFill>
-                  <a:srgbClr val="111111"/>
-                </a:solidFill>
-                <a:latin typeface="Times New Roman" pitchFamily="34" charset="0"/>
-                <a:ea typeface="Times New Roman" pitchFamily="34" charset="-122"/>
-                <a:cs typeface="Times New Roman" pitchFamily="34" charset="-120"/>
-              </a:rPr>
-              <a:t>Name four elements of the marginal information of a map.</a:t>
-            </a:r>
-            <a:endParaRPr lang="en-US" sz="4000" dirty="0"/>
+              <a:t>Illustration: three map projections</a:t>
+            </a:r>
+            <a:endParaRPr lang="en-US" sz="1600" dirty="0"/>
           </a:p>
         </p:txBody>
       </p:sp>
@@ -15626,7 +16255,7 @@
                 <a:ea typeface="Calibri" pitchFamily="34" charset="-122"/>
                 <a:cs typeface="Calibri" pitchFamily="34" charset="-120"/>
               </a:rPr>
-              <a:t>FORMATIVE EVALUATION</a:t>
+              <a:t>BOARD SUMMARY</a:t>
             </a:r>
             <a:endParaRPr lang="en-US" sz="1400" dirty="0"/>
           </a:p>
@@ -15691,7 +16320,7 @@
                 <a:ea typeface="Times New Roman" pitchFamily="34" charset="-122"/>
                 <a:cs typeface="Times New Roman" pitchFamily="34" charset="-120"/>
               </a:rPr>
-              <a:t>Expected Answer</a:t>
+              <a:t>2. Marginal Information on Maps</a:t>
             </a:r>
             <a:endParaRPr lang="en-US" sz="3600" dirty="0"/>
           </a:p>
@@ -15725,7 +16354,7 @@
               <a:buNone/>
             </a:pPr>
             <a:r>
-              <a:rPr lang="en-US" sz="4000" dirty="0">
+              <a:rPr lang="en-US" sz="4000" i="1" dirty="0">
                 <a:solidFill>
                   <a:srgbClr val="111111"/>
                 </a:solidFill>
@@ -15733,7 +16362,44 @@
                 <a:ea typeface="Times New Roman" pitchFamily="34" charset="-122"/>
                 <a:cs typeface="Times New Roman" pitchFamily="34" charset="-120"/>
               </a:rPr>
-              <a:t>The title, the key, the scale and the north arrow.</a:t>
+              <a:t>A map has the following marginal information:</a:t>
+            </a:r>
+            <a:endParaRPr lang="en-US" sz="4000" dirty="0"/>
+          </a:p>
+          <a:p>
+            <a:pPr algn="l" indent="0" marL="0">
+              <a:spcAft>
+                <a:spcPts val="800"/>
+              </a:spcAft>
+              <a:buNone/>
+            </a:pPr>
+            <a:r>
+              <a:rPr lang="en-US" sz="4000" b="1" dirty="0">
+                <a:solidFill>
+                  <a:srgbClr val="111111"/>
+                </a:solidFill>
+                <a:latin typeface="Times New Roman" pitchFamily="34" charset="0"/>
+                <a:ea typeface="Times New Roman" pitchFamily="34" charset="-122"/>
+                <a:cs typeface="Times New Roman" pitchFamily="34" charset="-120"/>
+              </a:rPr>
+              <a:t>Title: </a:t>
+            </a:r>
+            <a:pPr algn="l" indent="0" marL="0">
+              <a:spcAft>
+                <a:spcPts val="800"/>
+              </a:spcAft>
+              <a:buNone/>
+            </a:pPr>
+            <a:r>
+              <a:rPr lang="en-US" sz="4000" dirty="0">
+                <a:solidFill>
+                  <a:srgbClr val="111111"/>
+                </a:solidFill>
+                <a:latin typeface="Times New Roman" pitchFamily="34" charset="0"/>
+                <a:ea typeface="Times New Roman" pitchFamily="34" charset="-122"/>
+                <a:cs typeface="Times New Roman" pitchFamily="34" charset="-120"/>
+              </a:rPr>
+              <a:t>It tells what the map shows and where.</a:t>
             </a:r>
             <a:endParaRPr lang="en-US" sz="4000" dirty="0"/>
           </a:p>
@@ -15845,15 +16511,115 @@
                 <a:ea typeface="Calibri" pitchFamily="34" charset="-122"/>
                 <a:cs typeface="Calibri" pitchFamily="34" charset="-120"/>
               </a:rPr>
-              <a:t>FORMATIVE EVALUATION</a:t>
+              <a:t>BOARD SUMMARY</a:t>
             </a:r>
             <a:endParaRPr lang="en-US" sz="1400" dirty="0"/>
+          </a:p>
+        </p:txBody>
+      </p:sp>
+      <p:sp>
+        <p:nvSpPr>
+          <p:cNvPr id="3" name="Text 1"/>
+          <p:cNvSpPr/>
+          <p:nvPr/>
+        </p:nvSpPr>
+        <p:spPr>
+          <a:xfrm>
+            <a:off x="365760" y="1005840"/>
+            <a:ext cx="11460175" cy="731520"/>
+          </a:xfrm>
+          <a:prstGeom prst="rect">
+            <a:avLst/>
+          </a:prstGeom>
+          <a:noFill/>
+          <a:ln/>
+        </p:spPr>
+        <p:txBody>
+          <a:bodyPr wrap="square" lIns="0" tIns="0" rIns="0" bIns="0" rtlCol="0" anchor="ctr">
+            <a:normAutofit/>
+          </a:bodyPr>
+          <a:lstStyle/>
+          <a:p>
+            <a:pPr algn="ctr" indent="0" marL="0">
+              <a:buNone/>
+            </a:pPr>
+            <a:r>
+              <a:rPr lang="en-US" sz="3600" b="1" dirty="0">
+                <a:solidFill>
+                  <a:srgbClr val="990011"/>
+                </a:solidFill>
+                <a:latin typeface="Times New Roman" pitchFamily="34" charset="0"/>
+                <a:ea typeface="Times New Roman" pitchFamily="34" charset="-122"/>
+                <a:cs typeface="Times New Roman" pitchFamily="34" charset="-120"/>
+              </a:rPr>
+              <a:t>2. Marginal Information on Maps</a:t>
+            </a:r>
+            <a:endParaRPr lang="en-US" sz="3600" dirty="0"/>
+          </a:p>
+        </p:txBody>
+      </p:sp>
+      <p:sp>
+        <p:nvSpPr>
+          <p:cNvPr id="4" name="Text 2"/>
+          <p:cNvSpPr/>
+          <p:nvPr/>
+        </p:nvSpPr>
+        <p:spPr>
+          <a:xfrm>
+            <a:off x="365760" y="1783080"/>
+            <a:ext cx="4846320" cy="4617720"/>
+          </a:xfrm>
+          <a:prstGeom prst="rect">
+            <a:avLst/>
+          </a:prstGeom>
+          <a:noFill/>
+          <a:ln/>
+        </p:spPr>
+        <p:txBody>
+          <a:bodyPr wrap="square" lIns="0" tIns="0" rIns="0" bIns="0" rtlCol="0" anchor="t"/>
+          <a:lstStyle/>
+          <a:p>
+            <a:pPr algn="l" indent="0" marL="0">
+              <a:spcAft>
+                <a:spcPts val="800"/>
+              </a:spcAft>
+              <a:buNone/>
+            </a:pPr>
+            <a:r>
+              <a:rPr lang="en-US" sz="3600" b="1" dirty="0">
+                <a:solidFill>
+                  <a:srgbClr val="111111"/>
+                </a:solidFill>
+                <a:latin typeface="Times New Roman" pitchFamily="34" charset="0"/>
+                <a:ea typeface="Times New Roman" pitchFamily="34" charset="-122"/>
+                <a:cs typeface="Times New Roman" pitchFamily="34" charset="-120"/>
+              </a:rPr>
+              <a:t>Key (legend): </a:t>
+            </a:r>
+            <a:pPr algn="l" indent="0" marL="0">
+              <a:spcAft>
+                <a:spcPts val="800"/>
+              </a:spcAft>
+              <a:buNone/>
+            </a:pPr>
+            <a:r>
+              <a:rPr lang="en-US" sz="3600" dirty="0">
+                <a:solidFill>
+                  <a:srgbClr val="111111"/>
+                </a:solidFill>
+                <a:latin typeface="Times New Roman" pitchFamily="34" charset="0"/>
+                <a:ea typeface="Times New Roman" pitchFamily="34" charset="-122"/>
+                <a:cs typeface="Times New Roman" pitchFamily="34" charset="-120"/>
+              </a:rPr>
+              <a:t>It explains the signs, lines and colours used on the map.</a:t>
+            </a:r>
+            <a:endParaRPr lang="en-US" sz="3600" dirty="0"/>
           </a:p>
         </p:txBody>
       </p:sp>
       <p:pic>
         <p:nvPicPr>
-          <p:cNvPr id="3" name="Image 0" descr="/home/claude/f4/img/minesec_sheet.png">    </p:cNvPr>
+          <p:cNvPr id="5" name="Image 0" descr="/home/claude/f4/img/v2/signs_big.png">    </p:cNvPr>
           <p:cNvPicPr>
             <a:picLocks noChangeAspect="1"/>
           </p:cNvPicPr>
@@ -15867,8 +16633,8 @@
         </p:blipFill>
         <p:spPr>
           <a:xfrm>
-            <a:off x="0" y="658368"/>
-            <a:ext cx="5120640" cy="5833872"/>
+            <a:off x="5349240" y="2617506"/>
+            <a:ext cx="6659575" cy="2601397"/>
           </a:xfrm>
           <a:prstGeom prst="rect">
             <a:avLst/>
@@ -15877,14 +16643,14 @@
       </p:pic>
       <p:sp>
         <p:nvSpPr>
-          <p:cNvPr id="4" name="Text 1"/>
+          <p:cNvPr id="6" name="Text 3"/>
           <p:cNvSpPr/>
           <p:nvPr/>
         </p:nvSpPr>
         <p:spPr>
           <a:xfrm>
-            <a:off x="5349240" y="1005840"/>
-            <a:ext cx="6522415" cy="731520"/>
+            <a:off x="5349240" y="6089904"/>
+            <a:ext cx="6659575" cy="347472"/>
           </a:xfrm>
           <a:prstGeom prst="rect">
             <a:avLst/>
@@ -15893,68 +16659,24 @@
           <a:ln/>
         </p:spPr>
         <p:txBody>
-          <a:bodyPr wrap="square" lIns="0" tIns="0" rIns="0" bIns="0" rtlCol="0" anchor="ctr">
-            <a:normAutofit/>
-          </a:bodyPr>
+          <a:bodyPr wrap="square" lIns="0" tIns="0" rIns="0" bIns="0" rtlCol="0" anchor="ctr"/>
           <a:lstStyle/>
           <a:p>
             <a:pPr algn="ctr" indent="0" marL="0">
               <a:buNone/>
             </a:pPr>
             <a:r>
-              <a:rPr lang="en-US" sz="3600" b="1" dirty="0">
-                <a:solidFill>
-                  <a:srgbClr val="990011"/>
+              <a:rPr lang="en-US" sz="1600" i="1" dirty="0">
+                <a:solidFill>
+                  <a:srgbClr val="555555"/>
                 </a:solidFill>
                 <a:latin typeface="Times New Roman" pitchFamily="34" charset="0"/>
                 <a:ea typeface="Times New Roman" pitchFamily="34" charset="-122"/>
                 <a:cs typeface="Times New Roman" pitchFamily="34" charset="-120"/>
               </a:rPr>
-              <a:t>Evaluation 2</a:t>
-            </a:r>
-            <a:endParaRPr lang="en-US" sz="3600" dirty="0"/>
-          </a:p>
-        </p:txBody>
-      </p:sp>
-      <p:sp>
-        <p:nvSpPr>
-          <p:cNvPr id="5" name="Text 2"/>
-          <p:cNvSpPr/>
-          <p:nvPr/>
-        </p:nvSpPr>
-        <p:spPr>
-          <a:xfrm>
-            <a:off x="5349240" y="1783080"/>
-            <a:ext cx="6522415" cy="4663440"/>
-          </a:xfrm>
-          <a:prstGeom prst="rect">
-            <a:avLst/>
-          </a:prstGeom>
-          <a:noFill/>
-          <a:ln/>
-        </p:spPr>
-        <p:txBody>
-          <a:bodyPr wrap="square" lIns="0" tIns="0" rIns="0" bIns="0" rtlCol="0" anchor="t"/>
-          <a:lstStyle/>
-          <a:p>
-            <a:pPr algn="l" indent="0" marL="0">
-              <a:spcAft>
-                <a:spcPts val="800"/>
-              </a:spcAft>
-              <a:buNone/>
-            </a:pPr>
-            <a:r>
-              <a:rPr lang="en-US" sz="4000" dirty="0">
-                <a:solidFill>
-                  <a:srgbClr val="111111"/>
-                </a:solidFill>
-                <a:latin typeface="Times New Roman" pitchFamily="34" charset="0"/>
-                <a:ea typeface="Times New Roman" pitchFamily="34" charset="-122"/>
-                <a:cs typeface="Times New Roman" pitchFamily="34" charset="-120"/>
-              </a:rPr>
-              <a:t>On a map of 1 cm to 10 km, two towns are 4.5 cm apart. Find the real distance.</a:t>
-            </a:r>
-            <a:endParaRPr lang="en-US" sz="4000" dirty="0"/>
+              <a:t>Illustration: signs explained in a key</a:t>
+            </a:r>
+            <a:endParaRPr lang="en-US" sz="1600" dirty="0"/>
           </a:p>
         </p:txBody>
       </p:sp>
@@ -16064,15 +16786,115 @@
                 <a:ea typeface="Calibri" pitchFamily="34" charset="-122"/>
                 <a:cs typeface="Calibri" pitchFamily="34" charset="-120"/>
               </a:rPr>
-              <a:t>FORMATIVE EVALUATION</a:t>
+              <a:t>BOARD SUMMARY</a:t>
             </a:r>
             <a:endParaRPr lang="en-US" sz="1400" dirty="0"/>
+          </a:p>
+        </p:txBody>
+      </p:sp>
+      <p:sp>
+        <p:nvSpPr>
+          <p:cNvPr id="3" name="Text 1"/>
+          <p:cNvSpPr/>
+          <p:nvPr/>
+        </p:nvSpPr>
+        <p:spPr>
+          <a:xfrm>
+            <a:off x="365760" y="1005840"/>
+            <a:ext cx="11460175" cy="731520"/>
+          </a:xfrm>
+          <a:prstGeom prst="rect">
+            <a:avLst/>
+          </a:prstGeom>
+          <a:noFill/>
+          <a:ln/>
+        </p:spPr>
+        <p:txBody>
+          <a:bodyPr wrap="square" lIns="0" tIns="0" rIns="0" bIns="0" rtlCol="0" anchor="ctr">
+            <a:normAutofit/>
+          </a:bodyPr>
+          <a:lstStyle/>
+          <a:p>
+            <a:pPr algn="ctr" indent="0" marL="0">
+              <a:buNone/>
+            </a:pPr>
+            <a:r>
+              <a:rPr lang="en-US" sz="3600" b="1" dirty="0">
+                <a:solidFill>
+                  <a:srgbClr val="990011"/>
+                </a:solidFill>
+                <a:latin typeface="Times New Roman" pitchFamily="34" charset="0"/>
+                <a:ea typeface="Times New Roman" pitchFamily="34" charset="-122"/>
+                <a:cs typeface="Times New Roman" pitchFamily="34" charset="-120"/>
+              </a:rPr>
+              <a:t>2. Marginal Information on Maps</a:t>
+            </a:r>
+            <a:endParaRPr lang="en-US" sz="3600" dirty="0"/>
+          </a:p>
+        </p:txBody>
+      </p:sp>
+      <p:sp>
+        <p:nvSpPr>
+          <p:cNvPr id="4" name="Text 2"/>
+          <p:cNvSpPr/>
+          <p:nvPr/>
+        </p:nvSpPr>
+        <p:spPr>
+          <a:xfrm>
+            <a:off x="365760" y="1783080"/>
+            <a:ext cx="4846320" cy="4617720"/>
+          </a:xfrm>
+          <a:prstGeom prst="rect">
+            <a:avLst/>
+          </a:prstGeom>
+          <a:noFill/>
+          <a:ln/>
+        </p:spPr>
+        <p:txBody>
+          <a:bodyPr wrap="square" lIns="0" tIns="0" rIns="0" bIns="0" rtlCol="0" anchor="t"/>
+          <a:lstStyle/>
+          <a:p>
+            <a:pPr algn="l" indent="0" marL="0">
+              <a:spcAft>
+                <a:spcPts val="800"/>
+              </a:spcAft>
+              <a:buNone/>
+            </a:pPr>
+            <a:r>
+              <a:rPr lang="en-US" sz="3600" b="1" dirty="0">
+                <a:solidFill>
+                  <a:srgbClr val="111111"/>
+                </a:solidFill>
+                <a:latin typeface="Times New Roman" pitchFamily="34" charset="0"/>
+                <a:ea typeface="Times New Roman" pitchFamily="34" charset="-122"/>
+                <a:cs typeface="Times New Roman" pitchFamily="34" charset="-120"/>
+              </a:rPr>
+              <a:t>Scale: </a:t>
+            </a:r>
+            <a:pPr algn="l" indent="0" marL="0">
+              <a:spcAft>
+                <a:spcPts val="800"/>
+              </a:spcAft>
+              <a:buNone/>
+            </a:pPr>
+            <a:r>
+              <a:rPr lang="en-US" sz="3600" dirty="0">
+                <a:solidFill>
+                  <a:srgbClr val="111111"/>
+                </a:solidFill>
+                <a:latin typeface="Times New Roman" pitchFamily="34" charset="0"/>
+                <a:ea typeface="Times New Roman" pitchFamily="34" charset="-122"/>
+                <a:cs typeface="Times New Roman" pitchFamily="34" charset="-120"/>
+              </a:rPr>
+              <a:t>It shows the relation between a distance on the map and the real distance on the ground.</a:t>
+            </a:r>
+            <a:endParaRPr lang="en-US" sz="3600" dirty="0"/>
           </a:p>
         </p:txBody>
       </p:sp>
       <p:pic>
         <p:nvPicPr>
-          <p:cNvPr id="3" name="Image 0" descr="/home/claude/f4/img/minesec_sheet.png">    </p:cNvPr>
+          <p:cNvPr id="5" name="Image 0" descr="/home/claude/f4/img/v2/scale_types_big.png">    </p:cNvPr>
           <p:cNvPicPr>
             <a:picLocks noChangeAspect="1"/>
           </p:cNvPicPr>
@@ -16086,8 +16908,8 @@
         </p:blipFill>
         <p:spPr>
           <a:xfrm>
-            <a:off x="0" y="658368"/>
-            <a:ext cx="5120640" cy="5833872"/>
+            <a:off x="5349240" y="2617506"/>
+            <a:ext cx="6659575" cy="2601397"/>
           </a:xfrm>
           <a:prstGeom prst="rect">
             <a:avLst/>
@@ -16096,14 +16918,14 @@
       </p:pic>
       <p:sp>
         <p:nvSpPr>
-          <p:cNvPr id="4" name="Text 1"/>
+          <p:cNvPr id="6" name="Text 3"/>
           <p:cNvSpPr/>
           <p:nvPr/>
         </p:nvSpPr>
         <p:spPr>
           <a:xfrm>
-            <a:off x="5349240" y="1005840"/>
-            <a:ext cx="6522415" cy="731520"/>
+            <a:off x="5349240" y="6089904"/>
+            <a:ext cx="6659575" cy="347472"/>
           </a:xfrm>
           <a:prstGeom prst="rect">
             <a:avLst/>
@@ -16112,68 +16934,24 @@
           <a:ln/>
         </p:spPr>
         <p:txBody>
-          <a:bodyPr wrap="square" lIns="0" tIns="0" rIns="0" bIns="0" rtlCol="0" anchor="ctr">
-            <a:normAutofit/>
-          </a:bodyPr>
+          <a:bodyPr wrap="square" lIns="0" tIns="0" rIns="0" bIns="0" rtlCol="0" anchor="ctr"/>
           <a:lstStyle/>
           <a:p>
             <a:pPr algn="ctr" indent="0" marL="0">
               <a:buNone/>
             </a:pPr>
             <a:r>
-              <a:rPr lang="en-US" sz="3600" b="1" dirty="0">
-                <a:solidFill>
-                  <a:srgbClr val="990011"/>
+              <a:rPr lang="en-US" sz="1600" i="1" dirty="0">
+                <a:solidFill>
+                  <a:srgbClr val="555555"/>
                 </a:solidFill>
                 <a:latin typeface="Times New Roman" pitchFamily="34" charset="0"/>
                 <a:ea typeface="Times New Roman" pitchFamily="34" charset="-122"/>
                 <a:cs typeface="Times New Roman" pitchFamily="34" charset="-120"/>
               </a:rPr>
-              <a:t>Expected Answer</a:t>
-            </a:r>
-            <a:endParaRPr lang="en-US" sz="3600" dirty="0"/>
-          </a:p>
-        </p:txBody>
-      </p:sp>
-      <p:sp>
-        <p:nvSpPr>
-          <p:cNvPr id="5" name="Text 2"/>
-          <p:cNvSpPr/>
-          <p:nvPr/>
-        </p:nvSpPr>
-        <p:spPr>
-          <a:xfrm>
-            <a:off x="5349240" y="1783080"/>
-            <a:ext cx="6522415" cy="4663440"/>
-          </a:xfrm>
-          <a:prstGeom prst="rect">
-            <a:avLst/>
-          </a:prstGeom>
-          <a:noFill/>
-          <a:ln/>
-        </p:spPr>
-        <p:txBody>
-          <a:bodyPr wrap="square" lIns="0" tIns="0" rIns="0" bIns="0" rtlCol="0" anchor="t"/>
-          <a:lstStyle/>
-          <a:p>
-            <a:pPr algn="l" indent="0" marL="0">
-              <a:spcAft>
-                <a:spcPts val="800"/>
-              </a:spcAft>
-              <a:buNone/>
-            </a:pPr>
-            <a:r>
-              <a:rPr lang="en-US" sz="4000" dirty="0">
-                <a:solidFill>
-                  <a:srgbClr val="111111"/>
-                </a:solidFill>
-                <a:latin typeface="Times New Roman" pitchFamily="34" charset="0"/>
-                <a:ea typeface="Times New Roman" pitchFamily="34" charset="-122"/>
-                <a:cs typeface="Times New Roman" pitchFamily="34" charset="-120"/>
-              </a:rPr>
-              <a:t>4.5 × 10 = 45 km.</a:t>
-            </a:r>
-            <a:endParaRPr lang="en-US" sz="4000" dirty="0"/>
+              <a:t>Illustration: ways of writing a scale</a:t>
+            </a:r>
+            <a:endParaRPr lang="en-US" sz="1600" dirty="0"/>
           </a:p>
         </p:txBody>
       </p:sp>
@@ -16283,15 +17061,115 @@
                 <a:ea typeface="Calibri" pitchFamily="34" charset="-122"/>
                 <a:cs typeface="Calibri" pitchFamily="34" charset="-120"/>
               </a:rPr>
-              <a:t>REMEDIATION</a:t>
+              <a:t>BOARD SUMMARY</a:t>
             </a:r>
             <a:endParaRPr lang="en-US" sz="1400" dirty="0"/>
+          </a:p>
+        </p:txBody>
+      </p:sp>
+      <p:sp>
+        <p:nvSpPr>
+          <p:cNvPr id="3" name="Text 1"/>
+          <p:cNvSpPr/>
+          <p:nvPr/>
+        </p:nvSpPr>
+        <p:spPr>
+          <a:xfrm>
+            <a:off x="365760" y="1005840"/>
+            <a:ext cx="11460175" cy="731520"/>
+          </a:xfrm>
+          <a:prstGeom prst="rect">
+            <a:avLst/>
+          </a:prstGeom>
+          <a:noFill/>
+          <a:ln/>
+        </p:spPr>
+        <p:txBody>
+          <a:bodyPr wrap="square" lIns="0" tIns="0" rIns="0" bIns="0" rtlCol="0" anchor="ctr">
+            <a:normAutofit/>
+          </a:bodyPr>
+          <a:lstStyle/>
+          <a:p>
+            <a:pPr algn="ctr" indent="0" marL="0">
+              <a:buNone/>
+            </a:pPr>
+            <a:r>
+              <a:rPr lang="en-US" sz="3600" b="1" dirty="0">
+                <a:solidFill>
+                  <a:srgbClr val="990011"/>
+                </a:solidFill>
+                <a:latin typeface="Times New Roman" pitchFamily="34" charset="0"/>
+                <a:ea typeface="Times New Roman" pitchFamily="34" charset="-122"/>
+                <a:cs typeface="Times New Roman" pitchFamily="34" charset="-120"/>
+              </a:rPr>
+              <a:t>2. Marginal Information on Maps</a:t>
+            </a:r>
+            <a:endParaRPr lang="en-US" sz="3600" dirty="0"/>
+          </a:p>
+        </p:txBody>
+      </p:sp>
+      <p:sp>
+        <p:nvSpPr>
+          <p:cNvPr id="4" name="Text 2"/>
+          <p:cNvSpPr/>
+          <p:nvPr/>
+        </p:nvSpPr>
+        <p:spPr>
+          <a:xfrm>
+            <a:off x="365760" y="1783080"/>
+            <a:ext cx="4846320" cy="4617720"/>
+          </a:xfrm>
+          <a:prstGeom prst="rect">
+            <a:avLst/>
+          </a:prstGeom>
+          <a:noFill/>
+          <a:ln/>
+        </p:spPr>
+        <p:txBody>
+          <a:bodyPr wrap="square" lIns="0" tIns="0" rIns="0" bIns="0" rtlCol="0" anchor="t"/>
+          <a:lstStyle/>
+          <a:p>
+            <a:pPr algn="l" indent="0" marL="0">
+              <a:spcAft>
+                <a:spcPts val="800"/>
+              </a:spcAft>
+              <a:buNone/>
+            </a:pPr>
+            <a:r>
+              <a:rPr lang="en-US" sz="3600" b="1" dirty="0">
+                <a:solidFill>
+                  <a:srgbClr val="111111"/>
+                </a:solidFill>
+                <a:latin typeface="Times New Roman" pitchFamily="34" charset="0"/>
+                <a:ea typeface="Times New Roman" pitchFamily="34" charset="-122"/>
+                <a:cs typeface="Times New Roman" pitchFamily="34" charset="-120"/>
+              </a:rPr>
+              <a:t>Cardinal points and north arrow: </a:t>
+            </a:r>
+            <a:pPr algn="l" indent="0" marL="0">
+              <a:spcAft>
+                <a:spcPts val="800"/>
+              </a:spcAft>
+              <a:buNone/>
+            </a:pPr>
+            <a:r>
+              <a:rPr lang="en-US" sz="3600" dirty="0">
+                <a:solidFill>
+                  <a:srgbClr val="111111"/>
+                </a:solidFill>
+                <a:latin typeface="Times New Roman" pitchFamily="34" charset="0"/>
+                <a:ea typeface="Times New Roman" pitchFamily="34" charset="-122"/>
+                <a:cs typeface="Times New Roman" pitchFamily="34" charset="-120"/>
+              </a:rPr>
+              <a:t>They show the directions: north, south, east and west.</a:t>
+            </a:r>
+            <a:endParaRPr lang="en-US" sz="3600" dirty="0"/>
           </a:p>
         </p:txBody>
       </p:sp>
       <p:pic>
         <p:nvPicPr>
-          <p:cNvPr id="3" name="Image 0" descr="/home/claude/f4/img/minesec_sheet.png">    </p:cNvPr>
+          <p:cNvPr id="5" name="Image 0" descr="/home/claude/f4/img/v2/bearings_big.png">    </p:cNvPr>
           <p:cNvPicPr>
             <a:picLocks noChangeAspect="1"/>
           </p:cNvPicPr>
@@ -16305,8 +17183,8 @@
         </p:blipFill>
         <p:spPr>
           <a:xfrm>
-            <a:off x="0" y="658368"/>
-            <a:ext cx="1463040" cy="5833872"/>
+            <a:off x="5349240" y="2617506"/>
+            <a:ext cx="6659575" cy="2601397"/>
           </a:xfrm>
           <a:prstGeom prst="rect">
             <a:avLst/>
@@ -16315,14 +17193,14 @@
       </p:pic>
       <p:sp>
         <p:nvSpPr>
-          <p:cNvPr id="4" name="Text 1"/>
+          <p:cNvPr id="6" name="Text 3"/>
           <p:cNvSpPr/>
           <p:nvPr/>
         </p:nvSpPr>
         <p:spPr>
           <a:xfrm>
-            <a:off x="1691640" y="1005840"/>
-            <a:ext cx="10180015" cy="731520"/>
+            <a:off x="5349240" y="6089904"/>
+            <a:ext cx="6659575" cy="347472"/>
           </a:xfrm>
           <a:prstGeom prst="rect">
             <a:avLst/>
@@ -16331,134 +17209,24 @@
           <a:ln/>
         </p:spPr>
         <p:txBody>
-          <a:bodyPr wrap="square" lIns="0" tIns="0" rIns="0" bIns="0" rtlCol="0" anchor="ctr">
-            <a:normAutofit/>
-          </a:bodyPr>
+          <a:bodyPr wrap="square" lIns="0" tIns="0" rIns="0" bIns="0" rtlCol="0" anchor="ctr"/>
           <a:lstStyle/>
           <a:p>
             <a:pPr algn="ctr" indent="0" marL="0">
               <a:buNone/>
             </a:pPr>
             <a:r>
-              <a:rPr lang="en-US" sz="3600" b="1" dirty="0">
-                <a:solidFill>
-                  <a:srgbClr val="990011"/>
+              <a:rPr lang="en-US" sz="1600" i="1" dirty="0">
+                <a:solidFill>
+                  <a:srgbClr val="555555"/>
                 </a:solidFill>
                 <a:latin typeface="Times New Roman" pitchFamily="34" charset="0"/>
                 <a:ea typeface="Times New Roman" pitchFamily="34" charset="-122"/>
                 <a:cs typeface="Times New Roman" pitchFamily="34" charset="-120"/>
               </a:rPr>
-              <a:t>Remediation</a:t>
-            </a:r>
-            <a:endParaRPr lang="en-US" sz="3600" dirty="0"/>
-          </a:p>
-        </p:txBody>
-      </p:sp>
-      <p:sp>
-        <p:nvSpPr>
-          <p:cNvPr id="5" name="Text 2"/>
-          <p:cNvSpPr/>
-          <p:nvPr/>
-        </p:nvSpPr>
-        <p:spPr>
-          <a:xfrm>
-            <a:off x="1691640" y="1783080"/>
-            <a:ext cx="10180015" cy="4663440"/>
-          </a:xfrm>
-          <a:prstGeom prst="rect">
-            <a:avLst/>
-          </a:prstGeom>
-          <a:noFill/>
-          <a:ln/>
-        </p:spPr>
-        <p:txBody>
-          <a:bodyPr wrap="square" lIns="0" tIns="0" rIns="0" bIns="0" rtlCol="0" anchor="t"/>
-          <a:lstStyle/>
-          <a:p>
-            <a:pPr algn="l" indent="0" marL="0">
-              <a:spcAft>
-                <a:spcPts val="800"/>
-              </a:spcAft>
-              <a:buNone/>
-            </a:pPr>
-            <a:r>
-              <a:rPr lang="en-US" sz="4000" b="1" dirty="0">
-                <a:solidFill>
-                  <a:srgbClr val="111111"/>
-                </a:solidFill>
-                <a:latin typeface="Times New Roman" pitchFamily="34" charset="0"/>
-                <a:ea typeface="Times New Roman" pitchFamily="34" charset="-122"/>
-                <a:cs typeface="Times New Roman" pitchFamily="34" charset="-120"/>
-              </a:rPr>
-              <a:t>Fill in the blanks:</a:t>
-            </a:r>
-            <a:endParaRPr lang="en-US" sz="4000" dirty="0"/>
-          </a:p>
-          <a:p>
-            <a:pPr algn="l" marL="342900" indent="-342900">
-              <a:spcAft>
-                <a:spcPts val="800"/>
-              </a:spcAft>
-              <a:buSzPct val="100000"/>
-              <a:buFont typeface="+mj-lt"/>
-              <a:buAutoNum type="arabicPeriod" startAt="1"/>
-            </a:pPr>
-            <a:r>
-              <a:rPr lang="en-US" sz="4000" dirty="0">
-                <a:solidFill>
-                  <a:srgbClr val="111111"/>
-                </a:solidFill>
-                <a:latin typeface="Times New Roman" pitchFamily="34" charset="0"/>
-                <a:ea typeface="Times New Roman" pitchFamily="34" charset="-122"/>
-                <a:cs typeface="Times New Roman" pitchFamily="34" charset="-120"/>
-              </a:rPr>
-              <a:t>A round model of the Earth is a ______.</a:t>
-            </a:r>
-            <a:endParaRPr lang="en-US" sz="4000" dirty="0"/>
-          </a:p>
-          <a:p>
-            <a:pPr algn="l" marL="342900" indent="-342900">
-              <a:spcAft>
-                <a:spcPts val="800"/>
-              </a:spcAft>
-              <a:buSzPct val="100000"/>
-              <a:buFont typeface="+mj-lt"/>
-              <a:buAutoNum type="arabicPeriod" startAt="1"/>
-            </a:pPr>
-            <a:r>
-              <a:rPr lang="en-US" sz="4000" dirty="0">
-                <a:solidFill>
-                  <a:srgbClr val="111111"/>
-                </a:solidFill>
-                <a:latin typeface="Times New Roman" pitchFamily="34" charset="0"/>
-                <a:ea typeface="Times New Roman" pitchFamily="34" charset="-122"/>
-                <a:cs typeface="Times New Roman" pitchFamily="34" charset="-120"/>
-              </a:rPr>
-              <a:t>The part of a map that explains the signs is the ______.</a:t>
-            </a:r>
-            <a:endParaRPr lang="en-US" sz="4000" dirty="0"/>
-          </a:p>
-          <a:p>
-            <a:pPr algn="l" marL="342900" indent="-342900">
-              <a:spcAft>
-                <a:spcPts val="800"/>
-              </a:spcAft>
-              <a:buSzPct val="100000"/>
-              <a:buFont typeface="+mj-lt"/>
-              <a:buAutoNum type="arabicPeriod" startAt="1"/>
-            </a:pPr>
-            <a:r>
-              <a:rPr lang="en-US" sz="4000" dirty="0">
-                <a:solidFill>
-                  <a:srgbClr val="111111"/>
-                </a:solidFill>
-                <a:latin typeface="Times New Roman" pitchFamily="34" charset="0"/>
-                <a:ea typeface="Times New Roman" pitchFamily="34" charset="-122"/>
-                <a:cs typeface="Times New Roman" pitchFamily="34" charset="-120"/>
-              </a:rPr>
-              <a:t>The part of a map used to calculate distances is the ______.</a:t>
-            </a:r>
-            <a:endParaRPr lang="en-US" sz="4000" dirty="0"/>
+              <a:t>Illustration: the cardinal points</a:t>
+            </a:r>
+            <a:endParaRPr lang="en-US" sz="1600" dirty="0"/>
           </a:p>
         </p:txBody>
       </p:sp>
@@ -16568,15 +17336,115 @@
                 <a:ea typeface="Calibri" pitchFamily="34" charset="-122"/>
                 <a:cs typeface="Calibri" pitchFamily="34" charset="-120"/>
               </a:rPr>
-              <a:t>HOMEWORK</a:t>
+              <a:t>BOARD SUMMARY</a:t>
             </a:r>
             <a:endParaRPr lang="en-US" sz="1400" dirty="0"/>
+          </a:p>
+        </p:txBody>
+      </p:sp>
+      <p:sp>
+        <p:nvSpPr>
+          <p:cNvPr id="3" name="Text 1"/>
+          <p:cNvSpPr/>
+          <p:nvPr/>
+        </p:nvSpPr>
+        <p:spPr>
+          <a:xfrm>
+            <a:off x="365760" y="1005840"/>
+            <a:ext cx="11460175" cy="731520"/>
+          </a:xfrm>
+          <a:prstGeom prst="rect">
+            <a:avLst/>
+          </a:prstGeom>
+          <a:noFill/>
+          <a:ln/>
+        </p:spPr>
+        <p:txBody>
+          <a:bodyPr wrap="square" lIns="0" tIns="0" rIns="0" bIns="0" rtlCol="0" anchor="ctr">
+            <a:normAutofit/>
+          </a:bodyPr>
+          <a:lstStyle/>
+          <a:p>
+            <a:pPr algn="ctr" indent="0" marL="0">
+              <a:buNone/>
+            </a:pPr>
+            <a:r>
+              <a:rPr lang="en-US" sz="3600" b="1" dirty="0">
+                <a:solidFill>
+                  <a:srgbClr val="990011"/>
+                </a:solidFill>
+                <a:latin typeface="Times New Roman" pitchFamily="34" charset="0"/>
+                <a:ea typeface="Times New Roman" pitchFamily="34" charset="-122"/>
+                <a:cs typeface="Times New Roman" pitchFamily="34" charset="-120"/>
+              </a:rPr>
+              <a:t>2. Marginal Information on Maps</a:t>
+            </a:r>
+            <a:endParaRPr lang="en-US" sz="3600" dirty="0"/>
+          </a:p>
+        </p:txBody>
+      </p:sp>
+      <p:sp>
+        <p:nvSpPr>
+          <p:cNvPr id="4" name="Text 2"/>
+          <p:cNvSpPr/>
+          <p:nvPr/>
+        </p:nvSpPr>
+        <p:spPr>
+          <a:xfrm>
+            <a:off x="365760" y="1783080"/>
+            <a:ext cx="4846320" cy="4617720"/>
+          </a:xfrm>
+          <a:prstGeom prst="rect">
+            <a:avLst/>
+          </a:prstGeom>
+          <a:noFill/>
+          <a:ln/>
+        </p:spPr>
+        <p:txBody>
+          <a:bodyPr wrap="square" lIns="0" tIns="0" rIns="0" bIns="0" rtlCol="0" anchor="t"/>
+          <a:lstStyle/>
+          <a:p>
+            <a:pPr algn="l" indent="0" marL="0">
+              <a:spcAft>
+                <a:spcPts val="800"/>
+              </a:spcAft>
+              <a:buNone/>
+            </a:pPr>
+            <a:r>
+              <a:rPr lang="en-US" sz="3600" b="1" dirty="0">
+                <a:solidFill>
+                  <a:srgbClr val="111111"/>
+                </a:solidFill>
+                <a:latin typeface="Times New Roman" pitchFamily="34" charset="0"/>
+                <a:ea typeface="Times New Roman" pitchFamily="34" charset="-122"/>
+                <a:cs typeface="Times New Roman" pitchFamily="34" charset="-120"/>
+              </a:rPr>
+              <a:t>Grid lines, latitudes and longitudes: </a:t>
+            </a:r>
+            <a:pPr algn="l" indent="0" marL="0">
+              <a:spcAft>
+                <a:spcPts val="800"/>
+              </a:spcAft>
+              <a:buNone/>
+            </a:pPr>
+            <a:r>
+              <a:rPr lang="en-US" sz="3600" dirty="0">
+                <a:solidFill>
+                  <a:srgbClr val="111111"/>
+                </a:solidFill>
+                <a:latin typeface="Times New Roman" pitchFamily="34" charset="0"/>
+                <a:ea typeface="Times New Roman" pitchFamily="34" charset="-122"/>
+                <a:cs typeface="Times New Roman" pitchFamily="34" charset="-120"/>
+              </a:rPr>
+              <a:t>They help us to locate places on the map.</a:t>
+            </a:r>
+            <a:endParaRPr lang="en-US" sz="3600" dirty="0"/>
           </a:p>
         </p:txBody>
       </p:sp>
       <p:pic>
         <p:nvPicPr>
-          <p:cNvPr id="3" name="Image 0" descr="/home/claude/f4/img/minesec_sheet.png">    </p:cNvPr>
+          <p:cNvPr id="5" name="Image 0" descr="/home/claude/f4/img/v2/cameroon_grid_big.png">    </p:cNvPr>
           <p:cNvPicPr>
             <a:picLocks noChangeAspect="1"/>
           </p:cNvPicPr>
@@ -16590,8 +17458,8 @@
         </p:blipFill>
         <p:spPr>
           <a:xfrm>
-            <a:off x="0" y="658368"/>
-            <a:ext cx="5120640" cy="5833872"/>
+            <a:off x="5349240" y="2045198"/>
+            <a:ext cx="6659575" cy="3746011"/>
           </a:xfrm>
           <a:prstGeom prst="rect">
             <a:avLst/>
@@ -16600,14 +17468,14 @@
       </p:pic>
       <p:sp>
         <p:nvSpPr>
-          <p:cNvPr id="4" name="Text 1"/>
+          <p:cNvPr id="6" name="Text 3"/>
           <p:cNvSpPr/>
           <p:nvPr/>
         </p:nvSpPr>
         <p:spPr>
           <a:xfrm>
-            <a:off x="5349240" y="1005840"/>
-            <a:ext cx="6522415" cy="731520"/>
+            <a:off x="5349240" y="6089904"/>
+            <a:ext cx="6659575" cy="347472"/>
           </a:xfrm>
           <a:prstGeom prst="rect">
             <a:avLst/>
@@ -16616,68 +17484,24 @@
           <a:ln/>
         </p:spPr>
         <p:txBody>
-          <a:bodyPr wrap="square" lIns="0" tIns="0" rIns="0" bIns="0" rtlCol="0" anchor="ctr">
-            <a:normAutofit/>
-          </a:bodyPr>
+          <a:bodyPr wrap="square" lIns="0" tIns="0" rIns="0" bIns="0" rtlCol="0" anchor="ctr"/>
           <a:lstStyle/>
           <a:p>
             <a:pPr algn="ctr" indent="0" marL="0">
               <a:buNone/>
             </a:pPr>
             <a:r>
-              <a:rPr lang="en-US" sz="3600" b="1" dirty="0">
-                <a:solidFill>
-                  <a:srgbClr val="990011"/>
+              <a:rPr lang="en-US" sz="1600" i="1" dirty="0">
+                <a:solidFill>
+                  <a:srgbClr val="555555"/>
                 </a:solidFill>
                 <a:latin typeface="Times New Roman" pitchFamily="34" charset="0"/>
                 <a:ea typeface="Times New Roman" pitchFamily="34" charset="-122"/>
                 <a:cs typeface="Times New Roman" pitchFamily="34" charset="-120"/>
               </a:rPr>
-              <a:t>Homework</a:t>
-            </a:r>
-            <a:endParaRPr lang="en-US" sz="3600" dirty="0"/>
-          </a:p>
-        </p:txBody>
-      </p:sp>
-      <p:sp>
-        <p:nvSpPr>
-          <p:cNvPr id="5" name="Text 2"/>
-          <p:cNvSpPr/>
-          <p:nvPr/>
-        </p:nvSpPr>
-        <p:spPr>
-          <a:xfrm>
-            <a:off x="5349240" y="1783080"/>
-            <a:ext cx="6522415" cy="4663440"/>
-          </a:xfrm>
-          <a:prstGeom prst="rect">
-            <a:avLst/>
-          </a:prstGeom>
-          <a:noFill/>
-          <a:ln/>
-        </p:spPr>
-        <p:txBody>
-          <a:bodyPr wrap="square" lIns="0" tIns="0" rIns="0" bIns="0" rtlCol="0" anchor="t"/>
-          <a:lstStyle/>
-          <a:p>
-            <a:pPr algn="l" indent="0" marL="0">
-              <a:spcAft>
-                <a:spcPts val="800"/>
-              </a:spcAft>
-              <a:buNone/>
-            </a:pPr>
-            <a:r>
-              <a:rPr lang="en-US" sz="4000" dirty="0">
-                <a:solidFill>
-                  <a:srgbClr val="111111"/>
-                </a:solidFill>
-                <a:latin typeface="Times New Roman" pitchFamily="34" charset="0"/>
-                <a:ea typeface="Times New Roman" pitchFamily="34" charset="-122"/>
-                <a:cs typeface="Times New Roman" pitchFamily="34" charset="-120"/>
-              </a:rPr>
-              <a:t>On the map of Cameroon in your atlas, measure the distance from Garoua to Ngaoundéré and change it into kilometres with the scale.</a:t>
-            </a:r>
-            <a:endParaRPr lang="en-US" sz="4000" dirty="0"/>
+              <a:t>Illustration: grid lines on a map of Cameroon</a:t>
+            </a:r>
+            <a:endParaRPr lang="en-US" sz="1600" dirty="0"/>
           </a:p>
         </p:txBody>
       </p:sp>
@@ -16787,7 +17611,7 @@
                 <a:ea typeface="Calibri" pitchFamily="34" charset="-122"/>
                 <a:cs typeface="Calibri" pitchFamily="34" charset="-120"/>
               </a:rPr>
-              <a:t>NEXT LESSON</a:t>
+              <a:t>BOARD SUMMARY</a:t>
             </a:r>
             <a:endParaRPr lang="en-US" sz="1400" dirty="0"/>
           </a:p>
@@ -16810,7 +17634,7 @@
         <p:spPr>
           <a:xfrm>
             <a:off x="0" y="658368"/>
-            <a:ext cx="5120640" cy="5833872"/>
+            <a:ext cx="2468880" cy="5833872"/>
           </a:xfrm>
           <a:prstGeom prst="rect">
             <a:avLst/>
@@ -16825,8 +17649,8 @@
         </p:nvSpPr>
         <p:spPr>
           <a:xfrm>
-            <a:off x="5349240" y="1005840"/>
-            <a:ext cx="6522415" cy="731520"/>
+            <a:off x="2697480" y="1005840"/>
+            <a:ext cx="9174175" cy="731520"/>
           </a:xfrm>
           <a:prstGeom prst="rect">
             <a:avLst/>
@@ -16852,7 +17676,7 @@
                 <a:ea typeface="Times New Roman" pitchFamily="34" charset="-122"/>
                 <a:cs typeface="Times New Roman" pitchFamily="34" charset="-120"/>
               </a:rPr>
-              <a:t>Next Lesson</a:t>
+              <a:t>3. Reading the Scale and Calculating Distances</a:t>
             </a:r>
             <a:endParaRPr lang="en-US" sz="3600" dirty="0"/>
           </a:p>
@@ -16866,8 +17690,8 @@
         </p:nvSpPr>
         <p:spPr>
           <a:xfrm>
-            <a:off x="5349240" y="1783080"/>
-            <a:ext cx="6522415" cy="4663440"/>
+            <a:off x="2697480" y="1783080"/>
+            <a:ext cx="9174175" cy="4663440"/>
           </a:xfrm>
           <a:prstGeom prst="rect">
             <a:avLst/>
@@ -16876,17 +17700,17 @@
           <a:ln/>
         </p:spPr>
         <p:txBody>
-          <a:bodyPr wrap="square" lIns="0" tIns="0" rIns="0" bIns="0" rtlCol="0" anchor="ctr"/>
-          <a:lstStyle/>
-          <a:p>
-            <a:pPr algn="ctr" indent="0" marL="0">
+          <a:bodyPr wrap="square" lIns="0" tIns="0" rIns="0" bIns="0" rtlCol="0" anchor="t"/>
+          <a:lstStyle/>
+          <a:p>
+            <a:pPr algn="l" indent="0" marL="0">
               <a:spcAft>
                 <a:spcPts val="800"/>
               </a:spcAft>
               <a:buNone/>
             </a:pPr>
             <a:r>
-              <a:rPr lang="en-US" sz="4000" b="1" dirty="0">
+              <a:rPr lang="en-US" sz="4000" i="1" dirty="0">
                 <a:solidFill>
                   <a:srgbClr val="111111"/>
                 </a:solidFill>
@@ -16894,12 +17718,12 @@
                 <a:ea typeface="Times New Roman" pitchFamily="34" charset="-122"/>
                 <a:cs typeface="Times New Roman" pitchFamily="34" charset="-120"/>
               </a:rPr>
-              <a:t>Our next lesson will be on:</a:t>
+              <a:t>We calculate a real distance in the following steps:</a:t>
             </a:r>
             <a:endParaRPr lang="en-US" sz="4000" dirty="0"/>
           </a:p>
           <a:p>
-            <a:pPr algn="ctr" indent="0" marL="0">
+            <a:pPr algn="l" indent="0" marL="0">
               <a:spcAft>
                 <a:spcPts val="800"/>
               </a:spcAft>
@@ -16908,13 +17732,67 @@
             <a:r>
               <a:rPr lang="en-US" sz="4000" b="1" dirty="0">
                 <a:solidFill>
-                  <a:srgbClr val="990011"/>
+                  <a:srgbClr val="111111"/>
                 </a:solidFill>
                 <a:latin typeface="Times New Roman" pitchFamily="34" charset="0"/>
                 <a:ea typeface="Times New Roman" pitchFamily="34" charset="-122"/>
                 <a:cs typeface="Times New Roman" pitchFamily="34" charset="-120"/>
               </a:rPr>
-              <a:t>Practical Work 2: Locate a Place on a Map</a:t>
+              <a:t>Step 1: </a:t>
+            </a:r>
+            <a:pPr algn="l" indent="0" marL="0">
+              <a:spcAft>
+                <a:spcPts val="800"/>
+              </a:spcAft>
+              <a:buNone/>
+            </a:pPr>
+            <a:r>
+              <a:rPr lang="en-US" sz="4000" dirty="0">
+                <a:solidFill>
+                  <a:srgbClr val="111111"/>
+                </a:solidFill>
+                <a:latin typeface="Times New Roman" pitchFamily="34" charset="0"/>
+                <a:ea typeface="Times New Roman" pitchFamily="34" charset="-122"/>
+                <a:cs typeface="Times New Roman" pitchFamily="34" charset="-120"/>
+              </a:rPr>
+              <a:t>We measure the distance between the two places on the map with a ruler.</a:t>
+            </a:r>
+            <a:endParaRPr lang="en-US" sz="4000" dirty="0"/>
+          </a:p>
+          <a:p>
+            <a:pPr algn="l" indent="0" marL="0">
+              <a:spcAft>
+                <a:spcPts val="800"/>
+              </a:spcAft>
+              <a:buNone/>
+            </a:pPr>
+            <a:r>
+              <a:rPr lang="en-US" sz="4000" b="1" dirty="0">
+                <a:solidFill>
+                  <a:srgbClr val="111111"/>
+                </a:solidFill>
+                <a:latin typeface="Times New Roman" pitchFamily="34" charset="0"/>
+                <a:ea typeface="Times New Roman" pitchFamily="34" charset="-122"/>
+                <a:cs typeface="Times New Roman" pitchFamily="34" charset="-120"/>
+              </a:rPr>
+              <a:t>Step 2: </a:t>
+            </a:r>
+            <a:pPr algn="l" indent="0" marL="0">
+              <a:spcAft>
+                <a:spcPts val="800"/>
+              </a:spcAft>
+              <a:buNone/>
+            </a:pPr>
+            <a:r>
+              <a:rPr lang="en-US" sz="4000" dirty="0">
+                <a:solidFill>
+                  <a:srgbClr val="111111"/>
+                </a:solidFill>
+                <a:latin typeface="Times New Roman" pitchFamily="34" charset="0"/>
+                <a:ea typeface="Times New Roman" pitchFamily="34" charset="-122"/>
+                <a:cs typeface="Times New Roman" pitchFamily="34" charset="-120"/>
+              </a:rPr>
+              <a:t>We multiply the map distance by the value of the scale.</a:t>
             </a:r>
             <a:endParaRPr lang="en-US" sz="4000" dirty="0"/>
           </a:p>
@@ -17026,6 +17904,2117 @@
                 <a:ea typeface="Calibri" pitchFamily="34" charset="-122"/>
                 <a:cs typeface="Calibri" pitchFamily="34" charset="-120"/>
               </a:rPr>
+              <a:t>BOARD SUMMARY</a:t>
+            </a:r>
+            <a:endParaRPr lang="en-US" sz="1400" dirty="0"/>
+          </a:p>
+        </p:txBody>
+      </p:sp>
+      <p:pic>
+        <p:nvPicPr>
+          <p:cNvPr id="3" name="Image 0" descr="/home/claude/f4/img/minesec_sheet.png">    </p:cNvPr>
+          <p:cNvPicPr>
+            <a:picLocks noChangeAspect="1"/>
+          </p:cNvPicPr>
+          <p:nvPr/>
+        </p:nvPicPr>
+        <p:blipFill>
+          <a:blip r:embed="rId1"/>
+          <a:stretch>
+            <a:fillRect/>
+          </a:stretch>
+        </p:blipFill>
+        <p:spPr>
+          <a:xfrm>
+            <a:off x="0" y="658368"/>
+            <a:ext cx="5120640" cy="5833872"/>
+          </a:xfrm>
+          <a:prstGeom prst="rect">
+            <a:avLst/>
+          </a:prstGeom>
+        </p:spPr>
+      </p:pic>
+      <p:sp>
+        <p:nvSpPr>
+          <p:cNvPr id="4" name="Text 1"/>
+          <p:cNvSpPr/>
+          <p:nvPr/>
+        </p:nvSpPr>
+        <p:spPr>
+          <a:xfrm>
+            <a:off x="5349240" y="1005840"/>
+            <a:ext cx="6522415" cy="731520"/>
+          </a:xfrm>
+          <a:prstGeom prst="rect">
+            <a:avLst/>
+          </a:prstGeom>
+          <a:noFill/>
+          <a:ln/>
+        </p:spPr>
+        <p:txBody>
+          <a:bodyPr wrap="square" lIns="0" tIns="0" rIns="0" bIns="0" rtlCol="0" anchor="ctr">
+            <a:normAutofit/>
+          </a:bodyPr>
+          <a:lstStyle/>
+          <a:p>
+            <a:pPr algn="ctr" indent="0" marL="0">
+              <a:buNone/>
+            </a:pPr>
+            <a:r>
+              <a:rPr lang="en-US" sz="3600" b="1" dirty="0">
+                <a:solidFill>
+                  <a:srgbClr val="990011"/>
+                </a:solidFill>
+                <a:latin typeface="Times New Roman" pitchFamily="34" charset="0"/>
+                <a:ea typeface="Times New Roman" pitchFamily="34" charset="-122"/>
+                <a:cs typeface="Times New Roman" pitchFamily="34" charset="-120"/>
+              </a:rPr>
+              <a:t>3. Reading the Scale and Calculating Distances (continued)</a:t>
+            </a:r>
+            <a:endParaRPr lang="en-US" sz="3600" dirty="0"/>
+          </a:p>
+        </p:txBody>
+      </p:sp>
+      <p:sp>
+        <p:nvSpPr>
+          <p:cNvPr id="5" name="Text 2"/>
+          <p:cNvSpPr/>
+          <p:nvPr/>
+        </p:nvSpPr>
+        <p:spPr>
+          <a:xfrm>
+            <a:off x="5349240" y="1783080"/>
+            <a:ext cx="6522415" cy="4663440"/>
+          </a:xfrm>
+          <a:prstGeom prst="rect">
+            <a:avLst/>
+          </a:prstGeom>
+          <a:noFill/>
+          <a:ln/>
+        </p:spPr>
+        <p:txBody>
+          <a:bodyPr wrap="square" lIns="0" tIns="0" rIns="0" bIns="0" rtlCol="0" anchor="t"/>
+          <a:lstStyle/>
+          <a:p>
+            <a:pPr algn="l" indent="0" marL="0">
+              <a:spcAft>
+                <a:spcPts val="800"/>
+              </a:spcAft>
+              <a:buNone/>
+            </a:pPr>
+            <a:r>
+              <a:rPr lang="en-US" sz="4000" b="1" dirty="0">
+                <a:solidFill>
+                  <a:srgbClr val="111111"/>
+                </a:solidFill>
+                <a:latin typeface="Times New Roman" pitchFamily="34" charset="0"/>
+                <a:ea typeface="Times New Roman" pitchFamily="34" charset="-122"/>
+                <a:cs typeface="Times New Roman" pitchFamily="34" charset="-120"/>
+              </a:rPr>
+              <a:t>Step 3: </a:t>
+            </a:r>
+            <a:pPr algn="l" indent="0" marL="0">
+              <a:spcAft>
+                <a:spcPts val="800"/>
+              </a:spcAft>
+              <a:buNone/>
+            </a:pPr>
+            <a:r>
+              <a:rPr lang="en-US" sz="4000" dirty="0">
+                <a:solidFill>
+                  <a:srgbClr val="111111"/>
+                </a:solidFill>
+                <a:latin typeface="Times New Roman" pitchFamily="34" charset="0"/>
+                <a:ea typeface="Times New Roman" pitchFamily="34" charset="-122"/>
+                <a:cs typeface="Times New Roman" pitchFamily="34" charset="-120"/>
+              </a:rPr>
+              <a:t>We write the answer in kilometres.</a:t>
+            </a:r>
+            <a:endParaRPr lang="en-US" sz="4000" dirty="0"/>
+          </a:p>
+          <a:p>
+            <a:pPr algn="l" indent="0" marL="0">
+              <a:spcAft>
+                <a:spcPts val="800"/>
+              </a:spcAft>
+              <a:buNone/>
+            </a:pPr>
+            <a:r>
+              <a:rPr lang="en-US" sz="4000" b="1" dirty="0">
+                <a:solidFill>
+                  <a:srgbClr val="111111"/>
+                </a:solidFill>
+                <a:latin typeface="Times New Roman" pitchFamily="34" charset="0"/>
+                <a:ea typeface="Times New Roman" pitchFamily="34" charset="-122"/>
+                <a:cs typeface="Times New Roman" pitchFamily="34" charset="-120"/>
+              </a:rPr>
+              <a:t>Example: </a:t>
+            </a:r>
+            <a:pPr algn="l" indent="0" marL="0">
+              <a:spcAft>
+                <a:spcPts val="800"/>
+              </a:spcAft>
+              <a:buNone/>
+            </a:pPr>
+            <a:r>
+              <a:rPr lang="en-US" sz="4000" dirty="0">
+                <a:solidFill>
+                  <a:srgbClr val="111111"/>
+                </a:solidFill>
+                <a:latin typeface="Times New Roman" pitchFamily="34" charset="0"/>
+                <a:ea typeface="Times New Roman" pitchFamily="34" charset="-122"/>
+                <a:cs typeface="Times New Roman" pitchFamily="34" charset="-120"/>
+              </a:rPr>
+              <a:t>With a scale of 1 cm to 25 km, 6 cm on the map equals 6 × 25 = 150 km.</a:t>
+            </a:r>
+            <a:endParaRPr lang="en-US" sz="4000" dirty="0"/>
+          </a:p>
+        </p:txBody>
+      </p:sp>
+      <p:sp>
+        <p:nvSpPr>
+          <p:cNvPr id="25" name="Slide Number Placeholder 0"/>
+          <p:cNvSpPr>
+            <a:spLocks noGrp="1"/>
+          </p:cNvSpPr>
+          <p:nvPr>
+            <p:ph type="sldNum" sz="quarter" idx="4294967295"/>
+          </p:nvPr>
+        </p:nvSpPr>
+        <p:spPr>
+          <a:xfrm>
+            <a:off x="27432" y="91440"/>
+            <a:ext cx="585216" cy="475488"/>
+          </a:xfrm>
+          <a:prstGeom prst="rect">
+            <a:avLst/>
+          </a:prstGeom>
+          <a:extLst>
+            <a:ext uri="{C572A759-6A51-4108-AA02-DFA0A04FC94B}">
+              <ma14:wrappingTextBoxFlag xmlns:ma14="http://schemas.microsoft.com/office/mac/drawingml/2011/main" val="0"/>
+            </a:ext>
+          </a:extLst>
+        </p:spPr>
+        <p:txBody>
+          <a:bodyPr/>
+          <a:lstStyle>
+            <a:lvl1pPr>
+              <a:defRPr sz="2000">
+                <a:solidFill>
+                  <a:srgbClr val="FFFFFF"/>
+                </a:solidFill>
+                <a:latin typeface="Calibri"/>
+                <a:ea typeface="Calibri"/>
+                <a:cs typeface="Calibri"/>
+              </a:defRPr>
+            </a:lvl1pPr>
+          </a:lstStyle>
+          <a:p>
+            <a:pPr algn="ctr"/>
+            <a:fld id="{F7021451-1387-4CA6-816F-3879F97B5CBC}" type="slidenum">
+              <a:rPr b="1" lang="en-US"/>
+              <a:t>48</a:t>
+            </a:fld>
+            <a:endParaRPr lang="en-US"/>
+          </a:p>
+        </p:txBody>
+      </p:sp>
+    </p:spTree>
+  </p:cSld>
+  <p:clrMapOvr>
+    <a:masterClrMapping/>
+  </p:clrMapOvr>
+</p:sld>
+</file>
+
+<file path=ppt/slides/slide49.xml><?xml version="1.0" encoding="utf-8"?>
+<p:sld xmlns:a="http://schemas.openxmlformats.org/drawingml/2006/main" xmlns:r="http://schemas.openxmlformats.org/officeDocument/2006/relationships" xmlns:p="http://schemas.openxmlformats.org/presentationml/2006/main">
+  <p:cSld name="Slide 49">
+    <p:spTree>
+      <p:nvGrpSpPr>
+        <p:cNvPr id="1" name=""/>
+        <p:cNvGrpSpPr/>
+        <p:nvPr/>
+      </p:nvGrpSpPr>
+      <p:grpSpPr>
+        <a:xfrm>
+          <a:off x="0" y="0"/>
+          <a:ext cx="0" cy="0"/>
+          <a:chOff x="0" y="0"/>
+          <a:chExt cx="0" cy="0"/>
+        </a:xfrm>
+      </p:grpSpPr>
+      <p:sp>
+        <p:nvSpPr>
+          <p:cNvPr id="2" name="Text 0"/>
+          <p:cNvSpPr/>
+          <p:nvPr/>
+        </p:nvSpPr>
+        <p:spPr>
+          <a:xfrm>
+            <a:off x="457200" y="713232"/>
+            <a:ext cx="11368735" cy="274320"/>
+          </a:xfrm>
+          <a:prstGeom prst="rect">
+            <a:avLst/>
+          </a:prstGeom>
+          <a:noFill/>
+          <a:ln/>
+        </p:spPr>
+        <p:txBody>
+          <a:bodyPr wrap="square" lIns="0" tIns="0" rIns="0" bIns="0" rtlCol="0" anchor="ctr"/>
+          <a:lstStyle/>
+          <a:p>
+            <a:pPr algn="r" indent="0" marL="0">
+              <a:buNone/>
+            </a:pPr>
+            <a:r>
+              <a:rPr lang="en-US" sz="1400" b="1" dirty="0">
+                <a:solidFill>
+                  <a:srgbClr val="1C3F6E"/>
+                </a:solidFill>
+                <a:latin typeface="Calibri" pitchFamily="34" charset="0"/>
+                <a:ea typeface="Calibri" pitchFamily="34" charset="-122"/>
+                <a:cs typeface="Calibri" pitchFamily="34" charset="-120"/>
+              </a:rPr>
+              <a:t>FORMATIVE EVALUATION</a:t>
+            </a:r>
+            <a:endParaRPr lang="en-US" sz="1400" dirty="0"/>
+          </a:p>
+        </p:txBody>
+      </p:sp>
+      <p:pic>
+        <p:nvPicPr>
+          <p:cNvPr id="3" name="Image 0" descr="/home/claude/f4/img/minesec_sheet.png">    </p:cNvPr>
+          <p:cNvPicPr>
+            <a:picLocks noChangeAspect="1"/>
+          </p:cNvPicPr>
+          <p:nvPr/>
+        </p:nvPicPr>
+        <p:blipFill>
+          <a:blip r:embed="rId1"/>
+          <a:stretch>
+            <a:fillRect/>
+          </a:stretch>
+        </p:blipFill>
+        <p:spPr>
+          <a:xfrm>
+            <a:off x="0" y="658368"/>
+            <a:ext cx="5120640" cy="5833872"/>
+          </a:xfrm>
+          <a:prstGeom prst="rect">
+            <a:avLst/>
+          </a:prstGeom>
+        </p:spPr>
+      </p:pic>
+      <p:sp>
+        <p:nvSpPr>
+          <p:cNvPr id="4" name="Text 1"/>
+          <p:cNvSpPr/>
+          <p:nvPr/>
+        </p:nvSpPr>
+        <p:spPr>
+          <a:xfrm>
+            <a:off x="5349240" y="1005840"/>
+            <a:ext cx="6522415" cy="731520"/>
+          </a:xfrm>
+          <a:prstGeom prst="rect">
+            <a:avLst/>
+          </a:prstGeom>
+          <a:noFill/>
+          <a:ln/>
+        </p:spPr>
+        <p:txBody>
+          <a:bodyPr wrap="square" lIns="0" tIns="0" rIns="0" bIns="0" rtlCol="0" anchor="ctr">
+            <a:normAutofit/>
+          </a:bodyPr>
+          <a:lstStyle/>
+          <a:p>
+            <a:pPr algn="ctr" indent="0" marL="0">
+              <a:buNone/>
+            </a:pPr>
+            <a:r>
+              <a:rPr lang="en-US" sz="3600" b="1" dirty="0">
+                <a:solidFill>
+                  <a:srgbClr val="990011"/>
+                </a:solidFill>
+                <a:latin typeface="Times New Roman" pitchFamily="34" charset="0"/>
+                <a:ea typeface="Times New Roman" pitchFamily="34" charset="-122"/>
+                <a:cs typeface="Times New Roman" pitchFamily="34" charset="-120"/>
+              </a:rPr>
+              <a:t>Evaluation 1</a:t>
+            </a:r>
+            <a:endParaRPr lang="en-US" sz="3600" dirty="0"/>
+          </a:p>
+        </p:txBody>
+      </p:sp>
+      <p:sp>
+        <p:nvSpPr>
+          <p:cNvPr id="5" name="Text 2"/>
+          <p:cNvSpPr/>
+          <p:nvPr/>
+        </p:nvSpPr>
+        <p:spPr>
+          <a:xfrm>
+            <a:off x="5349240" y="1783080"/>
+            <a:ext cx="6522415" cy="4663440"/>
+          </a:xfrm>
+          <a:prstGeom prst="rect">
+            <a:avLst/>
+          </a:prstGeom>
+          <a:noFill/>
+          <a:ln/>
+        </p:spPr>
+        <p:txBody>
+          <a:bodyPr wrap="square" lIns="0" tIns="0" rIns="0" bIns="0" rtlCol="0" anchor="t"/>
+          <a:lstStyle/>
+          <a:p>
+            <a:pPr algn="l" indent="0" marL="0">
+              <a:spcAft>
+                <a:spcPts val="800"/>
+              </a:spcAft>
+              <a:buNone/>
+            </a:pPr>
+            <a:r>
+              <a:rPr lang="en-US" sz="4000" dirty="0">
+                <a:solidFill>
+                  <a:srgbClr val="111111"/>
+                </a:solidFill>
+                <a:latin typeface="Times New Roman" pitchFamily="34" charset="0"/>
+                <a:ea typeface="Times New Roman" pitchFamily="34" charset="-122"/>
+                <a:cs typeface="Times New Roman" pitchFamily="34" charset="-120"/>
+              </a:rPr>
+              <a:t>Name four elements of the marginal information of a map.</a:t>
+            </a:r>
+            <a:endParaRPr lang="en-US" sz="4000" dirty="0"/>
+          </a:p>
+        </p:txBody>
+      </p:sp>
+      <p:sp>
+        <p:nvSpPr>
+          <p:cNvPr id="25" name="Slide Number Placeholder 0"/>
+          <p:cNvSpPr>
+            <a:spLocks noGrp="1"/>
+          </p:cNvSpPr>
+          <p:nvPr>
+            <p:ph type="sldNum" sz="quarter" idx="4294967295"/>
+          </p:nvPr>
+        </p:nvSpPr>
+        <p:spPr>
+          <a:xfrm>
+            <a:off x="27432" y="91440"/>
+            <a:ext cx="585216" cy="475488"/>
+          </a:xfrm>
+          <a:prstGeom prst="rect">
+            <a:avLst/>
+          </a:prstGeom>
+          <a:extLst>
+            <a:ext uri="{C572A759-6A51-4108-AA02-DFA0A04FC94B}">
+              <ma14:wrappingTextBoxFlag xmlns:ma14="http://schemas.microsoft.com/office/mac/drawingml/2011/main" val="0"/>
+            </a:ext>
+          </a:extLst>
+        </p:spPr>
+        <p:txBody>
+          <a:bodyPr/>
+          <a:lstStyle>
+            <a:lvl1pPr>
+              <a:defRPr sz="2000">
+                <a:solidFill>
+                  <a:srgbClr val="FFFFFF"/>
+                </a:solidFill>
+                <a:latin typeface="Calibri"/>
+                <a:ea typeface="Calibri"/>
+                <a:cs typeface="Calibri"/>
+              </a:defRPr>
+            </a:lvl1pPr>
+          </a:lstStyle>
+          <a:p>
+            <a:pPr algn="ctr"/>
+            <a:fld id="{F7021451-1387-4CA6-816F-3879F97B5CBC}" type="slidenum">
+              <a:rPr b="1" lang="en-US"/>
+              <a:t>49</a:t>
+            </a:fld>
+            <a:endParaRPr lang="en-US"/>
+          </a:p>
+        </p:txBody>
+      </p:sp>
+    </p:spTree>
+  </p:cSld>
+  <p:clrMapOvr>
+    <a:masterClrMapping/>
+  </p:clrMapOvr>
+</p:sld>
+</file>
+
+<file path=ppt/slides/slide5.xml><?xml version="1.0" encoding="utf-8"?>
+<p:sld xmlns:a="http://schemas.openxmlformats.org/drawingml/2006/main" xmlns:r="http://schemas.openxmlformats.org/officeDocument/2006/relationships" xmlns:p="http://schemas.openxmlformats.org/presentationml/2006/main">
+  <p:cSld name="Slide 5">
+    <p:spTree>
+      <p:nvGrpSpPr>
+        <p:cNvPr id="1" name=""/>
+        <p:cNvGrpSpPr/>
+        <p:nvPr/>
+      </p:nvGrpSpPr>
+      <p:grpSpPr>
+        <a:xfrm>
+          <a:off x="0" y="0"/>
+          <a:ext cx="0" cy="0"/>
+          <a:chOff x="0" y="0"/>
+          <a:chExt cx="0" cy="0"/>
+        </a:xfrm>
+      </p:grpSpPr>
+      <p:sp>
+        <p:nvSpPr>
+          <p:cNvPr id="2" name="Text 0"/>
+          <p:cNvSpPr/>
+          <p:nvPr/>
+        </p:nvSpPr>
+        <p:spPr>
+          <a:xfrm>
+            <a:off x="457200" y="713232"/>
+            <a:ext cx="11368735" cy="274320"/>
+          </a:xfrm>
+          <a:prstGeom prst="rect">
+            <a:avLst/>
+          </a:prstGeom>
+          <a:noFill/>
+          <a:ln/>
+        </p:spPr>
+        <p:txBody>
+          <a:bodyPr wrap="square" lIns="0" tIns="0" rIns="0" bIns="0" rtlCol="0" anchor="ctr"/>
+          <a:lstStyle/>
+          <a:p>
+            <a:pPr algn="r" indent="0" marL="0">
+              <a:buNone/>
+            </a:pPr>
+            <a:r>
+              <a:rPr lang="en-US" sz="1400" b="1" dirty="0">
+                <a:solidFill>
+                  <a:srgbClr val="1C3F6E"/>
+                </a:solidFill>
+                <a:latin typeface="Calibri" pitchFamily="34" charset="0"/>
+                <a:ea typeface="Calibri" pitchFamily="34" charset="-122"/>
+                <a:cs typeface="Calibri" pitchFamily="34" charset="-120"/>
+              </a:rPr>
+              <a:t>HOMEWORK CORRECTION</a:t>
+            </a:r>
+            <a:endParaRPr lang="en-US" sz="1400" dirty="0"/>
+          </a:p>
+        </p:txBody>
+      </p:sp>
+      <p:pic>
+        <p:nvPicPr>
+          <p:cNvPr id="3" name="Image 0" descr="/home/claude/f4/img/minesec_sheet.png">    </p:cNvPr>
+          <p:cNvPicPr>
+            <a:picLocks noChangeAspect="1"/>
+          </p:cNvPicPr>
+          <p:nvPr/>
+        </p:nvPicPr>
+        <p:blipFill>
+          <a:blip r:embed="rId1"/>
+          <a:stretch>
+            <a:fillRect/>
+          </a:stretch>
+        </p:blipFill>
+        <p:spPr>
+          <a:xfrm>
+            <a:off x="0" y="658368"/>
+            <a:ext cx="5120640" cy="5833872"/>
+          </a:xfrm>
+          <a:prstGeom prst="rect">
+            <a:avLst/>
+          </a:prstGeom>
+        </p:spPr>
+      </p:pic>
+      <p:sp>
+        <p:nvSpPr>
+          <p:cNvPr id="4" name="Text 1"/>
+          <p:cNvSpPr/>
+          <p:nvPr/>
+        </p:nvSpPr>
+        <p:spPr>
+          <a:xfrm>
+            <a:off x="5349240" y="1005840"/>
+            <a:ext cx="6522415" cy="731520"/>
+          </a:xfrm>
+          <a:prstGeom prst="rect">
+            <a:avLst/>
+          </a:prstGeom>
+          <a:noFill/>
+          <a:ln/>
+        </p:spPr>
+        <p:txBody>
+          <a:bodyPr wrap="square" lIns="0" tIns="0" rIns="0" bIns="0" rtlCol="0" anchor="ctr">
+            <a:normAutofit/>
+          </a:bodyPr>
+          <a:lstStyle/>
+          <a:p>
+            <a:pPr algn="ctr" indent="0" marL="0">
+              <a:buNone/>
+            </a:pPr>
+            <a:r>
+              <a:rPr lang="en-US" sz="3600" b="1" dirty="0">
+                <a:solidFill>
+                  <a:srgbClr val="990011"/>
+                </a:solidFill>
+                <a:latin typeface="Times New Roman" pitchFamily="34" charset="0"/>
+                <a:ea typeface="Times New Roman" pitchFamily="34" charset="-122"/>
+                <a:cs typeface="Times New Roman" pitchFamily="34" charset="-120"/>
+              </a:rPr>
+              <a:t>Correction: Possible Answer</a:t>
+            </a:r>
+            <a:endParaRPr lang="en-US" sz="3600" dirty="0"/>
+          </a:p>
+        </p:txBody>
+      </p:sp>
+      <p:sp>
+        <p:nvSpPr>
+          <p:cNvPr id="5" name="Text 2"/>
+          <p:cNvSpPr/>
+          <p:nvPr/>
+        </p:nvSpPr>
+        <p:spPr>
+          <a:xfrm>
+            <a:off x="5349240" y="1783080"/>
+            <a:ext cx="6522415" cy="4663440"/>
+          </a:xfrm>
+          <a:prstGeom prst="rect">
+            <a:avLst/>
+          </a:prstGeom>
+          <a:noFill/>
+          <a:ln/>
+        </p:spPr>
+        <p:txBody>
+          <a:bodyPr wrap="square" lIns="0" tIns="0" rIns="0" bIns="0" rtlCol="0" anchor="t"/>
+          <a:lstStyle/>
+          <a:p>
+            <a:pPr algn="l" indent="0" marL="0">
+              <a:spcAft>
+                <a:spcPts val="800"/>
+              </a:spcAft>
+              <a:buNone/>
+            </a:pPr>
+            <a:r>
+              <a:rPr lang="en-US" sz="4000" dirty="0">
+                <a:solidFill>
+                  <a:srgbClr val="111111"/>
+                </a:solidFill>
+                <a:latin typeface="Times New Roman" pitchFamily="34" charset="0"/>
+                <a:ea typeface="Times New Roman" pitchFamily="34" charset="-122"/>
+                <a:cs typeface="Times New Roman" pitchFamily="34" charset="-120"/>
+              </a:rPr>
+              <a:t>Cameroon is in Central Africa, just north of the Equator (between about 2° N and 13° N) and east of the Greenwich Meridian (between about 8° E and 16° E).</a:t>
+            </a:r>
+            <a:endParaRPr lang="en-US" sz="4000" dirty="0"/>
+          </a:p>
+        </p:txBody>
+      </p:sp>
+      <p:sp>
+        <p:nvSpPr>
+          <p:cNvPr id="25" name="Slide Number Placeholder 0"/>
+          <p:cNvSpPr>
+            <a:spLocks noGrp="1"/>
+          </p:cNvSpPr>
+          <p:nvPr>
+            <p:ph type="sldNum" sz="quarter" idx="4294967295"/>
+          </p:nvPr>
+        </p:nvSpPr>
+        <p:spPr>
+          <a:xfrm>
+            <a:off x="27432" y="91440"/>
+            <a:ext cx="585216" cy="475488"/>
+          </a:xfrm>
+          <a:prstGeom prst="rect">
+            <a:avLst/>
+          </a:prstGeom>
+          <a:extLst>
+            <a:ext uri="{C572A759-6A51-4108-AA02-DFA0A04FC94B}">
+              <ma14:wrappingTextBoxFlag xmlns:ma14="http://schemas.microsoft.com/office/mac/drawingml/2011/main" val="0"/>
+            </a:ext>
+          </a:extLst>
+        </p:spPr>
+        <p:txBody>
+          <a:bodyPr/>
+          <a:lstStyle>
+            <a:lvl1pPr>
+              <a:defRPr sz="2000">
+                <a:solidFill>
+                  <a:srgbClr val="FFFFFF"/>
+                </a:solidFill>
+                <a:latin typeface="Calibri"/>
+                <a:ea typeface="Calibri"/>
+                <a:cs typeface="Calibri"/>
+              </a:defRPr>
+            </a:lvl1pPr>
+          </a:lstStyle>
+          <a:p>
+            <a:pPr algn="ctr"/>
+            <a:fld id="{F7021451-1387-4CA6-816F-3879F97B5CBC}" type="slidenum">
+              <a:rPr b="1" lang="en-US"/>
+              <a:t>5</a:t>
+            </a:fld>
+            <a:endParaRPr lang="en-US"/>
+          </a:p>
+        </p:txBody>
+      </p:sp>
+    </p:spTree>
+  </p:cSld>
+  <p:clrMapOvr>
+    <a:masterClrMapping/>
+  </p:clrMapOvr>
+</p:sld>
+</file>
+
+<file path=ppt/slides/slide50.xml><?xml version="1.0" encoding="utf-8"?>
+<p:sld xmlns:a="http://schemas.openxmlformats.org/drawingml/2006/main" xmlns:r="http://schemas.openxmlformats.org/officeDocument/2006/relationships" xmlns:p="http://schemas.openxmlformats.org/presentationml/2006/main">
+  <p:cSld name="Slide 50">
+    <p:spTree>
+      <p:nvGrpSpPr>
+        <p:cNvPr id="1" name=""/>
+        <p:cNvGrpSpPr/>
+        <p:nvPr/>
+      </p:nvGrpSpPr>
+      <p:grpSpPr>
+        <a:xfrm>
+          <a:off x="0" y="0"/>
+          <a:ext cx="0" cy="0"/>
+          <a:chOff x="0" y="0"/>
+          <a:chExt cx="0" cy="0"/>
+        </a:xfrm>
+      </p:grpSpPr>
+      <p:sp>
+        <p:nvSpPr>
+          <p:cNvPr id="2" name="Text 0"/>
+          <p:cNvSpPr/>
+          <p:nvPr/>
+        </p:nvSpPr>
+        <p:spPr>
+          <a:xfrm>
+            <a:off x="457200" y="713232"/>
+            <a:ext cx="11368735" cy="274320"/>
+          </a:xfrm>
+          <a:prstGeom prst="rect">
+            <a:avLst/>
+          </a:prstGeom>
+          <a:noFill/>
+          <a:ln/>
+        </p:spPr>
+        <p:txBody>
+          <a:bodyPr wrap="square" lIns="0" tIns="0" rIns="0" bIns="0" rtlCol="0" anchor="ctr"/>
+          <a:lstStyle/>
+          <a:p>
+            <a:pPr algn="r" indent="0" marL="0">
+              <a:buNone/>
+            </a:pPr>
+            <a:r>
+              <a:rPr lang="en-US" sz="1400" b="1" dirty="0">
+                <a:solidFill>
+                  <a:srgbClr val="1C3F6E"/>
+                </a:solidFill>
+                <a:latin typeface="Calibri" pitchFamily="34" charset="0"/>
+                <a:ea typeface="Calibri" pitchFamily="34" charset="-122"/>
+                <a:cs typeface="Calibri" pitchFamily="34" charset="-120"/>
+              </a:rPr>
+              <a:t>FORMATIVE EVALUATION</a:t>
+            </a:r>
+            <a:endParaRPr lang="en-US" sz="1400" dirty="0"/>
+          </a:p>
+        </p:txBody>
+      </p:sp>
+      <p:pic>
+        <p:nvPicPr>
+          <p:cNvPr id="3" name="Image 0" descr="/home/claude/f4/img/minesec_sheet.png">    </p:cNvPr>
+          <p:cNvPicPr>
+            <a:picLocks noChangeAspect="1"/>
+          </p:cNvPicPr>
+          <p:nvPr/>
+        </p:nvPicPr>
+        <p:blipFill>
+          <a:blip r:embed="rId1"/>
+          <a:stretch>
+            <a:fillRect/>
+          </a:stretch>
+        </p:blipFill>
+        <p:spPr>
+          <a:xfrm>
+            <a:off x="0" y="658368"/>
+            <a:ext cx="5120640" cy="5833872"/>
+          </a:xfrm>
+          <a:prstGeom prst="rect">
+            <a:avLst/>
+          </a:prstGeom>
+        </p:spPr>
+      </p:pic>
+      <p:sp>
+        <p:nvSpPr>
+          <p:cNvPr id="4" name="Text 1"/>
+          <p:cNvSpPr/>
+          <p:nvPr/>
+        </p:nvSpPr>
+        <p:spPr>
+          <a:xfrm>
+            <a:off x="5349240" y="1005840"/>
+            <a:ext cx="6522415" cy="731520"/>
+          </a:xfrm>
+          <a:prstGeom prst="rect">
+            <a:avLst/>
+          </a:prstGeom>
+          <a:noFill/>
+          <a:ln/>
+        </p:spPr>
+        <p:txBody>
+          <a:bodyPr wrap="square" lIns="0" tIns="0" rIns="0" bIns="0" rtlCol="0" anchor="ctr">
+            <a:normAutofit/>
+          </a:bodyPr>
+          <a:lstStyle/>
+          <a:p>
+            <a:pPr algn="ctr" indent="0" marL="0">
+              <a:buNone/>
+            </a:pPr>
+            <a:r>
+              <a:rPr lang="en-US" sz="3600" b="1" dirty="0">
+                <a:solidFill>
+                  <a:srgbClr val="990011"/>
+                </a:solidFill>
+                <a:latin typeface="Times New Roman" pitchFamily="34" charset="0"/>
+                <a:ea typeface="Times New Roman" pitchFamily="34" charset="-122"/>
+                <a:cs typeface="Times New Roman" pitchFamily="34" charset="-120"/>
+              </a:rPr>
+              <a:t>Expected Answer</a:t>
+            </a:r>
+            <a:endParaRPr lang="en-US" sz="3600" dirty="0"/>
+          </a:p>
+        </p:txBody>
+      </p:sp>
+      <p:sp>
+        <p:nvSpPr>
+          <p:cNvPr id="5" name="Text 2"/>
+          <p:cNvSpPr/>
+          <p:nvPr/>
+        </p:nvSpPr>
+        <p:spPr>
+          <a:xfrm>
+            <a:off x="5349240" y="1783080"/>
+            <a:ext cx="6522415" cy="4663440"/>
+          </a:xfrm>
+          <a:prstGeom prst="rect">
+            <a:avLst/>
+          </a:prstGeom>
+          <a:noFill/>
+          <a:ln/>
+        </p:spPr>
+        <p:txBody>
+          <a:bodyPr wrap="square" lIns="0" tIns="0" rIns="0" bIns="0" rtlCol="0" anchor="t"/>
+          <a:lstStyle/>
+          <a:p>
+            <a:pPr algn="l" indent="0" marL="0">
+              <a:spcAft>
+                <a:spcPts val="800"/>
+              </a:spcAft>
+              <a:buNone/>
+            </a:pPr>
+            <a:r>
+              <a:rPr lang="en-US" sz="4000" dirty="0">
+                <a:solidFill>
+                  <a:srgbClr val="111111"/>
+                </a:solidFill>
+                <a:latin typeface="Times New Roman" pitchFamily="34" charset="0"/>
+                <a:ea typeface="Times New Roman" pitchFamily="34" charset="-122"/>
+                <a:cs typeface="Times New Roman" pitchFamily="34" charset="-120"/>
+              </a:rPr>
+              <a:t>The title, the key, the scale and the north arrow.</a:t>
+            </a:r>
+            <a:endParaRPr lang="en-US" sz="4000" dirty="0"/>
+          </a:p>
+        </p:txBody>
+      </p:sp>
+      <p:sp>
+        <p:nvSpPr>
+          <p:cNvPr id="25" name="Slide Number Placeholder 0"/>
+          <p:cNvSpPr>
+            <a:spLocks noGrp="1"/>
+          </p:cNvSpPr>
+          <p:nvPr>
+            <p:ph type="sldNum" sz="quarter" idx="4294967295"/>
+          </p:nvPr>
+        </p:nvSpPr>
+        <p:spPr>
+          <a:xfrm>
+            <a:off x="27432" y="91440"/>
+            <a:ext cx="585216" cy="475488"/>
+          </a:xfrm>
+          <a:prstGeom prst="rect">
+            <a:avLst/>
+          </a:prstGeom>
+          <a:extLst>
+            <a:ext uri="{C572A759-6A51-4108-AA02-DFA0A04FC94B}">
+              <ma14:wrappingTextBoxFlag xmlns:ma14="http://schemas.microsoft.com/office/mac/drawingml/2011/main" val="0"/>
+            </a:ext>
+          </a:extLst>
+        </p:spPr>
+        <p:txBody>
+          <a:bodyPr/>
+          <a:lstStyle>
+            <a:lvl1pPr>
+              <a:defRPr sz="2000">
+                <a:solidFill>
+                  <a:srgbClr val="FFFFFF"/>
+                </a:solidFill>
+                <a:latin typeface="Calibri"/>
+                <a:ea typeface="Calibri"/>
+                <a:cs typeface="Calibri"/>
+              </a:defRPr>
+            </a:lvl1pPr>
+          </a:lstStyle>
+          <a:p>
+            <a:pPr algn="ctr"/>
+            <a:fld id="{F7021451-1387-4CA6-816F-3879F97B5CBC}" type="slidenum">
+              <a:rPr b="1" lang="en-US"/>
+              <a:t>50</a:t>
+            </a:fld>
+            <a:endParaRPr lang="en-US"/>
+          </a:p>
+        </p:txBody>
+      </p:sp>
+    </p:spTree>
+  </p:cSld>
+  <p:clrMapOvr>
+    <a:masterClrMapping/>
+  </p:clrMapOvr>
+</p:sld>
+</file>
+
+<file path=ppt/slides/slide51.xml><?xml version="1.0" encoding="utf-8"?>
+<p:sld xmlns:a="http://schemas.openxmlformats.org/drawingml/2006/main" xmlns:r="http://schemas.openxmlformats.org/officeDocument/2006/relationships" xmlns:p="http://schemas.openxmlformats.org/presentationml/2006/main">
+  <p:cSld name="Slide 51">
+    <p:spTree>
+      <p:nvGrpSpPr>
+        <p:cNvPr id="1" name=""/>
+        <p:cNvGrpSpPr/>
+        <p:nvPr/>
+      </p:nvGrpSpPr>
+      <p:grpSpPr>
+        <a:xfrm>
+          <a:off x="0" y="0"/>
+          <a:ext cx="0" cy="0"/>
+          <a:chOff x="0" y="0"/>
+          <a:chExt cx="0" cy="0"/>
+        </a:xfrm>
+      </p:grpSpPr>
+      <p:sp>
+        <p:nvSpPr>
+          <p:cNvPr id="2" name="Text 0"/>
+          <p:cNvSpPr/>
+          <p:nvPr/>
+        </p:nvSpPr>
+        <p:spPr>
+          <a:xfrm>
+            <a:off x="457200" y="713232"/>
+            <a:ext cx="11368735" cy="274320"/>
+          </a:xfrm>
+          <a:prstGeom prst="rect">
+            <a:avLst/>
+          </a:prstGeom>
+          <a:noFill/>
+          <a:ln/>
+        </p:spPr>
+        <p:txBody>
+          <a:bodyPr wrap="square" lIns="0" tIns="0" rIns="0" bIns="0" rtlCol="0" anchor="ctr"/>
+          <a:lstStyle/>
+          <a:p>
+            <a:pPr algn="r" indent="0" marL="0">
+              <a:buNone/>
+            </a:pPr>
+            <a:r>
+              <a:rPr lang="en-US" sz="1400" b="1" dirty="0">
+                <a:solidFill>
+                  <a:srgbClr val="1C3F6E"/>
+                </a:solidFill>
+                <a:latin typeface="Calibri" pitchFamily="34" charset="0"/>
+                <a:ea typeface="Calibri" pitchFamily="34" charset="-122"/>
+                <a:cs typeface="Calibri" pitchFamily="34" charset="-120"/>
+              </a:rPr>
+              <a:t>FORMATIVE EVALUATION</a:t>
+            </a:r>
+            <a:endParaRPr lang="en-US" sz="1400" dirty="0"/>
+          </a:p>
+        </p:txBody>
+      </p:sp>
+      <p:pic>
+        <p:nvPicPr>
+          <p:cNvPr id="3" name="Image 0" descr="/home/claude/f4/img/minesec_sheet.png">    </p:cNvPr>
+          <p:cNvPicPr>
+            <a:picLocks noChangeAspect="1"/>
+          </p:cNvPicPr>
+          <p:nvPr/>
+        </p:nvPicPr>
+        <p:blipFill>
+          <a:blip r:embed="rId1"/>
+          <a:stretch>
+            <a:fillRect/>
+          </a:stretch>
+        </p:blipFill>
+        <p:spPr>
+          <a:xfrm>
+            <a:off x="0" y="658368"/>
+            <a:ext cx="5120640" cy="5833872"/>
+          </a:xfrm>
+          <a:prstGeom prst="rect">
+            <a:avLst/>
+          </a:prstGeom>
+        </p:spPr>
+      </p:pic>
+      <p:sp>
+        <p:nvSpPr>
+          <p:cNvPr id="4" name="Text 1"/>
+          <p:cNvSpPr/>
+          <p:nvPr/>
+        </p:nvSpPr>
+        <p:spPr>
+          <a:xfrm>
+            <a:off x="5349240" y="1005840"/>
+            <a:ext cx="6522415" cy="731520"/>
+          </a:xfrm>
+          <a:prstGeom prst="rect">
+            <a:avLst/>
+          </a:prstGeom>
+          <a:noFill/>
+          <a:ln/>
+        </p:spPr>
+        <p:txBody>
+          <a:bodyPr wrap="square" lIns="0" tIns="0" rIns="0" bIns="0" rtlCol="0" anchor="ctr">
+            <a:normAutofit/>
+          </a:bodyPr>
+          <a:lstStyle/>
+          <a:p>
+            <a:pPr algn="ctr" indent="0" marL="0">
+              <a:buNone/>
+            </a:pPr>
+            <a:r>
+              <a:rPr lang="en-US" sz="3600" b="1" dirty="0">
+                <a:solidFill>
+                  <a:srgbClr val="990011"/>
+                </a:solidFill>
+                <a:latin typeface="Times New Roman" pitchFamily="34" charset="0"/>
+                <a:ea typeface="Times New Roman" pitchFamily="34" charset="-122"/>
+                <a:cs typeface="Times New Roman" pitchFamily="34" charset="-120"/>
+              </a:rPr>
+              <a:t>Evaluation 2</a:t>
+            </a:r>
+            <a:endParaRPr lang="en-US" sz="3600" dirty="0"/>
+          </a:p>
+        </p:txBody>
+      </p:sp>
+      <p:sp>
+        <p:nvSpPr>
+          <p:cNvPr id="5" name="Text 2"/>
+          <p:cNvSpPr/>
+          <p:nvPr/>
+        </p:nvSpPr>
+        <p:spPr>
+          <a:xfrm>
+            <a:off x="5349240" y="1783080"/>
+            <a:ext cx="6522415" cy="4663440"/>
+          </a:xfrm>
+          <a:prstGeom prst="rect">
+            <a:avLst/>
+          </a:prstGeom>
+          <a:noFill/>
+          <a:ln/>
+        </p:spPr>
+        <p:txBody>
+          <a:bodyPr wrap="square" lIns="0" tIns="0" rIns="0" bIns="0" rtlCol="0" anchor="t"/>
+          <a:lstStyle/>
+          <a:p>
+            <a:pPr algn="l" indent="0" marL="0">
+              <a:spcAft>
+                <a:spcPts val="800"/>
+              </a:spcAft>
+              <a:buNone/>
+            </a:pPr>
+            <a:r>
+              <a:rPr lang="en-US" sz="4000" dirty="0">
+                <a:solidFill>
+                  <a:srgbClr val="111111"/>
+                </a:solidFill>
+                <a:latin typeface="Times New Roman" pitchFamily="34" charset="0"/>
+                <a:ea typeface="Times New Roman" pitchFamily="34" charset="-122"/>
+                <a:cs typeface="Times New Roman" pitchFamily="34" charset="-120"/>
+              </a:rPr>
+              <a:t>On a map of 1 cm to 10 km, two towns are 4.5 cm apart. Find the real distance.</a:t>
+            </a:r>
+            <a:endParaRPr lang="en-US" sz="4000" dirty="0"/>
+          </a:p>
+        </p:txBody>
+      </p:sp>
+      <p:sp>
+        <p:nvSpPr>
+          <p:cNvPr id="25" name="Slide Number Placeholder 0"/>
+          <p:cNvSpPr>
+            <a:spLocks noGrp="1"/>
+          </p:cNvSpPr>
+          <p:nvPr>
+            <p:ph type="sldNum" sz="quarter" idx="4294967295"/>
+          </p:nvPr>
+        </p:nvSpPr>
+        <p:spPr>
+          <a:xfrm>
+            <a:off x="27432" y="91440"/>
+            <a:ext cx="585216" cy="475488"/>
+          </a:xfrm>
+          <a:prstGeom prst="rect">
+            <a:avLst/>
+          </a:prstGeom>
+          <a:extLst>
+            <a:ext uri="{C572A759-6A51-4108-AA02-DFA0A04FC94B}">
+              <ma14:wrappingTextBoxFlag xmlns:ma14="http://schemas.microsoft.com/office/mac/drawingml/2011/main" val="0"/>
+            </a:ext>
+          </a:extLst>
+        </p:spPr>
+        <p:txBody>
+          <a:bodyPr/>
+          <a:lstStyle>
+            <a:lvl1pPr>
+              <a:defRPr sz="2000">
+                <a:solidFill>
+                  <a:srgbClr val="FFFFFF"/>
+                </a:solidFill>
+                <a:latin typeface="Calibri"/>
+                <a:ea typeface="Calibri"/>
+                <a:cs typeface="Calibri"/>
+              </a:defRPr>
+            </a:lvl1pPr>
+          </a:lstStyle>
+          <a:p>
+            <a:pPr algn="ctr"/>
+            <a:fld id="{F7021451-1387-4CA6-816F-3879F97B5CBC}" type="slidenum">
+              <a:rPr b="1" lang="en-US"/>
+              <a:t>51</a:t>
+            </a:fld>
+            <a:endParaRPr lang="en-US"/>
+          </a:p>
+        </p:txBody>
+      </p:sp>
+    </p:spTree>
+  </p:cSld>
+  <p:clrMapOvr>
+    <a:masterClrMapping/>
+  </p:clrMapOvr>
+</p:sld>
+</file>
+
+<file path=ppt/slides/slide52.xml><?xml version="1.0" encoding="utf-8"?>
+<p:sld xmlns:a="http://schemas.openxmlformats.org/drawingml/2006/main" xmlns:r="http://schemas.openxmlformats.org/officeDocument/2006/relationships" xmlns:p="http://schemas.openxmlformats.org/presentationml/2006/main">
+  <p:cSld name="Slide 52">
+    <p:spTree>
+      <p:nvGrpSpPr>
+        <p:cNvPr id="1" name=""/>
+        <p:cNvGrpSpPr/>
+        <p:nvPr/>
+      </p:nvGrpSpPr>
+      <p:grpSpPr>
+        <a:xfrm>
+          <a:off x="0" y="0"/>
+          <a:ext cx="0" cy="0"/>
+          <a:chOff x="0" y="0"/>
+          <a:chExt cx="0" cy="0"/>
+        </a:xfrm>
+      </p:grpSpPr>
+      <p:sp>
+        <p:nvSpPr>
+          <p:cNvPr id="2" name="Text 0"/>
+          <p:cNvSpPr/>
+          <p:nvPr/>
+        </p:nvSpPr>
+        <p:spPr>
+          <a:xfrm>
+            <a:off x="457200" y="713232"/>
+            <a:ext cx="11368735" cy="274320"/>
+          </a:xfrm>
+          <a:prstGeom prst="rect">
+            <a:avLst/>
+          </a:prstGeom>
+          <a:noFill/>
+          <a:ln/>
+        </p:spPr>
+        <p:txBody>
+          <a:bodyPr wrap="square" lIns="0" tIns="0" rIns="0" bIns="0" rtlCol="0" anchor="ctr"/>
+          <a:lstStyle/>
+          <a:p>
+            <a:pPr algn="r" indent="0" marL="0">
+              <a:buNone/>
+            </a:pPr>
+            <a:r>
+              <a:rPr lang="en-US" sz="1400" b="1" dirty="0">
+                <a:solidFill>
+                  <a:srgbClr val="1C3F6E"/>
+                </a:solidFill>
+                <a:latin typeface="Calibri" pitchFamily="34" charset="0"/>
+                <a:ea typeface="Calibri" pitchFamily="34" charset="-122"/>
+                <a:cs typeface="Calibri" pitchFamily="34" charset="-120"/>
+              </a:rPr>
+              <a:t>FORMATIVE EVALUATION</a:t>
+            </a:r>
+            <a:endParaRPr lang="en-US" sz="1400" dirty="0"/>
+          </a:p>
+        </p:txBody>
+      </p:sp>
+      <p:pic>
+        <p:nvPicPr>
+          <p:cNvPr id="3" name="Image 0" descr="/home/claude/f4/img/minesec_sheet.png">    </p:cNvPr>
+          <p:cNvPicPr>
+            <a:picLocks noChangeAspect="1"/>
+          </p:cNvPicPr>
+          <p:nvPr/>
+        </p:nvPicPr>
+        <p:blipFill>
+          <a:blip r:embed="rId1"/>
+          <a:stretch>
+            <a:fillRect/>
+          </a:stretch>
+        </p:blipFill>
+        <p:spPr>
+          <a:xfrm>
+            <a:off x="0" y="658368"/>
+            <a:ext cx="5120640" cy="5833872"/>
+          </a:xfrm>
+          <a:prstGeom prst="rect">
+            <a:avLst/>
+          </a:prstGeom>
+        </p:spPr>
+      </p:pic>
+      <p:sp>
+        <p:nvSpPr>
+          <p:cNvPr id="4" name="Text 1"/>
+          <p:cNvSpPr/>
+          <p:nvPr/>
+        </p:nvSpPr>
+        <p:spPr>
+          <a:xfrm>
+            <a:off x="5349240" y="1005840"/>
+            <a:ext cx="6522415" cy="731520"/>
+          </a:xfrm>
+          <a:prstGeom prst="rect">
+            <a:avLst/>
+          </a:prstGeom>
+          <a:noFill/>
+          <a:ln/>
+        </p:spPr>
+        <p:txBody>
+          <a:bodyPr wrap="square" lIns="0" tIns="0" rIns="0" bIns="0" rtlCol="0" anchor="ctr">
+            <a:normAutofit/>
+          </a:bodyPr>
+          <a:lstStyle/>
+          <a:p>
+            <a:pPr algn="ctr" indent="0" marL="0">
+              <a:buNone/>
+            </a:pPr>
+            <a:r>
+              <a:rPr lang="en-US" sz="3600" b="1" dirty="0">
+                <a:solidFill>
+                  <a:srgbClr val="990011"/>
+                </a:solidFill>
+                <a:latin typeface="Times New Roman" pitchFamily="34" charset="0"/>
+                <a:ea typeface="Times New Roman" pitchFamily="34" charset="-122"/>
+                <a:cs typeface="Times New Roman" pitchFamily="34" charset="-120"/>
+              </a:rPr>
+              <a:t>Expected Answer</a:t>
+            </a:r>
+            <a:endParaRPr lang="en-US" sz="3600" dirty="0"/>
+          </a:p>
+        </p:txBody>
+      </p:sp>
+      <p:sp>
+        <p:nvSpPr>
+          <p:cNvPr id="5" name="Text 2"/>
+          <p:cNvSpPr/>
+          <p:nvPr/>
+        </p:nvSpPr>
+        <p:spPr>
+          <a:xfrm>
+            <a:off x="5349240" y="1783080"/>
+            <a:ext cx="6522415" cy="4663440"/>
+          </a:xfrm>
+          <a:prstGeom prst="rect">
+            <a:avLst/>
+          </a:prstGeom>
+          <a:noFill/>
+          <a:ln/>
+        </p:spPr>
+        <p:txBody>
+          <a:bodyPr wrap="square" lIns="0" tIns="0" rIns="0" bIns="0" rtlCol="0" anchor="t"/>
+          <a:lstStyle/>
+          <a:p>
+            <a:pPr algn="l" indent="0" marL="0">
+              <a:spcAft>
+                <a:spcPts val="800"/>
+              </a:spcAft>
+              <a:buNone/>
+            </a:pPr>
+            <a:r>
+              <a:rPr lang="en-US" sz="4000" dirty="0">
+                <a:solidFill>
+                  <a:srgbClr val="111111"/>
+                </a:solidFill>
+                <a:latin typeface="Times New Roman" pitchFamily="34" charset="0"/>
+                <a:ea typeface="Times New Roman" pitchFamily="34" charset="-122"/>
+                <a:cs typeface="Times New Roman" pitchFamily="34" charset="-120"/>
+              </a:rPr>
+              <a:t>4.5 × 10 = 45 km.</a:t>
+            </a:r>
+            <a:endParaRPr lang="en-US" sz="4000" dirty="0"/>
+          </a:p>
+        </p:txBody>
+      </p:sp>
+      <p:sp>
+        <p:nvSpPr>
+          <p:cNvPr id="25" name="Slide Number Placeholder 0"/>
+          <p:cNvSpPr>
+            <a:spLocks noGrp="1"/>
+          </p:cNvSpPr>
+          <p:nvPr>
+            <p:ph type="sldNum" sz="quarter" idx="4294967295"/>
+          </p:nvPr>
+        </p:nvSpPr>
+        <p:spPr>
+          <a:xfrm>
+            <a:off x="27432" y="91440"/>
+            <a:ext cx="585216" cy="475488"/>
+          </a:xfrm>
+          <a:prstGeom prst="rect">
+            <a:avLst/>
+          </a:prstGeom>
+          <a:extLst>
+            <a:ext uri="{C572A759-6A51-4108-AA02-DFA0A04FC94B}">
+              <ma14:wrappingTextBoxFlag xmlns:ma14="http://schemas.microsoft.com/office/mac/drawingml/2011/main" val="0"/>
+            </a:ext>
+          </a:extLst>
+        </p:spPr>
+        <p:txBody>
+          <a:bodyPr/>
+          <a:lstStyle>
+            <a:lvl1pPr>
+              <a:defRPr sz="2000">
+                <a:solidFill>
+                  <a:srgbClr val="FFFFFF"/>
+                </a:solidFill>
+                <a:latin typeface="Calibri"/>
+                <a:ea typeface="Calibri"/>
+                <a:cs typeface="Calibri"/>
+              </a:defRPr>
+            </a:lvl1pPr>
+          </a:lstStyle>
+          <a:p>
+            <a:pPr algn="ctr"/>
+            <a:fld id="{F7021451-1387-4CA6-816F-3879F97B5CBC}" type="slidenum">
+              <a:rPr b="1" lang="en-US"/>
+              <a:t>52</a:t>
+            </a:fld>
+            <a:endParaRPr lang="en-US"/>
+          </a:p>
+        </p:txBody>
+      </p:sp>
+    </p:spTree>
+  </p:cSld>
+  <p:clrMapOvr>
+    <a:masterClrMapping/>
+  </p:clrMapOvr>
+</p:sld>
+</file>
+
+<file path=ppt/slides/slide53.xml><?xml version="1.0" encoding="utf-8"?>
+<p:sld xmlns:a="http://schemas.openxmlformats.org/drawingml/2006/main" xmlns:r="http://schemas.openxmlformats.org/officeDocument/2006/relationships" xmlns:p="http://schemas.openxmlformats.org/presentationml/2006/main">
+  <p:cSld name="Slide 53">
+    <p:spTree>
+      <p:nvGrpSpPr>
+        <p:cNvPr id="1" name=""/>
+        <p:cNvGrpSpPr/>
+        <p:nvPr/>
+      </p:nvGrpSpPr>
+      <p:grpSpPr>
+        <a:xfrm>
+          <a:off x="0" y="0"/>
+          <a:ext cx="0" cy="0"/>
+          <a:chOff x="0" y="0"/>
+          <a:chExt cx="0" cy="0"/>
+        </a:xfrm>
+      </p:grpSpPr>
+      <p:sp>
+        <p:nvSpPr>
+          <p:cNvPr id="2" name="Text 0"/>
+          <p:cNvSpPr/>
+          <p:nvPr/>
+        </p:nvSpPr>
+        <p:spPr>
+          <a:xfrm>
+            <a:off x="457200" y="713232"/>
+            <a:ext cx="11368735" cy="274320"/>
+          </a:xfrm>
+          <a:prstGeom prst="rect">
+            <a:avLst/>
+          </a:prstGeom>
+          <a:noFill/>
+          <a:ln/>
+        </p:spPr>
+        <p:txBody>
+          <a:bodyPr wrap="square" lIns="0" tIns="0" rIns="0" bIns="0" rtlCol="0" anchor="ctr"/>
+          <a:lstStyle/>
+          <a:p>
+            <a:pPr algn="r" indent="0" marL="0">
+              <a:buNone/>
+            </a:pPr>
+            <a:r>
+              <a:rPr lang="en-US" sz="1400" b="1" dirty="0">
+                <a:solidFill>
+                  <a:srgbClr val="1C3F6E"/>
+                </a:solidFill>
+                <a:latin typeface="Calibri" pitchFamily="34" charset="0"/>
+                <a:ea typeface="Calibri" pitchFamily="34" charset="-122"/>
+                <a:cs typeface="Calibri" pitchFamily="34" charset="-120"/>
+              </a:rPr>
+              <a:t>REMEDIATION</a:t>
+            </a:r>
+            <a:endParaRPr lang="en-US" sz="1400" dirty="0"/>
+          </a:p>
+        </p:txBody>
+      </p:sp>
+      <p:pic>
+        <p:nvPicPr>
+          <p:cNvPr id="3" name="Image 0" descr="/home/claude/f4/img/minesec_sheet.png">    </p:cNvPr>
+          <p:cNvPicPr>
+            <a:picLocks noChangeAspect="1"/>
+          </p:cNvPicPr>
+          <p:nvPr/>
+        </p:nvPicPr>
+        <p:blipFill>
+          <a:blip r:embed="rId1"/>
+          <a:stretch>
+            <a:fillRect/>
+          </a:stretch>
+        </p:blipFill>
+        <p:spPr>
+          <a:xfrm>
+            <a:off x="0" y="658368"/>
+            <a:ext cx="1463040" cy="5833872"/>
+          </a:xfrm>
+          <a:prstGeom prst="rect">
+            <a:avLst/>
+          </a:prstGeom>
+        </p:spPr>
+      </p:pic>
+      <p:sp>
+        <p:nvSpPr>
+          <p:cNvPr id="4" name="Text 1"/>
+          <p:cNvSpPr/>
+          <p:nvPr/>
+        </p:nvSpPr>
+        <p:spPr>
+          <a:xfrm>
+            <a:off x="1691640" y="1005840"/>
+            <a:ext cx="10180015" cy="731520"/>
+          </a:xfrm>
+          <a:prstGeom prst="rect">
+            <a:avLst/>
+          </a:prstGeom>
+          <a:noFill/>
+          <a:ln/>
+        </p:spPr>
+        <p:txBody>
+          <a:bodyPr wrap="square" lIns="0" tIns="0" rIns="0" bIns="0" rtlCol="0" anchor="ctr">
+            <a:normAutofit/>
+          </a:bodyPr>
+          <a:lstStyle/>
+          <a:p>
+            <a:pPr algn="ctr" indent="0" marL="0">
+              <a:buNone/>
+            </a:pPr>
+            <a:r>
+              <a:rPr lang="en-US" sz="3600" b="1" dirty="0">
+                <a:solidFill>
+                  <a:srgbClr val="990011"/>
+                </a:solidFill>
+                <a:latin typeface="Times New Roman" pitchFamily="34" charset="0"/>
+                <a:ea typeface="Times New Roman" pitchFamily="34" charset="-122"/>
+                <a:cs typeface="Times New Roman" pitchFamily="34" charset="-120"/>
+              </a:rPr>
+              <a:t>Remediation</a:t>
+            </a:r>
+            <a:endParaRPr lang="en-US" sz="3600" dirty="0"/>
+          </a:p>
+        </p:txBody>
+      </p:sp>
+      <p:sp>
+        <p:nvSpPr>
+          <p:cNvPr id="5" name="Text 2"/>
+          <p:cNvSpPr/>
+          <p:nvPr/>
+        </p:nvSpPr>
+        <p:spPr>
+          <a:xfrm>
+            <a:off x="1691640" y="1783080"/>
+            <a:ext cx="10180015" cy="4663440"/>
+          </a:xfrm>
+          <a:prstGeom prst="rect">
+            <a:avLst/>
+          </a:prstGeom>
+          <a:noFill/>
+          <a:ln/>
+        </p:spPr>
+        <p:txBody>
+          <a:bodyPr wrap="square" lIns="0" tIns="0" rIns="0" bIns="0" rtlCol="0" anchor="t"/>
+          <a:lstStyle/>
+          <a:p>
+            <a:pPr algn="l" indent="0" marL="0">
+              <a:spcAft>
+                <a:spcPts val="800"/>
+              </a:spcAft>
+              <a:buNone/>
+            </a:pPr>
+            <a:r>
+              <a:rPr lang="en-US" sz="4000" b="1" dirty="0">
+                <a:solidFill>
+                  <a:srgbClr val="111111"/>
+                </a:solidFill>
+                <a:latin typeface="Times New Roman" pitchFamily="34" charset="0"/>
+                <a:ea typeface="Times New Roman" pitchFamily="34" charset="-122"/>
+                <a:cs typeface="Times New Roman" pitchFamily="34" charset="-120"/>
+              </a:rPr>
+              <a:t>Fill in the blanks:</a:t>
+            </a:r>
+            <a:endParaRPr lang="en-US" sz="4000" dirty="0"/>
+          </a:p>
+          <a:p>
+            <a:pPr algn="l" marL="342900" indent="-342900">
+              <a:spcAft>
+                <a:spcPts val="800"/>
+              </a:spcAft>
+              <a:buSzPct val="100000"/>
+              <a:buFont typeface="+mj-lt"/>
+              <a:buAutoNum type="arabicPeriod" startAt="1"/>
+            </a:pPr>
+            <a:r>
+              <a:rPr lang="en-US" sz="4000" dirty="0">
+                <a:solidFill>
+                  <a:srgbClr val="111111"/>
+                </a:solidFill>
+                <a:latin typeface="Times New Roman" pitchFamily="34" charset="0"/>
+                <a:ea typeface="Times New Roman" pitchFamily="34" charset="-122"/>
+                <a:cs typeface="Times New Roman" pitchFamily="34" charset="-120"/>
+              </a:rPr>
+              <a:t>A round model of the Earth is a ______.</a:t>
+            </a:r>
+            <a:endParaRPr lang="en-US" sz="4000" dirty="0"/>
+          </a:p>
+          <a:p>
+            <a:pPr algn="l" marL="342900" indent="-342900">
+              <a:spcAft>
+                <a:spcPts val="800"/>
+              </a:spcAft>
+              <a:buSzPct val="100000"/>
+              <a:buFont typeface="+mj-lt"/>
+              <a:buAutoNum type="arabicPeriod" startAt="1"/>
+            </a:pPr>
+            <a:r>
+              <a:rPr lang="en-US" sz="4000" dirty="0">
+                <a:solidFill>
+                  <a:srgbClr val="111111"/>
+                </a:solidFill>
+                <a:latin typeface="Times New Roman" pitchFamily="34" charset="0"/>
+                <a:ea typeface="Times New Roman" pitchFamily="34" charset="-122"/>
+                <a:cs typeface="Times New Roman" pitchFamily="34" charset="-120"/>
+              </a:rPr>
+              <a:t>The part of a map that explains the signs is the ______.</a:t>
+            </a:r>
+            <a:endParaRPr lang="en-US" sz="4000" dirty="0"/>
+          </a:p>
+          <a:p>
+            <a:pPr algn="l" marL="342900" indent="-342900">
+              <a:spcAft>
+                <a:spcPts val="800"/>
+              </a:spcAft>
+              <a:buSzPct val="100000"/>
+              <a:buFont typeface="+mj-lt"/>
+              <a:buAutoNum type="arabicPeriod" startAt="1"/>
+            </a:pPr>
+            <a:r>
+              <a:rPr lang="en-US" sz="4000" dirty="0">
+                <a:solidFill>
+                  <a:srgbClr val="111111"/>
+                </a:solidFill>
+                <a:latin typeface="Times New Roman" pitchFamily="34" charset="0"/>
+                <a:ea typeface="Times New Roman" pitchFamily="34" charset="-122"/>
+                <a:cs typeface="Times New Roman" pitchFamily="34" charset="-120"/>
+              </a:rPr>
+              <a:t>The part of a map used to calculate distances is the ______.</a:t>
+            </a:r>
+            <a:endParaRPr lang="en-US" sz="4000" dirty="0"/>
+          </a:p>
+        </p:txBody>
+      </p:sp>
+      <p:sp>
+        <p:nvSpPr>
+          <p:cNvPr id="25" name="Slide Number Placeholder 0"/>
+          <p:cNvSpPr>
+            <a:spLocks noGrp="1"/>
+          </p:cNvSpPr>
+          <p:nvPr>
+            <p:ph type="sldNum" sz="quarter" idx="4294967295"/>
+          </p:nvPr>
+        </p:nvSpPr>
+        <p:spPr>
+          <a:xfrm>
+            <a:off x="27432" y="91440"/>
+            <a:ext cx="585216" cy="475488"/>
+          </a:xfrm>
+          <a:prstGeom prst="rect">
+            <a:avLst/>
+          </a:prstGeom>
+          <a:extLst>
+            <a:ext uri="{C572A759-6A51-4108-AA02-DFA0A04FC94B}">
+              <ma14:wrappingTextBoxFlag xmlns:ma14="http://schemas.microsoft.com/office/mac/drawingml/2011/main" val="0"/>
+            </a:ext>
+          </a:extLst>
+        </p:spPr>
+        <p:txBody>
+          <a:bodyPr/>
+          <a:lstStyle>
+            <a:lvl1pPr>
+              <a:defRPr sz="2000">
+                <a:solidFill>
+                  <a:srgbClr val="FFFFFF"/>
+                </a:solidFill>
+                <a:latin typeface="Calibri"/>
+                <a:ea typeface="Calibri"/>
+                <a:cs typeface="Calibri"/>
+              </a:defRPr>
+            </a:lvl1pPr>
+          </a:lstStyle>
+          <a:p>
+            <a:pPr algn="ctr"/>
+            <a:fld id="{F7021451-1387-4CA6-816F-3879F97B5CBC}" type="slidenum">
+              <a:rPr b="1" lang="en-US"/>
+              <a:t>53</a:t>
+            </a:fld>
+            <a:endParaRPr lang="en-US"/>
+          </a:p>
+        </p:txBody>
+      </p:sp>
+    </p:spTree>
+  </p:cSld>
+  <p:clrMapOvr>
+    <a:masterClrMapping/>
+  </p:clrMapOvr>
+</p:sld>
+</file>
+
+<file path=ppt/slides/slide54.xml><?xml version="1.0" encoding="utf-8"?>
+<p:sld xmlns:a="http://schemas.openxmlformats.org/drawingml/2006/main" xmlns:r="http://schemas.openxmlformats.org/officeDocument/2006/relationships" xmlns:p="http://schemas.openxmlformats.org/presentationml/2006/main">
+  <p:cSld name="Slide 54">
+    <p:spTree>
+      <p:nvGrpSpPr>
+        <p:cNvPr id="1" name=""/>
+        <p:cNvGrpSpPr/>
+        <p:nvPr/>
+      </p:nvGrpSpPr>
+      <p:grpSpPr>
+        <a:xfrm>
+          <a:off x="0" y="0"/>
+          <a:ext cx="0" cy="0"/>
+          <a:chOff x="0" y="0"/>
+          <a:chExt cx="0" cy="0"/>
+        </a:xfrm>
+      </p:grpSpPr>
+      <p:sp>
+        <p:nvSpPr>
+          <p:cNvPr id="2" name="Text 0"/>
+          <p:cNvSpPr/>
+          <p:nvPr/>
+        </p:nvSpPr>
+        <p:spPr>
+          <a:xfrm>
+            <a:off x="457200" y="713232"/>
+            <a:ext cx="11368735" cy="274320"/>
+          </a:xfrm>
+          <a:prstGeom prst="rect">
+            <a:avLst/>
+          </a:prstGeom>
+          <a:noFill/>
+          <a:ln/>
+        </p:spPr>
+        <p:txBody>
+          <a:bodyPr wrap="square" lIns="0" tIns="0" rIns="0" bIns="0" rtlCol="0" anchor="ctr"/>
+          <a:lstStyle/>
+          <a:p>
+            <a:pPr algn="r" indent="0" marL="0">
+              <a:buNone/>
+            </a:pPr>
+            <a:r>
+              <a:rPr lang="en-US" sz="1400" b="1" dirty="0">
+                <a:solidFill>
+                  <a:srgbClr val="1C3F6E"/>
+                </a:solidFill>
+                <a:latin typeface="Calibri" pitchFamily="34" charset="0"/>
+                <a:ea typeface="Calibri" pitchFamily="34" charset="-122"/>
+                <a:cs typeface="Calibri" pitchFamily="34" charset="-120"/>
+              </a:rPr>
+              <a:t>HOMEWORK</a:t>
+            </a:r>
+            <a:endParaRPr lang="en-US" sz="1400" dirty="0"/>
+          </a:p>
+        </p:txBody>
+      </p:sp>
+      <p:pic>
+        <p:nvPicPr>
+          <p:cNvPr id="3" name="Image 0" descr="/home/claude/f4/img/minesec_sheet.png">    </p:cNvPr>
+          <p:cNvPicPr>
+            <a:picLocks noChangeAspect="1"/>
+          </p:cNvPicPr>
+          <p:nvPr/>
+        </p:nvPicPr>
+        <p:blipFill>
+          <a:blip r:embed="rId1"/>
+          <a:stretch>
+            <a:fillRect/>
+          </a:stretch>
+        </p:blipFill>
+        <p:spPr>
+          <a:xfrm>
+            <a:off x="0" y="658368"/>
+            <a:ext cx="5120640" cy="5833872"/>
+          </a:xfrm>
+          <a:prstGeom prst="rect">
+            <a:avLst/>
+          </a:prstGeom>
+        </p:spPr>
+      </p:pic>
+      <p:sp>
+        <p:nvSpPr>
+          <p:cNvPr id="4" name="Text 1"/>
+          <p:cNvSpPr/>
+          <p:nvPr/>
+        </p:nvSpPr>
+        <p:spPr>
+          <a:xfrm>
+            <a:off x="5349240" y="1005840"/>
+            <a:ext cx="6522415" cy="731520"/>
+          </a:xfrm>
+          <a:prstGeom prst="rect">
+            <a:avLst/>
+          </a:prstGeom>
+          <a:noFill/>
+          <a:ln/>
+        </p:spPr>
+        <p:txBody>
+          <a:bodyPr wrap="square" lIns="0" tIns="0" rIns="0" bIns="0" rtlCol="0" anchor="ctr">
+            <a:normAutofit/>
+          </a:bodyPr>
+          <a:lstStyle/>
+          <a:p>
+            <a:pPr algn="ctr" indent="0" marL="0">
+              <a:buNone/>
+            </a:pPr>
+            <a:r>
+              <a:rPr lang="en-US" sz="3600" b="1" dirty="0">
+                <a:solidFill>
+                  <a:srgbClr val="990011"/>
+                </a:solidFill>
+                <a:latin typeface="Times New Roman" pitchFamily="34" charset="0"/>
+                <a:ea typeface="Times New Roman" pitchFamily="34" charset="-122"/>
+                <a:cs typeface="Times New Roman" pitchFamily="34" charset="-120"/>
+              </a:rPr>
+              <a:t>Homework</a:t>
+            </a:r>
+            <a:endParaRPr lang="en-US" sz="3600" dirty="0"/>
+          </a:p>
+        </p:txBody>
+      </p:sp>
+      <p:sp>
+        <p:nvSpPr>
+          <p:cNvPr id="5" name="Text 2"/>
+          <p:cNvSpPr/>
+          <p:nvPr/>
+        </p:nvSpPr>
+        <p:spPr>
+          <a:xfrm>
+            <a:off x="5349240" y="1783080"/>
+            <a:ext cx="6522415" cy="4663440"/>
+          </a:xfrm>
+          <a:prstGeom prst="rect">
+            <a:avLst/>
+          </a:prstGeom>
+          <a:noFill/>
+          <a:ln/>
+        </p:spPr>
+        <p:txBody>
+          <a:bodyPr wrap="square" lIns="0" tIns="0" rIns="0" bIns="0" rtlCol="0" anchor="t"/>
+          <a:lstStyle/>
+          <a:p>
+            <a:pPr algn="l" indent="0" marL="0">
+              <a:spcAft>
+                <a:spcPts val="800"/>
+              </a:spcAft>
+              <a:buNone/>
+            </a:pPr>
+            <a:r>
+              <a:rPr lang="en-US" sz="4000" dirty="0">
+                <a:solidFill>
+                  <a:srgbClr val="111111"/>
+                </a:solidFill>
+                <a:latin typeface="Times New Roman" pitchFamily="34" charset="0"/>
+                <a:ea typeface="Times New Roman" pitchFamily="34" charset="-122"/>
+                <a:cs typeface="Times New Roman" pitchFamily="34" charset="-120"/>
+              </a:rPr>
+              <a:t>On the map of Cameroon in your atlas, measure the distance from Garoua to Ngaoundéré and change it into kilometres with the scale.</a:t>
+            </a:r>
+            <a:endParaRPr lang="en-US" sz="4000" dirty="0"/>
+          </a:p>
+        </p:txBody>
+      </p:sp>
+      <p:sp>
+        <p:nvSpPr>
+          <p:cNvPr id="25" name="Slide Number Placeholder 0"/>
+          <p:cNvSpPr>
+            <a:spLocks noGrp="1"/>
+          </p:cNvSpPr>
+          <p:nvPr>
+            <p:ph type="sldNum" sz="quarter" idx="4294967295"/>
+          </p:nvPr>
+        </p:nvSpPr>
+        <p:spPr>
+          <a:xfrm>
+            <a:off x="27432" y="91440"/>
+            <a:ext cx="585216" cy="475488"/>
+          </a:xfrm>
+          <a:prstGeom prst="rect">
+            <a:avLst/>
+          </a:prstGeom>
+          <a:extLst>
+            <a:ext uri="{C572A759-6A51-4108-AA02-DFA0A04FC94B}">
+              <ma14:wrappingTextBoxFlag xmlns:ma14="http://schemas.microsoft.com/office/mac/drawingml/2011/main" val="0"/>
+            </a:ext>
+          </a:extLst>
+        </p:spPr>
+        <p:txBody>
+          <a:bodyPr/>
+          <a:lstStyle>
+            <a:lvl1pPr>
+              <a:defRPr sz="2000">
+                <a:solidFill>
+                  <a:srgbClr val="FFFFFF"/>
+                </a:solidFill>
+                <a:latin typeface="Calibri"/>
+                <a:ea typeface="Calibri"/>
+                <a:cs typeface="Calibri"/>
+              </a:defRPr>
+            </a:lvl1pPr>
+          </a:lstStyle>
+          <a:p>
+            <a:pPr algn="ctr"/>
+            <a:fld id="{F7021451-1387-4CA6-816F-3879F97B5CBC}" type="slidenum">
+              <a:rPr b="1" lang="en-US"/>
+              <a:t>54</a:t>
+            </a:fld>
+            <a:endParaRPr lang="en-US"/>
+          </a:p>
+        </p:txBody>
+      </p:sp>
+    </p:spTree>
+  </p:cSld>
+  <p:clrMapOvr>
+    <a:masterClrMapping/>
+  </p:clrMapOvr>
+</p:sld>
+</file>
+
+<file path=ppt/slides/slide55.xml><?xml version="1.0" encoding="utf-8"?>
+<p:sld xmlns:a="http://schemas.openxmlformats.org/drawingml/2006/main" xmlns:r="http://schemas.openxmlformats.org/officeDocument/2006/relationships" xmlns:p="http://schemas.openxmlformats.org/presentationml/2006/main">
+  <p:cSld name="Slide 55">
+    <p:spTree>
+      <p:nvGrpSpPr>
+        <p:cNvPr id="1" name=""/>
+        <p:cNvGrpSpPr/>
+        <p:nvPr/>
+      </p:nvGrpSpPr>
+      <p:grpSpPr>
+        <a:xfrm>
+          <a:off x="0" y="0"/>
+          <a:ext cx="0" cy="0"/>
+          <a:chOff x="0" y="0"/>
+          <a:chExt cx="0" cy="0"/>
+        </a:xfrm>
+      </p:grpSpPr>
+      <p:sp>
+        <p:nvSpPr>
+          <p:cNvPr id="2" name="Text 0"/>
+          <p:cNvSpPr/>
+          <p:nvPr/>
+        </p:nvSpPr>
+        <p:spPr>
+          <a:xfrm>
+            <a:off x="457200" y="713232"/>
+            <a:ext cx="11368735" cy="274320"/>
+          </a:xfrm>
+          <a:prstGeom prst="rect">
+            <a:avLst/>
+          </a:prstGeom>
+          <a:noFill/>
+          <a:ln/>
+        </p:spPr>
+        <p:txBody>
+          <a:bodyPr wrap="square" lIns="0" tIns="0" rIns="0" bIns="0" rtlCol="0" anchor="ctr"/>
+          <a:lstStyle/>
+          <a:p>
+            <a:pPr algn="r" indent="0" marL="0">
+              <a:buNone/>
+            </a:pPr>
+            <a:r>
+              <a:rPr lang="en-US" sz="1400" b="1" dirty="0">
+                <a:solidFill>
+                  <a:srgbClr val="1C3F6E"/>
+                </a:solidFill>
+                <a:latin typeface="Calibri" pitchFamily="34" charset="0"/>
+                <a:ea typeface="Calibri" pitchFamily="34" charset="-122"/>
+                <a:cs typeface="Calibri" pitchFamily="34" charset="-120"/>
+              </a:rPr>
+              <a:t>NEXT LESSON</a:t>
+            </a:r>
+            <a:endParaRPr lang="en-US" sz="1400" dirty="0"/>
+          </a:p>
+        </p:txBody>
+      </p:sp>
+      <p:pic>
+        <p:nvPicPr>
+          <p:cNvPr id="3" name="Image 0" descr="/home/claude/f4/img/minesec_sheet.png">    </p:cNvPr>
+          <p:cNvPicPr>
+            <a:picLocks noChangeAspect="1"/>
+          </p:cNvPicPr>
+          <p:nvPr/>
+        </p:nvPicPr>
+        <p:blipFill>
+          <a:blip r:embed="rId1"/>
+          <a:stretch>
+            <a:fillRect/>
+          </a:stretch>
+        </p:blipFill>
+        <p:spPr>
+          <a:xfrm>
+            <a:off x="0" y="658368"/>
+            <a:ext cx="5120640" cy="5833872"/>
+          </a:xfrm>
+          <a:prstGeom prst="rect">
+            <a:avLst/>
+          </a:prstGeom>
+        </p:spPr>
+      </p:pic>
+      <p:sp>
+        <p:nvSpPr>
+          <p:cNvPr id="4" name="Text 1"/>
+          <p:cNvSpPr/>
+          <p:nvPr/>
+        </p:nvSpPr>
+        <p:spPr>
+          <a:xfrm>
+            <a:off x="5349240" y="1005840"/>
+            <a:ext cx="6522415" cy="731520"/>
+          </a:xfrm>
+          <a:prstGeom prst="rect">
+            <a:avLst/>
+          </a:prstGeom>
+          <a:noFill/>
+          <a:ln/>
+        </p:spPr>
+        <p:txBody>
+          <a:bodyPr wrap="square" lIns="0" tIns="0" rIns="0" bIns="0" rtlCol="0" anchor="ctr">
+            <a:normAutofit/>
+          </a:bodyPr>
+          <a:lstStyle/>
+          <a:p>
+            <a:pPr algn="ctr" indent="0" marL="0">
+              <a:buNone/>
+            </a:pPr>
+            <a:r>
+              <a:rPr lang="en-US" sz="3600" b="1" dirty="0">
+                <a:solidFill>
+                  <a:srgbClr val="990011"/>
+                </a:solidFill>
+                <a:latin typeface="Times New Roman" pitchFamily="34" charset="0"/>
+                <a:ea typeface="Times New Roman" pitchFamily="34" charset="-122"/>
+                <a:cs typeface="Times New Roman" pitchFamily="34" charset="-120"/>
+              </a:rPr>
+              <a:t>Next Lesson</a:t>
+            </a:r>
+            <a:endParaRPr lang="en-US" sz="3600" dirty="0"/>
+          </a:p>
+        </p:txBody>
+      </p:sp>
+      <p:sp>
+        <p:nvSpPr>
+          <p:cNvPr id="5" name="Text 2"/>
+          <p:cNvSpPr/>
+          <p:nvPr/>
+        </p:nvSpPr>
+        <p:spPr>
+          <a:xfrm>
+            <a:off x="5349240" y="1783080"/>
+            <a:ext cx="6522415" cy="4663440"/>
+          </a:xfrm>
+          <a:prstGeom prst="rect">
+            <a:avLst/>
+          </a:prstGeom>
+          <a:noFill/>
+          <a:ln/>
+        </p:spPr>
+        <p:txBody>
+          <a:bodyPr wrap="square" lIns="0" tIns="0" rIns="0" bIns="0" rtlCol="0" anchor="ctr"/>
+          <a:lstStyle/>
+          <a:p>
+            <a:pPr algn="ctr" indent="0" marL="0">
+              <a:spcAft>
+                <a:spcPts val="800"/>
+              </a:spcAft>
+              <a:buNone/>
+            </a:pPr>
+            <a:r>
+              <a:rPr lang="en-US" sz="4000" b="1" dirty="0">
+                <a:solidFill>
+                  <a:srgbClr val="111111"/>
+                </a:solidFill>
+                <a:latin typeface="Times New Roman" pitchFamily="34" charset="0"/>
+                <a:ea typeface="Times New Roman" pitchFamily="34" charset="-122"/>
+                <a:cs typeface="Times New Roman" pitchFamily="34" charset="-120"/>
+              </a:rPr>
+              <a:t>Our next lesson will be on:</a:t>
+            </a:r>
+            <a:endParaRPr lang="en-US" sz="4000" dirty="0"/>
+          </a:p>
+          <a:p>
+            <a:pPr algn="ctr" indent="0" marL="0">
+              <a:spcAft>
+                <a:spcPts val="800"/>
+              </a:spcAft>
+              <a:buNone/>
+            </a:pPr>
+            <a:r>
+              <a:rPr lang="en-US" sz="4000" b="1" dirty="0">
+                <a:solidFill>
+                  <a:srgbClr val="990011"/>
+                </a:solidFill>
+                <a:latin typeface="Times New Roman" pitchFamily="34" charset="0"/>
+                <a:ea typeface="Times New Roman" pitchFamily="34" charset="-122"/>
+                <a:cs typeface="Times New Roman" pitchFamily="34" charset="-120"/>
+              </a:rPr>
+              <a:t>Practical Work 2: Locate a Place on a Map</a:t>
+            </a:r>
+            <a:endParaRPr lang="en-US" sz="4000" dirty="0"/>
+          </a:p>
+        </p:txBody>
+      </p:sp>
+      <p:sp>
+        <p:nvSpPr>
+          <p:cNvPr id="25" name="Slide Number Placeholder 0"/>
+          <p:cNvSpPr>
+            <a:spLocks noGrp="1"/>
+          </p:cNvSpPr>
+          <p:nvPr>
+            <p:ph type="sldNum" sz="quarter" idx="4294967295"/>
+          </p:nvPr>
+        </p:nvSpPr>
+        <p:spPr>
+          <a:xfrm>
+            <a:off x="27432" y="91440"/>
+            <a:ext cx="585216" cy="475488"/>
+          </a:xfrm>
+          <a:prstGeom prst="rect">
+            <a:avLst/>
+          </a:prstGeom>
+          <a:extLst>
+            <a:ext uri="{C572A759-6A51-4108-AA02-DFA0A04FC94B}">
+              <ma14:wrappingTextBoxFlag xmlns:ma14="http://schemas.microsoft.com/office/mac/drawingml/2011/main" val="0"/>
+            </a:ext>
+          </a:extLst>
+        </p:spPr>
+        <p:txBody>
+          <a:bodyPr/>
+          <a:lstStyle>
+            <a:lvl1pPr>
+              <a:defRPr sz="2000">
+                <a:solidFill>
+                  <a:srgbClr val="FFFFFF"/>
+                </a:solidFill>
+                <a:latin typeface="Calibri"/>
+                <a:ea typeface="Calibri"/>
+                <a:cs typeface="Calibri"/>
+              </a:defRPr>
+            </a:lvl1pPr>
+          </a:lstStyle>
+          <a:p>
+            <a:pPr algn="ctr"/>
+            <a:fld id="{F7021451-1387-4CA6-816F-3879F97B5CBC}" type="slidenum">
+              <a:rPr b="1" lang="en-US"/>
+              <a:t>55</a:t>
+            </a:fld>
+            <a:endParaRPr lang="en-US"/>
+          </a:p>
+        </p:txBody>
+      </p:sp>
+    </p:spTree>
+  </p:cSld>
+  <p:clrMapOvr>
+    <a:masterClrMapping/>
+  </p:clrMapOvr>
+</p:sld>
+</file>
+
+<file path=ppt/slides/slide56.xml><?xml version="1.0" encoding="utf-8"?>
+<p:sld xmlns:a="http://schemas.openxmlformats.org/drawingml/2006/main" xmlns:r="http://schemas.openxmlformats.org/officeDocument/2006/relationships" xmlns:p="http://schemas.openxmlformats.org/presentationml/2006/main">
+  <p:cSld name="Slide 56">
+    <p:spTree>
+      <p:nvGrpSpPr>
+        <p:cNvPr id="1" name=""/>
+        <p:cNvGrpSpPr/>
+        <p:nvPr/>
+      </p:nvGrpSpPr>
+      <p:grpSpPr>
+        <a:xfrm>
+          <a:off x="0" y="0"/>
+          <a:ext cx="0" cy="0"/>
+          <a:chOff x="0" y="0"/>
+          <a:chExt cx="0" cy="0"/>
+        </a:xfrm>
+      </p:grpSpPr>
+      <p:sp>
+        <p:nvSpPr>
+          <p:cNvPr id="2" name="Text 0"/>
+          <p:cNvSpPr/>
+          <p:nvPr/>
+        </p:nvSpPr>
+        <p:spPr>
+          <a:xfrm>
+            <a:off x="457200" y="713232"/>
+            <a:ext cx="11368735" cy="274320"/>
+          </a:xfrm>
+          <a:prstGeom prst="rect">
+            <a:avLst/>
+          </a:prstGeom>
+          <a:noFill/>
+          <a:ln/>
+        </p:spPr>
+        <p:txBody>
+          <a:bodyPr wrap="square" lIns="0" tIns="0" rIns="0" bIns="0" rtlCol="0" anchor="ctr"/>
+          <a:lstStyle/>
+          <a:p>
+            <a:pPr algn="r" indent="0" marL="0">
+              <a:buNone/>
+            </a:pPr>
+            <a:r>
+              <a:rPr lang="en-US" sz="1400" b="1" dirty="0">
+                <a:solidFill>
+                  <a:srgbClr val="1C3F6E"/>
+                </a:solidFill>
+                <a:latin typeface="Calibri" pitchFamily="34" charset="0"/>
+                <a:ea typeface="Calibri" pitchFamily="34" charset="-122"/>
+                <a:cs typeface="Calibri" pitchFamily="34" charset="-120"/>
+              </a:rPr>
               <a:t>BILINGUAL GAME</a:t>
             </a:r>
             <a:endParaRPr lang="en-US" sz="1400" dirty="0"/>
@@ -17073,7 +20062,7 @@
       </p:sp>
       <p:graphicFrame>
         <p:nvGraphicFramePr>
-          <p:cNvPr id="49" name="Table 0"/>
+          <p:cNvPr id="57" name="Table 0"/>
           <p:cNvGraphicFramePr>
             <a:graphicFrameLocks noGrp="1"/>
           </p:cNvGraphicFramePr>
@@ -18109,7 +21098,7 @@
             <a:pPr algn="ctr"/>
             <a:fld id="{F7021451-1387-4CA6-816F-3879F97B5CBC}" type="slidenum">
               <a:rPr b="1" lang="en-US"/>
-              <a:t>48</a:t>
+              <a:t>56</a:t>
             </a:fld>
             <a:endParaRPr lang="en-US"/>
           </a:p>
@@ -18123,9 +21112,9 @@
 </p:sld>
 </file>
 
-<file path=ppt/slides/slide49.xml><?xml version="1.0" encoding="utf-8"?>
+<file path=ppt/slides/slide57.xml><?xml version="1.0" encoding="utf-8"?>
 <p:sld xmlns:a="http://schemas.openxmlformats.org/drawingml/2006/main" xmlns:r="http://schemas.openxmlformats.org/officeDocument/2006/relationships" xmlns:p="http://schemas.openxmlformats.org/presentationml/2006/main">
-  <p:cSld name="Slide 49">
+  <p:cSld name="Slide 57">
     <p:spTree>
       <p:nvGrpSpPr>
         <p:cNvPr id="1" name=""/>
@@ -18220,7 +21209,7 @@
       </p:sp>
       <p:graphicFrame>
         <p:nvGraphicFramePr>
-          <p:cNvPr id="50" name="Table 0"/>
+          <p:cNvPr id="58" name="Table 0"/>
           <p:cNvGraphicFramePr>
             <a:graphicFrameLocks noGrp="1"/>
           </p:cNvGraphicFramePr>
@@ -18606,7 +21595,7 @@
                           <a:ea typeface="Calibri" pitchFamily="34" charset="-122"/>
                           <a:cs typeface="Calibri" pitchFamily="34" charset="-120"/>
                         </a:rPr>
-                        <a:t>Distinguish a globe from a map. Identify the marginal information on a map. Calculate real distances using the scale.</a:t>
+                        <a:t>Identify the forms of representation of the Earth. Identify the marginal information on a map. Calculate real distances using the scale.</a:t>
                       </a:r>
                       <a:endParaRPr lang="en-US" sz="1600" dirty="0">
                         <a:latin typeface="Calibri" charset="0"/>
@@ -18842,7 +21831,7 @@
             <a:pPr algn="ctr"/>
             <a:fld id="{F7021451-1387-4CA6-816F-3879F97B5CBC}" type="slidenum">
               <a:rPr b="1" lang="en-US"/>
-              <a:t>49</a:t>
+              <a:t>57</a:t>
             </a:fld>
             <a:endParaRPr lang="en-US"/>
           </a:p>
@@ -18856,9 +21845,9 @@
 </p:sld>
 </file>
 
-<file path=ppt/slides/slide5.xml><?xml version="1.0" encoding="utf-8"?>
+<file path=ppt/slides/slide58.xml><?xml version="1.0" encoding="utf-8"?>
 <p:sld xmlns:a="http://schemas.openxmlformats.org/drawingml/2006/main" xmlns:r="http://schemas.openxmlformats.org/officeDocument/2006/relationships" xmlns:p="http://schemas.openxmlformats.org/presentationml/2006/main">
-  <p:cSld name="Slide 5">
+  <p:cSld name="Slide 58">
     <p:spTree>
       <p:nvGrpSpPr>
         <p:cNvPr id="1" name=""/>
@@ -18906,225 +21895,6 @@
                 <a:ea typeface="Calibri" pitchFamily="34" charset="-122"/>
                 <a:cs typeface="Calibri" pitchFamily="34" charset="-120"/>
               </a:rPr>
-              <a:t>HOMEWORK CORRECTION</a:t>
-            </a:r>
-            <a:endParaRPr lang="en-US" sz="1400" dirty="0"/>
-          </a:p>
-        </p:txBody>
-      </p:sp>
-      <p:pic>
-        <p:nvPicPr>
-          <p:cNvPr id="3" name="Image 0" descr="/home/claude/f4/img/minesec_sheet.png">    </p:cNvPr>
-          <p:cNvPicPr>
-            <a:picLocks noChangeAspect="1"/>
-          </p:cNvPicPr>
-          <p:nvPr/>
-        </p:nvPicPr>
-        <p:blipFill>
-          <a:blip r:embed="rId1"/>
-          <a:stretch>
-            <a:fillRect/>
-          </a:stretch>
-        </p:blipFill>
-        <p:spPr>
-          <a:xfrm>
-            <a:off x="0" y="658368"/>
-            <a:ext cx="5120640" cy="5833872"/>
-          </a:xfrm>
-          <a:prstGeom prst="rect">
-            <a:avLst/>
-          </a:prstGeom>
-        </p:spPr>
-      </p:pic>
-      <p:sp>
-        <p:nvSpPr>
-          <p:cNvPr id="4" name="Text 1"/>
-          <p:cNvSpPr/>
-          <p:nvPr/>
-        </p:nvSpPr>
-        <p:spPr>
-          <a:xfrm>
-            <a:off x="5349240" y="1005840"/>
-            <a:ext cx="6522415" cy="731520"/>
-          </a:xfrm>
-          <a:prstGeom prst="rect">
-            <a:avLst/>
-          </a:prstGeom>
-          <a:noFill/>
-          <a:ln/>
-        </p:spPr>
-        <p:txBody>
-          <a:bodyPr wrap="square" lIns="0" tIns="0" rIns="0" bIns="0" rtlCol="0" anchor="ctr">
-            <a:normAutofit/>
-          </a:bodyPr>
-          <a:lstStyle/>
-          <a:p>
-            <a:pPr algn="ctr" indent="0" marL="0">
-              <a:buNone/>
-            </a:pPr>
-            <a:r>
-              <a:rPr lang="en-US" sz="3600" b="1" dirty="0">
-                <a:solidFill>
-                  <a:srgbClr val="990011"/>
-                </a:solidFill>
-                <a:latin typeface="Times New Roman" pitchFamily="34" charset="0"/>
-                <a:ea typeface="Times New Roman" pitchFamily="34" charset="-122"/>
-                <a:cs typeface="Times New Roman" pitchFamily="34" charset="-120"/>
-              </a:rPr>
-              <a:t>Correction: Possible Answer</a:t>
-            </a:r>
-            <a:endParaRPr lang="en-US" sz="3600" dirty="0"/>
-          </a:p>
-        </p:txBody>
-      </p:sp>
-      <p:sp>
-        <p:nvSpPr>
-          <p:cNvPr id="5" name="Text 2"/>
-          <p:cNvSpPr/>
-          <p:nvPr/>
-        </p:nvSpPr>
-        <p:spPr>
-          <a:xfrm>
-            <a:off x="5349240" y="1783080"/>
-            <a:ext cx="6522415" cy="4663440"/>
-          </a:xfrm>
-          <a:prstGeom prst="rect">
-            <a:avLst/>
-          </a:prstGeom>
-          <a:noFill/>
-          <a:ln/>
-        </p:spPr>
-        <p:txBody>
-          <a:bodyPr wrap="square" lIns="0" tIns="0" rIns="0" bIns="0" rtlCol="0" anchor="t"/>
-          <a:lstStyle/>
-          <a:p>
-            <a:pPr algn="l" indent="0" marL="0">
-              <a:spcAft>
-                <a:spcPts val="800"/>
-              </a:spcAft>
-              <a:buNone/>
-            </a:pPr>
-            <a:r>
-              <a:rPr lang="en-US" sz="4000" dirty="0">
-                <a:solidFill>
-                  <a:srgbClr val="111111"/>
-                </a:solidFill>
-                <a:latin typeface="Times New Roman" pitchFamily="34" charset="0"/>
-                <a:ea typeface="Times New Roman" pitchFamily="34" charset="-122"/>
-                <a:cs typeface="Times New Roman" pitchFamily="34" charset="-120"/>
-              </a:rPr>
-              <a:t>Cameroon is in Central Africa, just north of the Equator (between about 2° N and 13° N) and east of the Greenwich Meridian (between about 8° E and 16° E).</a:t>
-            </a:r>
-            <a:endParaRPr lang="en-US" sz="4000" dirty="0"/>
-          </a:p>
-        </p:txBody>
-      </p:sp>
-      <p:sp>
-        <p:nvSpPr>
-          <p:cNvPr id="25" name="Slide Number Placeholder 0"/>
-          <p:cNvSpPr>
-            <a:spLocks noGrp="1"/>
-          </p:cNvSpPr>
-          <p:nvPr>
-            <p:ph type="sldNum" sz="quarter" idx="4294967295"/>
-          </p:nvPr>
-        </p:nvSpPr>
-        <p:spPr>
-          <a:xfrm>
-            <a:off x="27432" y="91440"/>
-            <a:ext cx="585216" cy="475488"/>
-          </a:xfrm>
-          <a:prstGeom prst="rect">
-            <a:avLst/>
-          </a:prstGeom>
-          <a:extLst>
-            <a:ext uri="{C572A759-6A51-4108-AA02-DFA0A04FC94B}">
-              <ma14:wrappingTextBoxFlag xmlns:ma14="http://schemas.microsoft.com/office/mac/drawingml/2011/main" val="0"/>
-            </a:ext>
-          </a:extLst>
-        </p:spPr>
-        <p:txBody>
-          <a:bodyPr/>
-          <a:lstStyle>
-            <a:lvl1pPr>
-              <a:defRPr sz="2000">
-                <a:solidFill>
-                  <a:srgbClr val="FFFFFF"/>
-                </a:solidFill>
-                <a:latin typeface="Calibri"/>
-                <a:ea typeface="Calibri"/>
-                <a:cs typeface="Calibri"/>
-              </a:defRPr>
-            </a:lvl1pPr>
-          </a:lstStyle>
-          <a:p>
-            <a:pPr algn="ctr"/>
-            <a:fld id="{F7021451-1387-4CA6-816F-3879F97B5CBC}" type="slidenum">
-              <a:rPr b="1" lang="en-US"/>
-              <a:t>5</a:t>
-            </a:fld>
-            <a:endParaRPr lang="en-US"/>
-          </a:p>
-        </p:txBody>
-      </p:sp>
-    </p:spTree>
-  </p:cSld>
-  <p:clrMapOvr>
-    <a:masterClrMapping/>
-  </p:clrMapOvr>
-</p:sld>
-</file>
-
-<file path=ppt/slides/slide50.xml><?xml version="1.0" encoding="utf-8"?>
-<p:sld xmlns:a="http://schemas.openxmlformats.org/drawingml/2006/main" xmlns:r="http://schemas.openxmlformats.org/officeDocument/2006/relationships" xmlns:p="http://schemas.openxmlformats.org/presentationml/2006/main">
-  <p:cSld name="Slide 50">
-    <p:spTree>
-      <p:nvGrpSpPr>
-        <p:cNvPr id="1" name=""/>
-        <p:cNvGrpSpPr/>
-        <p:nvPr/>
-      </p:nvGrpSpPr>
-      <p:grpSpPr>
-        <a:xfrm>
-          <a:off x="0" y="0"/>
-          <a:ext cx="0" cy="0"/>
-          <a:chOff x="0" y="0"/>
-          <a:chExt cx="0" cy="0"/>
-        </a:xfrm>
-      </p:grpSpPr>
-      <p:sp>
-        <p:nvSpPr>
-          <p:cNvPr id="2" name="Text 0"/>
-          <p:cNvSpPr/>
-          <p:nvPr/>
-        </p:nvSpPr>
-        <p:spPr>
-          <a:xfrm>
-            <a:off x="457200" y="713232"/>
-            <a:ext cx="11368735" cy="274320"/>
-          </a:xfrm>
-          <a:prstGeom prst="rect">
-            <a:avLst/>
-          </a:prstGeom>
-          <a:noFill/>
-          <a:ln/>
-        </p:spPr>
-        <p:txBody>
-          <a:bodyPr wrap="square" lIns="0" tIns="0" rIns="0" bIns="0" rtlCol="0" anchor="ctr"/>
-          <a:lstStyle/>
-          <a:p>
-            <a:pPr algn="r" indent="0" marL="0">
-              <a:buNone/>
-            </a:pPr>
-            <a:r>
-              <a:rPr lang="en-US" sz="1400" b="1" dirty="0">
-                <a:solidFill>
-                  <a:srgbClr val="1C3F6E"/>
-                </a:solidFill>
-                <a:latin typeface="Calibri" pitchFamily="34" charset="0"/>
-                <a:ea typeface="Calibri" pitchFamily="34" charset="-122"/>
-                <a:cs typeface="Calibri" pitchFamily="34" charset="-120"/>
-              </a:rPr>
               <a:t>LOGBOOK</a:t>
             </a:r>
             <a:endParaRPr lang="en-US" sz="1400" dirty="0"/>
@@ -19172,7 +21942,7 @@
       </p:sp>
       <p:graphicFrame>
         <p:nvGraphicFramePr>
-          <p:cNvPr id="51" name="Table 0"/>
+          <p:cNvPr id="59" name="Table 0"/>
           <p:cNvGraphicFramePr>
             <a:graphicFrameLocks noGrp="1"/>
           </p:cNvGraphicFramePr>
@@ -19282,7 +22052,7 @@
                           <a:ea typeface="Calibri" pitchFamily="34" charset="-122"/>
                           <a:cs typeface="Calibri" pitchFamily="34" charset="-120"/>
                         </a:rPr>
-                        <a:t>DEFINITIONS; Forms of Representation of the Earth; Marginal Information on Maps; Calculating Distances.</a:t>
+                        <a:t>DEFINITIONS; Forms of Representation of the Earth; Marginal Information on Maps; Reading the Scale and Calculating Distances.</a:t>
                       </a:r>
                       <a:endParaRPr lang="en-US" sz="1600" dirty="0">
                         <a:latin typeface="Calibri" charset="0"/>
@@ -19932,7 +22702,7 @@
             <a:pPr algn="ctr"/>
             <a:fld id="{F7021451-1387-4CA6-816F-3879F97B5CBC}" type="slidenum">
               <a:rPr b="1" lang="en-US"/>
-              <a:t>50</a:t>
+              <a:t>58</a:t>
             </a:fld>
             <a:endParaRPr lang="en-US"/>
           </a:p>
@@ -19946,9 +22716,9 @@
 </p:sld>
 </file>
 
-<file path=ppt/slides/slide51.xml><?xml version="1.0" encoding="utf-8"?>
+<file path=ppt/slides/slide59.xml><?xml version="1.0" encoding="utf-8"?>
 <p:sld xmlns:a="http://schemas.openxmlformats.org/drawingml/2006/main" xmlns:r="http://schemas.openxmlformats.org/officeDocument/2006/relationships" xmlns:p="http://schemas.openxmlformats.org/presentationml/2006/main">
-  <p:cSld name="Slide 51">
+  <p:cSld name="Slide 59">
     <p:spTree>
       <p:nvGrpSpPr>
         <p:cNvPr id="1" name=""/>
@@ -20125,7 +22895,7 @@
                 <a:ea typeface="Calibri" pitchFamily="34" charset="-122"/>
                 <a:cs typeface="Calibri" pitchFamily="34" charset="-120"/>
               </a:rPr>
-              <a:t>Without the projector (Activity 1): show a globe and a map.</a:t>
+              <a:t>Without the projector (Activity 1): show a globe or a ball.</a:t>
             </a:r>
             <a:endParaRPr lang="en-US" sz="2000" dirty="0"/>
           </a:p>
@@ -20188,7 +22958,7 @@
                 <a:ea typeface="Calibri" pitchFamily="34" charset="-122"/>
                 <a:cs typeface="Calibri" pitchFamily="34" charset="-120"/>
               </a:rPr>
-              <a:t>Without the projector (Activity 4): write the calculation on the board.</a:t>
+              <a:t>Without the projector (Activity 4): write the scale on the board.</a:t>
             </a:r>
             <a:endParaRPr lang="en-US" sz="2000" dirty="0"/>
           </a:p>
@@ -20209,7 +22979,7 @@
                 <a:ea typeface="Calibri" pitchFamily="34" charset="-122"/>
                 <a:cs typeface="Calibri" pitchFamily="34" charset="-120"/>
               </a:rPr>
-              <a:t>Without the projector (Activity 5): point to north in the classroom.</a:t>
+              <a:t>Without the projector (Activity 5): write the calculation on the board.</a:t>
             </a:r>
             <a:endParaRPr lang="en-US" sz="2000" dirty="0"/>
           </a:p>
@@ -20257,269 +23027,7 @@
             <a:pPr algn="ctr"/>
             <a:fld id="{F7021451-1387-4CA6-816F-3879F97B5CBC}" type="slidenum">
               <a:rPr b="1" lang="en-US"/>
-              <a:t>51</a:t>
-            </a:fld>
-            <a:endParaRPr lang="en-US"/>
-          </a:p>
-        </p:txBody>
-      </p:sp>
-    </p:spTree>
-  </p:cSld>
-  <p:clrMapOvr>
-    <a:masterClrMapping/>
-  </p:clrMapOvr>
-</p:sld>
-</file>
-
-<file path=ppt/slides/slide52.xml><?xml version="1.0" encoding="utf-8"?>
-<p:sld xmlns:a="http://schemas.openxmlformats.org/drawingml/2006/main" xmlns:r="http://schemas.openxmlformats.org/officeDocument/2006/relationships" xmlns:p="http://schemas.openxmlformats.org/presentationml/2006/main">
-  <p:cSld name="Slide 52">
-    <p:spTree>
-      <p:nvGrpSpPr>
-        <p:cNvPr id="1" name=""/>
-        <p:cNvGrpSpPr/>
-        <p:nvPr/>
-      </p:nvGrpSpPr>
-      <p:grpSpPr>
-        <a:xfrm>
-          <a:off x="0" y="0"/>
-          <a:ext cx="0" cy="0"/>
-          <a:chOff x="0" y="0"/>
-          <a:chExt cx="0" cy="0"/>
-        </a:xfrm>
-      </p:grpSpPr>
-      <p:sp>
-        <p:nvSpPr>
-          <p:cNvPr id="2" name="Text 0"/>
-          <p:cNvSpPr/>
-          <p:nvPr/>
-        </p:nvSpPr>
-        <p:spPr>
-          <a:xfrm>
-            <a:off x="457200" y="713232"/>
-            <a:ext cx="11368735" cy="274320"/>
-          </a:xfrm>
-          <a:prstGeom prst="rect">
-            <a:avLst/>
-          </a:prstGeom>
-          <a:noFill/>
-          <a:ln/>
-        </p:spPr>
-        <p:txBody>
-          <a:bodyPr wrap="square" lIns="0" tIns="0" rIns="0" bIns="0" rtlCol="0" anchor="ctr"/>
-          <a:lstStyle/>
-          <a:p>
-            <a:pPr algn="r" indent="0" marL="0">
-              <a:buNone/>
-            </a:pPr>
-            <a:r>
-              <a:rPr lang="en-US" sz="1400" b="1" dirty="0">
-                <a:solidFill>
-                  <a:srgbClr val="1C3F6E"/>
-                </a:solidFill>
-                <a:latin typeface="Calibri" pitchFamily="34" charset="0"/>
-                <a:ea typeface="Calibri" pitchFamily="34" charset="-122"/>
-                <a:cs typeface="Calibri" pitchFamily="34" charset="-120"/>
-              </a:rPr>
-              <a:t>REFERENCES</a:t>
-            </a:r>
-            <a:endParaRPr lang="en-US" sz="1400" dirty="0"/>
-          </a:p>
-        </p:txBody>
-      </p:sp>
-      <p:pic>
-        <p:nvPicPr>
-          <p:cNvPr id="3" name="Image 0" descr="/home/claude/f4/img/minesec_sheet.png">    </p:cNvPr>
-          <p:cNvPicPr>
-            <a:picLocks noChangeAspect="1"/>
-          </p:cNvPicPr>
-          <p:nvPr/>
-        </p:nvPicPr>
-        <p:blipFill>
-          <a:blip r:embed="rId1"/>
-          <a:stretch>
-            <a:fillRect/>
-          </a:stretch>
-        </p:blipFill>
-        <p:spPr>
-          <a:xfrm>
-            <a:off x="0" y="658368"/>
-            <a:ext cx="5120640" cy="5833872"/>
-          </a:xfrm>
-          <a:prstGeom prst="rect">
-            <a:avLst/>
-          </a:prstGeom>
-        </p:spPr>
-      </p:pic>
-      <p:sp>
-        <p:nvSpPr>
-          <p:cNvPr id="4" name="Text 1"/>
-          <p:cNvSpPr/>
-          <p:nvPr/>
-        </p:nvSpPr>
-        <p:spPr>
-          <a:xfrm>
-            <a:off x="5349240" y="1005840"/>
-            <a:ext cx="6522415" cy="731520"/>
-          </a:xfrm>
-          <a:prstGeom prst="rect">
-            <a:avLst/>
-          </a:prstGeom>
-          <a:noFill/>
-          <a:ln/>
-        </p:spPr>
-        <p:txBody>
-          <a:bodyPr wrap="square" lIns="0" tIns="0" rIns="0" bIns="0" rtlCol="0" anchor="ctr">
-            <a:normAutofit/>
-          </a:bodyPr>
-          <a:lstStyle/>
-          <a:p>
-            <a:pPr algn="ctr" indent="0" marL="0">
-              <a:buNone/>
-            </a:pPr>
-            <a:r>
-              <a:rPr lang="en-US" sz="3600" b="1" dirty="0">
-                <a:solidFill>
-                  <a:srgbClr val="990011"/>
-                </a:solidFill>
-                <a:latin typeface="Times New Roman" pitchFamily="34" charset="0"/>
-                <a:ea typeface="Times New Roman" pitchFamily="34" charset="-122"/>
-                <a:cs typeface="Times New Roman" pitchFamily="34" charset="-120"/>
-              </a:rPr>
-              <a:t>References</a:t>
-            </a:r>
-            <a:endParaRPr lang="en-US" sz="3600" dirty="0"/>
-          </a:p>
-        </p:txBody>
-      </p:sp>
-      <p:sp>
-        <p:nvSpPr>
-          <p:cNvPr id="5" name="Text 2"/>
-          <p:cNvSpPr/>
-          <p:nvPr/>
-        </p:nvSpPr>
-        <p:spPr>
-          <a:xfrm>
-            <a:off x="5349240" y="1783080"/>
-            <a:ext cx="6522415" cy="4663440"/>
-          </a:xfrm>
-          <a:prstGeom prst="rect">
-            <a:avLst/>
-          </a:prstGeom>
-          <a:noFill/>
-          <a:ln/>
-        </p:spPr>
-        <p:txBody>
-          <a:bodyPr wrap="square" lIns="0" tIns="0" rIns="0" bIns="0" rtlCol="0" anchor="t"/>
-          <a:lstStyle/>
-          <a:p>
-            <a:pPr algn="l" marL="342900" indent="-342900">
-              <a:spcAft>
-                <a:spcPts val="800"/>
-              </a:spcAft>
-              <a:buSzPct val="100000"/>
-              <a:buChar char="•"/>
-            </a:pPr>
-            <a:r>
-              <a:rPr lang="en-US" sz="1800" dirty="0">
-                <a:solidFill>
-                  <a:srgbClr val="111111"/>
-                </a:solidFill>
-                <a:latin typeface="Calibri" pitchFamily="34" charset="0"/>
-                <a:ea typeface="Calibri" pitchFamily="34" charset="-122"/>
-                <a:cs typeface="Calibri" pitchFamily="34" charset="-120"/>
-              </a:rPr>
-              <a:t>Geography Syllabus, Forms I–V, MINESEC (2023) — Form 1, Module 1: The Earth in the Universe.</a:t>
-            </a:r>
-            <a:endParaRPr lang="en-US" sz="1800" dirty="0"/>
-          </a:p>
-          <a:p>
-            <a:pPr algn="l" marL="342900" indent="-342900">
-              <a:spcAft>
-                <a:spcPts val="800"/>
-              </a:spcAft>
-              <a:buSzPct val="100000"/>
-              <a:buChar char="•"/>
-            </a:pPr>
-            <a:r>
-              <a:rPr lang="en-US" sz="1800" dirty="0">
-                <a:solidFill>
-                  <a:srgbClr val="111111"/>
-                </a:solidFill>
-                <a:latin typeface="Calibri" pitchFamily="34" charset="0"/>
-                <a:ea typeface="Calibri" pitchFamily="34" charset="-122"/>
-                <a:cs typeface="Calibri" pitchFamily="34" charset="-120"/>
-              </a:rPr>
-              <a:t>Photo, Activity 1: “Blue Marble, Eastern Hemisphere March 2014” by NASA Goddard Photo and Video, CC BY 2.0, via nasa (https://www.flickr.com/photos/24662369@N07/14990033062)</a:t>
-            </a:r>
-            <a:endParaRPr lang="en-US" sz="1800" dirty="0"/>
-          </a:p>
-          <a:p>
-            <a:pPr algn="l" marL="342900" indent="-342900">
-              <a:spcAft>
-                <a:spcPts val="800"/>
-              </a:spcAft>
-              <a:buSzPct val="100000"/>
-              <a:buChar char="•"/>
-            </a:pPr>
-            <a:r>
-              <a:rPr lang="en-US" sz="1800" dirty="0">
-                <a:solidFill>
-                  <a:srgbClr val="111111"/>
-                </a:solidFill>
-                <a:latin typeface="Calibri" pitchFamily="34" charset="0"/>
-                <a:ea typeface="Calibri" pitchFamily="34" charset="-122"/>
-                <a:cs typeface="Calibri" pitchFamily="34" charset="-120"/>
-              </a:rPr>
-              <a:t>Diagrams and animations: drawn for this lesson (Geography Department).</a:t>
-            </a:r>
-            <a:endParaRPr lang="en-US" sz="1800" dirty="0"/>
-          </a:p>
-        </p:txBody>
-      </p:sp>
-      <p:sp>
-        <p:nvSpPr>
-          <p:cNvPr id="25" name="Slide Number Placeholder 0"/>
-          <p:cNvSpPr>
-            <a:spLocks noGrp="1"/>
-          </p:cNvSpPr>
-          <p:nvPr>
-            <p:ph type="sldNum" sz="quarter" idx="4294967295"/>
-          </p:nvPr>
-        </p:nvSpPr>
-        <p:spPr>
-          <a:xfrm>
-            <a:off x="27432" y="91440"/>
-            <a:ext cx="585216" cy="475488"/>
-          </a:xfrm>
-          <a:prstGeom prst="rect">
-            <a:avLst/>
-          </a:prstGeom>
-          <a:extLst>
-            <a:ext uri="{C572A759-6A51-4108-AA02-DFA0A04FC94B}">
-              <ma14:wrappingTextBoxFlag xmlns:ma14="http://schemas.microsoft.com/office/mac/drawingml/2011/main" val="0"/>
-            </a:ext>
-          </a:extLst>
-        </p:spPr>
-        <p:txBody>
-          <a:bodyPr/>
-          <a:lstStyle>
-            <a:lvl1pPr>
-              <a:defRPr sz="2000">
-                <a:solidFill>
-                  <a:srgbClr val="FFFFFF"/>
-                </a:solidFill>
-                <a:latin typeface="Calibri"/>
-                <a:ea typeface="Calibri"/>
-                <a:cs typeface="Calibri"/>
-              </a:defRPr>
-            </a:lvl1pPr>
-          </a:lstStyle>
-          <a:p>
-            <a:pPr algn="ctr"/>
-            <a:fld id="{F7021451-1387-4CA6-816F-3879F97B5CBC}" type="slidenum">
-              <a:rPr b="1" lang="en-US"/>
-              <a:t>52</a:t>
+              <a:t>59</a:t>
             </a:fld>
             <a:endParaRPr lang="en-US"/>
           </a:p>
@@ -20864,6 +23372,247 @@
 </p:sld>
 </file>
 
+<file path=ppt/slides/slide60.xml><?xml version="1.0" encoding="utf-8"?>
+<p:sld xmlns:a="http://schemas.openxmlformats.org/drawingml/2006/main" xmlns:r="http://schemas.openxmlformats.org/officeDocument/2006/relationships" xmlns:p="http://schemas.openxmlformats.org/presentationml/2006/main">
+  <p:cSld name="Slide 60">
+    <p:spTree>
+      <p:nvGrpSpPr>
+        <p:cNvPr id="1" name=""/>
+        <p:cNvGrpSpPr/>
+        <p:nvPr/>
+      </p:nvGrpSpPr>
+      <p:grpSpPr>
+        <a:xfrm>
+          <a:off x="0" y="0"/>
+          <a:ext cx="0" cy="0"/>
+          <a:chOff x="0" y="0"/>
+          <a:chExt cx="0" cy="0"/>
+        </a:xfrm>
+      </p:grpSpPr>
+      <p:sp>
+        <p:nvSpPr>
+          <p:cNvPr id="2" name="Text 0"/>
+          <p:cNvSpPr/>
+          <p:nvPr/>
+        </p:nvSpPr>
+        <p:spPr>
+          <a:xfrm>
+            <a:off x="457200" y="713232"/>
+            <a:ext cx="11368735" cy="274320"/>
+          </a:xfrm>
+          <a:prstGeom prst="rect">
+            <a:avLst/>
+          </a:prstGeom>
+          <a:noFill/>
+          <a:ln/>
+        </p:spPr>
+        <p:txBody>
+          <a:bodyPr wrap="square" lIns="0" tIns="0" rIns="0" bIns="0" rtlCol="0" anchor="ctr"/>
+          <a:lstStyle/>
+          <a:p>
+            <a:pPr algn="r" indent="0" marL="0">
+              <a:buNone/>
+            </a:pPr>
+            <a:r>
+              <a:rPr lang="en-US" sz="1400" b="1" dirty="0">
+                <a:solidFill>
+                  <a:srgbClr val="1C3F6E"/>
+                </a:solidFill>
+                <a:latin typeface="Calibri" pitchFamily="34" charset="0"/>
+                <a:ea typeface="Calibri" pitchFamily="34" charset="-122"/>
+                <a:cs typeface="Calibri" pitchFamily="34" charset="-120"/>
+              </a:rPr>
+              <a:t>REFERENCES</a:t>
+            </a:r>
+            <a:endParaRPr lang="en-US" sz="1400" dirty="0"/>
+          </a:p>
+        </p:txBody>
+      </p:sp>
+      <p:pic>
+        <p:nvPicPr>
+          <p:cNvPr id="3" name="Image 0" descr="/home/claude/f4/img/minesec_sheet.png">    </p:cNvPr>
+          <p:cNvPicPr>
+            <a:picLocks noChangeAspect="1"/>
+          </p:cNvPicPr>
+          <p:nvPr/>
+        </p:nvPicPr>
+        <p:blipFill>
+          <a:blip r:embed="rId1"/>
+          <a:stretch>
+            <a:fillRect/>
+          </a:stretch>
+        </p:blipFill>
+        <p:spPr>
+          <a:xfrm>
+            <a:off x="0" y="658368"/>
+            <a:ext cx="5120640" cy="5833872"/>
+          </a:xfrm>
+          <a:prstGeom prst="rect">
+            <a:avLst/>
+          </a:prstGeom>
+        </p:spPr>
+      </p:pic>
+      <p:sp>
+        <p:nvSpPr>
+          <p:cNvPr id="4" name="Text 1"/>
+          <p:cNvSpPr/>
+          <p:nvPr/>
+        </p:nvSpPr>
+        <p:spPr>
+          <a:xfrm>
+            <a:off x="5349240" y="1005840"/>
+            <a:ext cx="6522415" cy="731520"/>
+          </a:xfrm>
+          <a:prstGeom prst="rect">
+            <a:avLst/>
+          </a:prstGeom>
+          <a:noFill/>
+          <a:ln/>
+        </p:spPr>
+        <p:txBody>
+          <a:bodyPr wrap="square" lIns="0" tIns="0" rIns="0" bIns="0" rtlCol="0" anchor="ctr">
+            <a:normAutofit/>
+          </a:bodyPr>
+          <a:lstStyle/>
+          <a:p>
+            <a:pPr algn="ctr" indent="0" marL="0">
+              <a:buNone/>
+            </a:pPr>
+            <a:r>
+              <a:rPr lang="en-US" sz="3600" b="1" dirty="0">
+                <a:solidFill>
+                  <a:srgbClr val="990011"/>
+                </a:solidFill>
+                <a:latin typeface="Times New Roman" pitchFamily="34" charset="0"/>
+                <a:ea typeface="Times New Roman" pitchFamily="34" charset="-122"/>
+                <a:cs typeface="Times New Roman" pitchFamily="34" charset="-120"/>
+              </a:rPr>
+              <a:t>References</a:t>
+            </a:r>
+            <a:endParaRPr lang="en-US" sz="3600" dirty="0"/>
+          </a:p>
+        </p:txBody>
+      </p:sp>
+      <p:sp>
+        <p:nvSpPr>
+          <p:cNvPr id="5" name="Text 2"/>
+          <p:cNvSpPr/>
+          <p:nvPr/>
+        </p:nvSpPr>
+        <p:spPr>
+          <a:xfrm>
+            <a:off x="5349240" y="1783080"/>
+            <a:ext cx="6522415" cy="4663440"/>
+          </a:xfrm>
+          <a:prstGeom prst="rect">
+            <a:avLst/>
+          </a:prstGeom>
+          <a:noFill/>
+          <a:ln/>
+        </p:spPr>
+        <p:txBody>
+          <a:bodyPr wrap="square" lIns="0" tIns="0" rIns="0" bIns="0" rtlCol="0" anchor="t"/>
+          <a:lstStyle/>
+          <a:p>
+            <a:pPr algn="l" marL="342900" indent="-342900">
+              <a:spcAft>
+                <a:spcPts val="800"/>
+              </a:spcAft>
+              <a:buSzPct val="100000"/>
+              <a:buChar char="•"/>
+            </a:pPr>
+            <a:r>
+              <a:rPr lang="en-US" sz="1800" dirty="0">
+                <a:solidFill>
+                  <a:srgbClr val="111111"/>
+                </a:solidFill>
+                <a:latin typeface="Calibri" pitchFamily="34" charset="0"/>
+                <a:ea typeface="Calibri" pitchFamily="34" charset="-122"/>
+                <a:cs typeface="Calibri" pitchFamily="34" charset="-120"/>
+              </a:rPr>
+              <a:t>Geography Syllabus, Forms I–V, MINESEC (2023) — Form 1, Module 1: The Earth in the Universe.</a:t>
+            </a:r>
+            <a:endParaRPr lang="en-US" sz="1800" dirty="0"/>
+          </a:p>
+          <a:p>
+            <a:pPr algn="l" marL="342900" indent="-342900">
+              <a:spcAft>
+                <a:spcPts val="800"/>
+              </a:spcAft>
+              <a:buSzPct val="100000"/>
+              <a:buChar char="•"/>
+            </a:pPr>
+            <a:r>
+              <a:rPr lang="en-US" sz="1800" dirty="0">
+                <a:solidFill>
+                  <a:srgbClr val="111111"/>
+                </a:solidFill>
+                <a:latin typeface="Calibri" pitchFamily="34" charset="0"/>
+                <a:ea typeface="Calibri" pitchFamily="34" charset="-122"/>
+                <a:cs typeface="Calibri" pitchFamily="34" charset="-120"/>
+              </a:rPr>
+              <a:t>Diagrams and animations: drawn for this lesson (Geography Department).</a:t>
+            </a:r>
+            <a:endParaRPr lang="en-US" sz="1800" dirty="0"/>
+          </a:p>
+        </p:txBody>
+      </p:sp>
+      <p:sp>
+        <p:nvSpPr>
+          <p:cNvPr id="25" name="Slide Number Placeholder 0"/>
+          <p:cNvSpPr>
+            <a:spLocks noGrp="1"/>
+          </p:cNvSpPr>
+          <p:nvPr>
+            <p:ph type="sldNum" sz="quarter" idx="4294967295"/>
+          </p:nvPr>
+        </p:nvSpPr>
+        <p:spPr>
+          <a:xfrm>
+            <a:off x="27432" y="91440"/>
+            <a:ext cx="585216" cy="475488"/>
+          </a:xfrm>
+          <a:prstGeom prst="rect">
+            <a:avLst/>
+          </a:prstGeom>
+          <a:extLst>
+            <a:ext uri="{C572A759-6A51-4108-AA02-DFA0A04FC94B}">
+              <ma14:wrappingTextBoxFlag xmlns:ma14="http://schemas.microsoft.com/office/mac/drawingml/2011/main" val="0"/>
+            </a:ext>
+          </a:extLst>
+        </p:spPr>
+        <p:txBody>
+          <a:bodyPr/>
+          <a:lstStyle>
+            <a:lvl1pPr>
+              <a:defRPr sz="2000">
+                <a:solidFill>
+                  <a:srgbClr val="FFFFFF"/>
+                </a:solidFill>
+                <a:latin typeface="Calibri"/>
+                <a:ea typeface="Calibri"/>
+                <a:cs typeface="Calibri"/>
+              </a:defRPr>
+            </a:lvl1pPr>
+          </a:lstStyle>
+          <a:p>
+            <a:pPr algn="ctr"/>
+            <a:fld id="{F7021451-1387-4CA6-816F-3879F97B5CBC}" type="slidenum">
+              <a:rPr b="1" lang="en-US"/>
+              <a:t>60</a:t>
+            </a:fld>
+            <a:endParaRPr lang="en-US"/>
+          </a:p>
+        </p:txBody>
+      </p:sp>
+    </p:spTree>
+  </p:cSld>
+  <p:clrMapOvr>
+    <a:masterClrMapping/>
+  </p:clrMapOvr>
+</p:sld>
+</file>
+
 <file path=ppt/slides/slide7.xml><?xml version="1.0" encoding="utf-8"?>
 <p:sld xmlns:a="http://schemas.openxmlformats.org/drawingml/2006/main" xmlns:r="http://schemas.openxmlformats.org/officeDocument/2006/relationships" xmlns:p="http://schemas.openxmlformats.org/presentationml/2006/main">
   <p:cSld name="Slide 7">
@@ -20937,7 +23686,7 @@
         <p:spPr>
           <a:xfrm>
             <a:off x="0" y="658368"/>
-            <a:ext cx="1463040" cy="5833872"/>
+            <a:ext cx="5120640" cy="5833872"/>
           </a:xfrm>
           <a:prstGeom prst="rect">
             <a:avLst/>
@@ -20952,8 +23701,8 @@
         </p:nvSpPr>
         <p:spPr>
           <a:xfrm>
-            <a:off x="1691640" y="1005840"/>
-            <a:ext cx="10180015" cy="731520"/>
+            <a:off x="5349240" y="1005840"/>
+            <a:ext cx="6522415" cy="731520"/>
           </a:xfrm>
           <a:prstGeom prst="rect">
             <a:avLst/>
@@ -20993,8 +23742,8 @@
         </p:nvSpPr>
         <p:spPr>
           <a:xfrm>
-            <a:off x="1691640" y="1783080"/>
-            <a:ext cx="10180015" cy="4663440"/>
+            <a:off x="5349240" y="1783080"/>
+            <a:ext cx="6522415" cy="4663440"/>
           </a:xfrm>
           <a:prstGeom prst="rect">
             <a:avLst/>
@@ -21043,7 +23792,7 @@
                 <a:ea typeface="Times New Roman" pitchFamily="34" charset="-122"/>
                 <a:cs typeface="Times New Roman" pitchFamily="34" charset="-120"/>
               </a:rPr>
-              <a:t>Distinguish a globe from a map.</a:t>
+              <a:t>Identify the forms of representation of the Earth.</a:t>
             </a:r>
             <a:endParaRPr lang="en-US" sz="4000" dirty="0"/>
           </a:p>
@@ -21066,28 +23815,6 @@
                 <a:cs typeface="Times New Roman" pitchFamily="34" charset="-120"/>
               </a:rPr>
               <a:t>Identify the marginal information on a map.</a:t>
-            </a:r>
-            <a:endParaRPr lang="en-US" sz="4000" dirty="0"/>
-          </a:p>
-          <a:p>
-            <a:pPr algn="l" marL="342900" indent="-342900">
-              <a:spcAft>
-                <a:spcPts val="800"/>
-              </a:spcAft>
-              <a:buSzPct val="100000"/>
-              <a:buFont typeface="+mj-lt"/>
-              <a:buAutoNum type="arabicPeriod" startAt="1"/>
-            </a:pPr>
-            <a:r>
-              <a:rPr lang="en-US" sz="4000" dirty="0">
-                <a:solidFill>
-                  <a:srgbClr val="111111"/>
-                </a:solidFill>
-                <a:latin typeface="Times New Roman" pitchFamily="34" charset="0"/>
-                <a:ea typeface="Times New Roman" pitchFamily="34" charset="-122"/>
-                <a:cs typeface="Times New Roman" pitchFamily="34" charset="-120"/>
-              </a:rPr>
-              <a:t>Calculate real distances using the scale.</a:t>
             </a:r>
             <a:endParaRPr lang="en-US" sz="4000" dirty="0"/>
           </a:p>
@@ -21199,7 +23926,7 @@
                 <a:ea typeface="Calibri" pitchFamily="34" charset="-122"/>
                 <a:cs typeface="Calibri" pitchFamily="34" charset="-120"/>
               </a:rPr>
-              <a:t>PREVIOUS KNOWLEDGE</a:t>
+              <a:t>OBJECTIVES</a:t>
             </a:r>
             <a:endParaRPr lang="en-US" sz="1400" dirty="0"/>
           </a:p>
@@ -21264,7 +23991,7 @@
                 <a:ea typeface="Times New Roman" pitchFamily="34" charset="-122"/>
                 <a:cs typeface="Times New Roman" pitchFamily="34" charset="-120"/>
               </a:rPr>
-              <a:t>Previous Knowledge</a:t>
+              <a:t>Objectives (continued)</a:t>
             </a:r>
             <a:endParaRPr lang="en-US" sz="3600" dirty="0"/>
           </a:p>
@@ -21296,7 +24023,8 @@
                 <a:spcPts val="800"/>
               </a:spcAft>
               <a:buSzPct val="100000"/>
-              <a:buChar char="•"/>
+              <a:buFont typeface="+mj-lt"/>
+              <a:buAutoNum type="arabicPeriod" startAt="1"/>
             </a:pPr>
             <a:r>
               <a:rPr lang="en-US" sz="4000" dirty="0">
@@ -21307,49 +24035,7 @@
                 <a:ea typeface="Times New Roman" pitchFamily="34" charset="-122"/>
                 <a:cs typeface="Times New Roman" pitchFamily="34" charset="-120"/>
               </a:rPr>
-              <a:t>The Earth is round like a ball.</a:t>
-            </a:r>
-            <a:endParaRPr lang="en-US" sz="4000" dirty="0"/>
-          </a:p>
-          <a:p>
-            <a:pPr algn="l" marL="342900" indent="-342900">
-              <a:spcAft>
-                <a:spcPts val="800"/>
-              </a:spcAft>
-              <a:buSzPct val="100000"/>
-              <a:buChar char="•"/>
-            </a:pPr>
-            <a:r>
-              <a:rPr lang="en-US" sz="4000" dirty="0">
-                <a:solidFill>
-                  <a:srgbClr val="111111"/>
-                </a:solidFill>
-                <a:latin typeface="Times New Roman" pitchFamily="34" charset="0"/>
-                <a:ea typeface="Times New Roman" pitchFamily="34" charset="-122"/>
-                <a:cs typeface="Times New Roman" pitchFamily="34" charset="-120"/>
-              </a:rPr>
-              <a:t>Maps show places on a flat surface.</a:t>
-            </a:r>
-            <a:endParaRPr lang="en-US" sz="4000" dirty="0"/>
-          </a:p>
-          <a:p>
-            <a:pPr algn="l" marL="342900" indent="-342900">
-              <a:spcAft>
-                <a:spcPts val="800"/>
-              </a:spcAft>
-              <a:buSzPct val="100000"/>
-              <a:buChar char="•"/>
-            </a:pPr>
-            <a:r>
-              <a:rPr lang="en-US" sz="4000" dirty="0">
-                <a:solidFill>
-                  <a:srgbClr val="111111"/>
-                </a:solidFill>
-                <a:latin typeface="Times New Roman" pitchFamily="34" charset="0"/>
-                <a:ea typeface="Times New Roman" pitchFamily="34" charset="-122"/>
-                <a:cs typeface="Times New Roman" pitchFamily="34" charset="-120"/>
-              </a:rPr>
-              <a:t>Latitudes and longitudes help us to locate places.</a:t>
+              <a:t>Calculate real distances using the scale.</a:t>
             </a:r>
             <a:endParaRPr lang="en-US" sz="4000" dirty="0"/>
           </a:p>
@@ -21461,7 +24147,7 @@
                 <a:ea typeface="Calibri" pitchFamily="34" charset="-122"/>
                 <a:cs typeface="Calibri" pitchFamily="34" charset="-120"/>
               </a:rPr>
-              <a:t>REAL-LIFE SITUATION</a:t>
+              <a:t>PREVIOUS KNOWLEDGE</a:t>
             </a:r>
             <a:endParaRPr lang="en-US" sz="1400" dirty="0"/>
           </a:p>
@@ -21526,7 +24212,7 @@
                 <a:ea typeface="Times New Roman" pitchFamily="34" charset="-122"/>
                 <a:cs typeface="Times New Roman" pitchFamily="34" charset="-120"/>
               </a:rPr>
-              <a:t>Situation in Real Life</a:t>
+              <a:t>Previous Knowledge</a:t>
             </a:r>
             <a:endParaRPr lang="en-US" sz="3600" dirty="0"/>
           </a:p>
@@ -21553,11 +24239,12 @@
           <a:bodyPr wrap="square" lIns="0" tIns="0" rIns="0" bIns="0" rtlCol="0" anchor="t"/>
           <a:lstStyle/>
           <a:p>
-            <a:pPr algn="l" indent="0" marL="0">
+            <a:pPr algn="l" marL="342900" indent="-342900">
               <a:spcAft>
                 <a:spcPts val="800"/>
               </a:spcAft>
-              <a:buNone/>
+              <a:buSzPct val="100000"/>
+              <a:buChar char="•"/>
             </a:pPr>
             <a:r>
               <a:rPr lang="en-US" sz="4000" dirty="0">
@@ -21568,7 +24255,49 @@
                 <a:ea typeface="Times New Roman" pitchFamily="34" charset="-122"/>
                 <a:cs typeface="Times New Roman" pitchFamily="34" charset="-120"/>
               </a:rPr>
-              <a:t>Mariam wants to know how far Garoua is from Maroua. On her map, the two towns are 6 cm apart, but she does not know how to change this into kilometres.</a:t>
+              <a:t>The Earth is round like a ball.</a:t>
+            </a:r>
+            <a:endParaRPr lang="en-US" sz="4000" dirty="0"/>
+          </a:p>
+          <a:p>
+            <a:pPr algn="l" marL="342900" indent="-342900">
+              <a:spcAft>
+                <a:spcPts val="800"/>
+              </a:spcAft>
+              <a:buSzPct val="100000"/>
+              <a:buChar char="•"/>
+            </a:pPr>
+            <a:r>
+              <a:rPr lang="en-US" sz="4000" dirty="0">
+                <a:solidFill>
+                  <a:srgbClr val="111111"/>
+                </a:solidFill>
+                <a:latin typeface="Times New Roman" pitchFamily="34" charset="0"/>
+                <a:ea typeface="Times New Roman" pitchFamily="34" charset="-122"/>
+                <a:cs typeface="Times New Roman" pitchFamily="34" charset="-120"/>
+              </a:rPr>
+              <a:t>Maps show places on a flat surface.</a:t>
+            </a:r>
+            <a:endParaRPr lang="en-US" sz="4000" dirty="0"/>
+          </a:p>
+          <a:p>
+            <a:pPr algn="l" marL="342900" indent="-342900">
+              <a:spcAft>
+                <a:spcPts val="800"/>
+              </a:spcAft>
+              <a:buSzPct val="100000"/>
+              <a:buChar char="•"/>
+            </a:pPr>
+            <a:r>
+              <a:rPr lang="en-US" sz="4000" dirty="0">
+                <a:solidFill>
+                  <a:srgbClr val="111111"/>
+                </a:solidFill>
+                <a:latin typeface="Times New Roman" pitchFamily="34" charset="0"/>
+                <a:ea typeface="Times New Roman" pitchFamily="34" charset="-122"/>
+                <a:cs typeface="Times New Roman" pitchFamily="34" charset="-120"/>
+              </a:rPr>
+              <a:t>Latitudes and longitudes help us to locate places.</a:t>
             </a:r>
             <a:endParaRPr lang="en-US" sz="4000" dirty="0"/>
           </a:p>

--- a/lecons/F1/03_F1_M1_PW01_Representation_of_the_Earth_s_Shape_and_Size.pptx
+++ b/lecons/F1/03_F1_M1_PW01_Representation_of_the_Earth_s_Shape_and_Size.pptx
@@ -14482,7 +14482,7 @@
               <a:buNone/>
             </a:pPr>
             <a:r>
-              <a:rPr lang="en-US" sz="4000" b="1" dirty="0">
+              <a:rPr lang="en-US" sz="3200" b="1" dirty="0">
                 <a:solidFill>
                   <a:srgbClr val="111111"/>
                 </a:solidFill>
@@ -14492,7 +14492,7 @@
               </a:rPr>
               <a:t>Topic: The Earth in the Universe</a:t>
             </a:r>
-            <a:endParaRPr lang="en-US" sz="4000" dirty="0"/>
+            <a:endParaRPr lang="en-US" sz="3200" dirty="0"/>
           </a:p>
           <a:p>
             <a:pPr algn="l" indent="0" marL="0">
@@ -14502,7 +14502,7 @@
               <a:buNone/>
             </a:pPr>
             <a:r>
-              <a:rPr lang="en-US" sz="4000" b="1" dirty="0">
+              <a:rPr lang="en-US" sz="3200" b="1" dirty="0">
                 <a:solidFill>
                   <a:srgbClr val="111111"/>
                 </a:solidFill>
@@ -14512,7 +14512,7 @@
               </a:rPr>
               <a:t>Sub-topic: The Earth: A Planet of the Solar System</a:t>
             </a:r>
-            <a:endParaRPr lang="en-US" sz="4000" dirty="0"/>
+            <a:endParaRPr lang="en-US" sz="3200" dirty="0"/>
           </a:p>
           <a:p>
             <a:pPr algn="l" indent="0" marL="0">
@@ -14522,7 +14522,7 @@
               <a:buNone/>
             </a:pPr>
             <a:r>
-              <a:rPr lang="en-US" sz="4000" b="1" dirty="0">
+              <a:rPr lang="en-US" sz="3200" b="1" dirty="0">
                 <a:solidFill>
                   <a:srgbClr val="990011"/>
                 </a:solidFill>
@@ -14532,7 +14532,7 @@
               </a:rPr>
               <a:t>Practical Work 1: Representation of the Earth's Shape and Size</a:t>
             </a:r>
-            <a:endParaRPr lang="en-US" sz="4000" dirty="0"/>
+            <a:endParaRPr lang="en-US" sz="3200" dirty="0"/>
           </a:p>
         </p:txBody>
       </p:sp>

--- a/lecons/F1/03_F1_M1_PW01_Representation_of_the_Earth_s_Shape_and_Size.pptx
+++ b/lecons/F1/03_F1_M1_PW01_Representation_of_the_Earth_s_Shape_and_Size.pptx
@@ -4169,7 +4169,7 @@
           <a:p>
             <a:r>
               <a:rPr lang="en-US" dirty="0"/>
-              <a:t>Let us copy Reading the Scale and Calculating Distances. We calculate a real distance in the following steps. On this slide we have Step 1 and Step 2. Write each point on a new line, with the key term first, and explain it in your own words when we revise. When you finish, we go to the next slide.</a:t>
+              <a:t>Let us copy Reading the Scale and Calculating Distances. We calculate a real distance as follows. On this slide we have Step 1, Step 2 and Step 3. Write each point on a new line, with the key term first, and explain it in your own words when we revise. When you finish, we go to the next slide.</a:t>
             </a:r>
             <a:endParaRPr lang="en-US" dirty="0"/>
           </a:p>
@@ -4257,7 +4257,7 @@
           <a:p>
             <a:r>
               <a:rPr lang="en-US" dirty="0"/>
-              <a:t>We continue with Reading the Scale and Calculating Distances. On this slide we have Step 3 and Example. Write each point on a new line, with the key term first, and explain it in your own words when we revise.</a:t>
+              <a:t>We continue with Reading the Scale and Calculating Distances. On this slide we have Example. Write each point on a new line, with the key term first, and explain it in your own words when we revise.</a:t>
             </a:r>
             <a:endParaRPr lang="en-US" dirty="0"/>
           </a:p>
@@ -17634,7 +17634,7 @@
         <p:spPr>
           <a:xfrm>
             <a:off x="0" y="658368"/>
-            <a:ext cx="2468880" cy="5833872"/>
+            <a:ext cx="1463040" cy="5833872"/>
           </a:xfrm>
           <a:prstGeom prst="rect">
             <a:avLst/>
@@ -17649,8 +17649,8 @@
         </p:nvSpPr>
         <p:spPr>
           <a:xfrm>
-            <a:off x="2697480" y="1005840"/>
-            <a:ext cx="9174175" cy="731520"/>
+            <a:off x="1691640" y="1005840"/>
+            <a:ext cx="10180015" cy="731520"/>
           </a:xfrm>
           <a:prstGeom prst="rect">
             <a:avLst/>
@@ -17690,8 +17690,8 @@
         </p:nvSpPr>
         <p:spPr>
           <a:xfrm>
-            <a:off x="2697480" y="1783080"/>
-            <a:ext cx="9174175" cy="4663440"/>
+            <a:off x="1691640" y="1783080"/>
+            <a:ext cx="10180015" cy="4663440"/>
           </a:xfrm>
           <a:prstGeom prst="rect">
             <a:avLst/>
@@ -17718,7 +17718,7 @@
                 <a:ea typeface="Times New Roman" pitchFamily="34" charset="-122"/>
                 <a:cs typeface="Times New Roman" pitchFamily="34" charset="-120"/>
               </a:rPr>
-              <a:t>We calculate a real distance in the following steps:</a:t>
+              <a:t>We calculate a real distance as follows:</a:t>
             </a:r>
             <a:endParaRPr lang="en-US" sz="4000" dirty="0"/>
           </a:p>
@@ -17793,6 +17793,43 @@
                 <a:cs typeface="Times New Roman" pitchFamily="34" charset="-120"/>
               </a:rPr>
               <a:t>We multiply the map distance by the value of the scale.</a:t>
+            </a:r>
+            <a:endParaRPr lang="en-US" sz="4000" dirty="0"/>
+          </a:p>
+          <a:p>
+            <a:pPr algn="l" indent="0" marL="0">
+              <a:spcAft>
+                <a:spcPts val="800"/>
+              </a:spcAft>
+              <a:buNone/>
+            </a:pPr>
+            <a:r>
+              <a:rPr lang="en-US" sz="4000" b="1" dirty="0">
+                <a:solidFill>
+                  <a:srgbClr val="111111"/>
+                </a:solidFill>
+                <a:latin typeface="Times New Roman" pitchFamily="34" charset="0"/>
+                <a:ea typeface="Times New Roman" pitchFamily="34" charset="-122"/>
+                <a:cs typeface="Times New Roman" pitchFamily="34" charset="-120"/>
+              </a:rPr>
+              <a:t>Step 3: </a:t>
+            </a:r>
+            <a:pPr algn="l" indent="0" marL="0">
+              <a:spcAft>
+                <a:spcPts val="800"/>
+              </a:spcAft>
+              <a:buNone/>
+            </a:pPr>
+            <a:r>
+              <a:rPr lang="en-US" sz="4000" dirty="0">
+                <a:solidFill>
+                  <a:srgbClr val="111111"/>
+                </a:solidFill>
+                <a:latin typeface="Times New Roman" pitchFamily="34" charset="0"/>
+                <a:ea typeface="Times New Roman" pitchFamily="34" charset="-122"/>
+                <a:cs typeface="Times New Roman" pitchFamily="34" charset="-120"/>
+              </a:rPr>
+              <a:t>We write the answer in kilometres.</a:t>
             </a:r>
             <a:endParaRPr lang="en-US" sz="4000" dirty="0"/>
           </a:p>
@@ -17995,43 +18032,6 @@
         <p:txBody>
           <a:bodyPr wrap="square" lIns="0" tIns="0" rIns="0" bIns="0" rtlCol="0" anchor="t"/>
           <a:lstStyle/>
-          <a:p>
-            <a:pPr algn="l" indent="0" marL="0">
-              <a:spcAft>
-                <a:spcPts val="800"/>
-              </a:spcAft>
-              <a:buNone/>
-            </a:pPr>
-            <a:r>
-              <a:rPr lang="en-US" sz="4000" b="1" dirty="0">
-                <a:solidFill>
-                  <a:srgbClr val="111111"/>
-                </a:solidFill>
-                <a:latin typeface="Times New Roman" pitchFamily="34" charset="0"/>
-                <a:ea typeface="Times New Roman" pitchFamily="34" charset="-122"/>
-                <a:cs typeface="Times New Roman" pitchFamily="34" charset="-120"/>
-              </a:rPr>
-              <a:t>Step 3: </a:t>
-            </a:r>
-            <a:pPr algn="l" indent="0" marL="0">
-              <a:spcAft>
-                <a:spcPts val="800"/>
-              </a:spcAft>
-              <a:buNone/>
-            </a:pPr>
-            <a:r>
-              <a:rPr lang="en-US" sz="4000" dirty="0">
-                <a:solidFill>
-                  <a:srgbClr val="111111"/>
-                </a:solidFill>
-                <a:latin typeface="Times New Roman" pitchFamily="34" charset="0"/>
-                <a:ea typeface="Times New Roman" pitchFamily="34" charset="-122"/>
-                <a:cs typeface="Times New Roman" pitchFamily="34" charset="-120"/>
-              </a:rPr>
-              <a:t>We write the answer in kilometres.</a:t>
-            </a:r>
-            <a:endParaRPr lang="en-US" sz="4000" dirty="0"/>
-          </a:p>
           <a:p>
             <a:pPr algn="l" indent="0" marL="0">
               <a:spcAft>

--- a/lecons/F1/03_F1_M1_PW01_Representation_of_the_Earth_s_Shape_and_Size.pptx
+++ b/lecons/F1/03_F1_M1_PW01_Representation_of_the_Earth_s_Shape_and_Size.pptx
@@ -3465,7 +3465,7 @@
           <a:p>
             <a:r>
               <a:rPr lang="en-US" dirty="0"/>
-              <a:t>Before we start the new lesson, let us correct the homework I gave you at the end of Lesson 2: Our Planet, the Earth. The question was: On a map of the world in your atlas, find Cameroon, the Equator and the Greenwich Meridian. Take out your exercise books.</a:t>
+              <a:t>Before we start the new lesson, let us correct the homework I gave you at the end of Lesson 2: Our Planet, the Earth. The question was: Name three ways of representing the Earth. Take out your exercise books.</a:t>
             </a:r>
             <a:endParaRPr lang="en-US" dirty="0"/>
           </a:p>
@@ -4433,7 +4433,7 @@
           <a:p>
             <a:r>
               <a:rPr lang="en-US" dirty="0"/>
-              <a:t>Here is a good answer. Cameroon is in Central Africa, just north of the Equator (between about 2° N and 13° N) and east of the Greenwich Meridian (between about 8° E and 16° E). Compare it with your own answer and correct your work in red.</a:t>
+              <a:t>Here is a good answer. The globe, the world map and map projections. Compare it with your own answer and correct your work in red.</a:t>
             </a:r>
             <a:endParaRPr lang="en-US" dirty="0"/>
           </a:p>
@@ -4873,7 +4873,7 @@
           <a:p>
             <a:r>
               <a:rPr lang="en-US" dirty="0"/>
-              <a:t>For your homework: On the map of Cameroon in your atlas, measure the distance from Garoua to Ngaoundéré and change it into kilometres with the scale. We shall correct it at the beginning of our next lesson.</a:t>
+              <a:t>For your homework: Give the latitude of the Equator. We shall correct it at the beginning of our next lesson.</a:t>
             </a:r>
             <a:endParaRPr lang="en-US" dirty="0"/>
           </a:p>
@@ -15593,7 +15593,7 @@
                 <a:ea typeface="Times New Roman" pitchFamily="34" charset="-122"/>
                 <a:cs typeface="Times New Roman" pitchFamily="34" charset="-120"/>
               </a:rPr>
-              <a:t>On a map of the world in your atlas, find Cameroon, the Equator and the Greenwich Meridian.</a:t>
+              <a:t>Name three ways of representing the Earth.</a:t>
             </a:r>
             <a:endParaRPr lang="en-US" sz="4000" dirty="0"/>
           </a:p>
@@ -18503,7 +18503,7 @@
                 <a:ea typeface="Times New Roman" pitchFamily="34" charset="-122"/>
                 <a:cs typeface="Times New Roman" pitchFamily="34" charset="-120"/>
               </a:rPr>
-              <a:t>Cameroon is in Central Africa, just north of the Equator (between about 2° N and 13° N) and east of the Greenwich Meridian (between about 8° E and 16° E).</a:t>
+              <a:t>The globe, the world map and map projections.</a:t>
             </a:r>
             <a:endParaRPr lang="en-US" sz="4000" dirty="0"/>
           </a:p>
@@ -19664,7 +19664,7 @@
                 <a:ea typeface="Times New Roman" pitchFamily="34" charset="-122"/>
                 <a:cs typeface="Times New Roman" pitchFamily="34" charset="-120"/>
               </a:rPr>
-              <a:t>On the map of Cameroon in your atlas, measure the distance from Garoua to Ngaoundéré and change it into kilometres with the scale.</a:t>
+              <a:t>Give the latitude of the Equator.</a:t>
             </a:r>
             <a:endParaRPr lang="en-US" sz="4000" dirty="0"/>
           </a:p>
@@ -22328,7 +22328,7 @@
                           <a:ea typeface="Calibri" pitchFamily="34" charset="-122"/>
                           <a:cs typeface="Calibri" pitchFamily="34" charset="-120"/>
                         </a:rPr>
-                        <a:t>On the map of Cameroon in your atlas, measure the distance from Garoua to Ngaoundéré and change it into kilometres with the scale.</a:t>
+                        <a:t>Give the latitude of the Equator.</a:t>
                       </a:r>
                       <a:endParaRPr lang="en-US" sz="1600" dirty="0">
                         <a:latin typeface="Calibri" charset="0"/>
